--- a/Pseudo classes e pseudo elementos.pptx
+++ b/Pseudo classes e pseudo elementos.pptx
@@ -272,7 +272,7 @@
       <p15:sldGuideLst xmlns:p15="http://schemas.microsoft.com/office/powerpoint/2012/main"/>
     </p:ext>
     <p:ext uri="GoogleSlidesCustomDataVersion2">
-      <go:slidesCustomData xmlns:go="http://customooxmlschemas.google.com/" xmlns:ahyp="http://schemas.microsoft.com/office/drawing/2018/hyperlinkcolor" xmlns:p15="http://schemas.microsoft.com/office/powerpoint/2012/main" xmlns:p14="http://schemas.microsoft.com/office/powerpoint/2010/main" xmlns:com="http://schemas.openxmlformats.org/drawingml/2006/compatibility" xmlns:pvml="urn:schemas-microsoft-com:office:powerpoint" xmlns:v="urn:schemas-microsoft-com:vml" xmlns:o="urn:schemas-microsoft-com:office:office" xmlns:dgm="http://schemas.openxmlformats.org/drawingml/2006/diagram" xmlns:c="http://schemas.openxmlformats.org/drawingml/2006/chart" xmlns:mv="urn:schemas-microsoft-com:mac:vml" xmlns:mc="http://schemas.openxmlformats.org/markup-compatibility/2006" xmlns="" r:id="rId34" roundtripDataSignature="AMtx7mglmyuNyfniZk7EwCREKUJDiL+hgw=="/>
+      <go:slidesCustomData xmlns="" xmlns:mc="http://schemas.openxmlformats.org/markup-compatibility/2006" xmlns:mv="urn:schemas-microsoft-com:mac:vml" xmlns:c="http://schemas.openxmlformats.org/drawingml/2006/chart" xmlns:dgm="http://schemas.openxmlformats.org/drawingml/2006/diagram" xmlns:o="urn:schemas-microsoft-com:office:office" xmlns:v="urn:schemas-microsoft-com:vml" xmlns:pvml="urn:schemas-microsoft-com:office:powerpoint" xmlns:com="http://schemas.openxmlformats.org/drawingml/2006/compatibility" xmlns:p14="http://schemas.microsoft.com/office/powerpoint/2010/main" xmlns:p15="http://schemas.microsoft.com/office/powerpoint/2012/main" xmlns:ahyp="http://schemas.microsoft.com/office/drawing/2018/hyperlinkcolor" xmlns:go="http://customooxmlschemas.google.com/" r:id="rId34" roundtripDataSignature="AMtx7mglmyuNyfniZk7EwCREKUJDiL+hgw=="/>
     </p:ext>
   </p:extLst>
 </p:presentation>
@@ -8016,7 +8016,7 @@
                   </a:schemeClr>
                 </a:solidFill>
               </a:rPr>
-              <a:t>fist-child</a:t>
+              <a:t>first-child</a:t>
             </a:r>
             <a:r>
               <a:rPr lang="pt-BR" sz="4400" b="1" dirty="0">

--- a/Pseudo classes e pseudo elementos.pptx
+++ b/Pseudo classes e pseudo elementos.pptx
@@ -5,7 +5,7 @@
     <p:sldMasterId id="2147483648" r:id="rId1"/>
   </p:sldMasterIdLst>
   <p:notesMasterIdLst>
-    <p:notesMasterId r:id="rId29"/>
+    <p:notesMasterId r:id="rId25"/>
   </p:notesMasterIdLst>
   <p:sldIdLst>
     <p:sldId id="256" r:id="rId2"/>
@@ -16,25 +16,21 @@
     <p:sldId id="286" r:id="rId7"/>
     <p:sldId id="287" r:id="rId8"/>
     <p:sldId id="288" r:id="rId9"/>
-    <p:sldId id="265" r:id="rId10"/>
-    <p:sldId id="289" r:id="rId11"/>
-    <p:sldId id="290" r:id="rId12"/>
-    <p:sldId id="291" r:id="rId13"/>
-    <p:sldId id="269" r:id="rId14"/>
-    <p:sldId id="295" r:id="rId15"/>
-    <p:sldId id="292" r:id="rId16"/>
-    <p:sldId id="293" r:id="rId17"/>
-    <p:sldId id="294" r:id="rId18"/>
-    <p:sldId id="274" r:id="rId19"/>
-    <p:sldId id="296" r:id="rId20"/>
-    <p:sldId id="297" r:id="rId21"/>
-    <p:sldId id="300" r:id="rId22"/>
-    <p:sldId id="301" r:id="rId23"/>
-    <p:sldId id="303" r:id="rId24"/>
-    <p:sldId id="302" r:id="rId25"/>
-    <p:sldId id="281" r:id="rId26"/>
-    <p:sldId id="282" r:id="rId27"/>
-    <p:sldId id="283" r:id="rId28"/>
+    <p:sldId id="289" r:id="rId10"/>
+    <p:sldId id="290" r:id="rId11"/>
+    <p:sldId id="291" r:id="rId12"/>
+    <p:sldId id="295" r:id="rId13"/>
+    <p:sldId id="292" r:id="rId14"/>
+    <p:sldId id="293" r:id="rId15"/>
+    <p:sldId id="294" r:id="rId16"/>
+    <p:sldId id="296" r:id="rId17"/>
+    <p:sldId id="300" r:id="rId18"/>
+    <p:sldId id="301" r:id="rId19"/>
+    <p:sldId id="297" r:id="rId20"/>
+    <p:sldId id="303" r:id="rId21"/>
+    <p:sldId id="302" r:id="rId22"/>
+    <p:sldId id="282" r:id="rId23"/>
+    <p:sldId id="283" r:id="rId24"/>
   </p:sldIdLst>
   <p:sldSz cx="12192000" cy="6858000"/>
   <p:notesSz cx="6858000" cy="9144000"/>
@@ -272,7 +268,7 @@
       <p15:sldGuideLst xmlns:p15="http://schemas.microsoft.com/office/powerpoint/2012/main"/>
     </p:ext>
     <p:ext uri="GoogleSlidesCustomDataVersion2">
-      <go:slidesCustomData xmlns="" xmlns:mc="http://schemas.openxmlformats.org/markup-compatibility/2006" xmlns:mv="urn:schemas-microsoft-com:mac:vml" xmlns:c="http://schemas.openxmlformats.org/drawingml/2006/chart" xmlns:dgm="http://schemas.openxmlformats.org/drawingml/2006/diagram" xmlns:o="urn:schemas-microsoft-com:office:office" xmlns:v="urn:schemas-microsoft-com:vml" xmlns:pvml="urn:schemas-microsoft-com:office:powerpoint" xmlns:com="http://schemas.openxmlformats.org/drawingml/2006/compatibility" xmlns:p14="http://schemas.microsoft.com/office/powerpoint/2010/main" xmlns:p15="http://schemas.microsoft.com/office/powerpoint/2012/main" xmlns:ahyp="http://schemas.microsoft.com/office/drawing/2018/hyperlinkcolor" xmlns:go="http://customooxmlschemas.google.com/" r:id="rId34" roundtripDataSignature="AMtx7mglmyuNyfniZk7EwCREKUJDiL+hgw=="/>
+      <go:slidesCustomData xmlns:go="http://customooxmlschemas.google.com/" xmlns:ahyp="http://schemas.microsoft.com/office/drawing/2018/hyperlinkcolor" xmlns:p15="http://schemas.microsoft.com/office/powerpoint/2012/main" xmlns:p14="http://schemas.microsoft.com/office/powerpoint/2010/main" xmlns:com="http://schemas.openxmlformats.org/drawingml/2006/compatibility" xmlns:pvml="urn:schemas-microsoft-com:office:powerpoint" xmlns:v="urn:schemas-microsoft-com:vml" xmlns:o="urn:schemas-microsoft-com:office:office" xmlns:dgm="http://schemas.openxmlformats.org/drawingml/2006/diagram" xmlns:c="http://schemas.openxmlformats.org/drawingml/2006/chart" xmlns:mv="urn:schemas-microsoft-com:mac:vml" xmlns:mc="http://schemas.openxmlformats.org/markup-compatibility/2006" xmlns="" r:id="rId34" roundtripDataSignature="AMtx7mglmyuNyfniZk7EwCREKUJDiL+hgw=="/>
     </p:ext>
   </p:extLst>
 </p:presentation>
@@ -2126,526 +2122,6 @@
   <p:cSld>
     <p:spTree>
       <p:nvGrpSpPr>
-        <p:cNvPr id="1" name="Shape 117"/>
-        <p:cNvGrpSpPr/>
-        <p:nvPr/>
-      </p:nvGrpSpPr>
-      <p:grpSpPr>
-        <a:xfrm>
-          <a:off x="0" y="0"/>
-          <a:ext cx="0" cy="0"/>
-          <a:chOff x="0" y="0"/>
-          <a:chExt cx="0" cy="0"/>
-        </a:xfrm>
-      </p:grpSpPr>
-      <p:sp>
-        <p:nvSpPr>
-          <p:cNvPr id="118" name="Google Shape;118;p10:notes"/>
-          <p:cNvSpPr txBox="1">
-            <a:spLocks noGrp="1"/>
-          </p:cNvSpPr>
-          <p:nvPr>
-            <p:ph type="body" idx="1"/>
-          </p:nvPr>
-        </p:nvSpPr>
-        <p:spPr>
-          <a:xfrm>
-            <a:off x="685800" y="4400550"/>
-            <a:ext cx="5486400" cy="3600450"/>
-          </a:xfrm>
-          <a:prstGeom prst="rect">
-            <a:avLst/>
-          </a:prstGeom>
-          <a:noFill/>
-          <a:ln>
-            <a:noFill/>
-          </a:ln>
-        </p:spPr>
-        <p:txBody>
-          <a:bodyPr spcFirstLastPara="1" wrap="square" lIns="91425" tIns="45700" rIns="91425" bIns="45700" anchor="t" anchorCtr="0">
-            <a:noAutofit/>
-          </a:bodyPr>
-          <a:lstStyle/>
-          <a:p>
-            <a:pPr marL="0" lvl="0" indent="0" algn="l" rtl="0">
-              <a:lnSpc>
-                <a:spcPct val="100000"/>
-              </a:lnSpc>
-              <a:spcBef>
-                <a:spcPts val="0"/>
-              </a:spcBef>
-              <a:spcAft>
-                <a:spcPts val="0"/>
-              </a:spcAft>
-              <a:buSzPts val="1400"/>
-              <a:buNone/>
-            </a:pPr>
-            <a:endParaRPr sz="1200" b="0" i="0" u="none" strike="noStrike" cap="none">
-              <a:solidFill>
-                <a:schemeClr val="dk1"/>
-              </a:solidFill>
-              <a:latin typeface="Calibri"/>
-              <a:ea typeface="Calibri"/>
-              <a:cs typeface="Calibri"/>
-              <a:sym typeface="Calibri"/>
-            </a:endParaRPr>
-          </a:p>
-        </p:txBody>
-      </p:sp>
-      <p:sp>
-        <p:nvSpPr>
-          <p:cNvPr id="119" name="Google Shape;119;p10:notes"/>
-          <p:cNvSpPr>
-            <a:spLocks noGrp="1" noRot="1" noChangeAspect="1"/>
-          </p:cNvSpPr>
-          <p:nvPr>
-            <p:ph type="sldImg" idx="2"/>
-          </p:nvPr>
-        </p:nvSpPr>
-        <p:spPr>
-          <a:xfrm>
-            <a:off x="685800" y="1143000"/>
-            <a:ext cx="5486400" cy="3086100"/>
-          </a:xfrm>
-          <a:custGeom>
-            <a:avLst/>
-            <a:gdLst/>
-            <a:ahLst/>
-            <a:cxnLst/>
-            <a:rect l="l" t="t" r="r" b="b"/>
-            <a:pathLst>
-              <a:path w="120000" h="120000" extrusionOk="0">
-                <a:moveTo>
-                  <a:pt x="0" y="0"/>
-                </a:moveTo>
-                <a:lnTo>
-                  <a:pt x="120000" y="0"/>
-                </a:lnTo>
-                <a:lnTo>
-                  <a:pt x="120000" y="120000"/>
-                </a:lnTo>
-                <a:lnTo>
-                  <a:pt x="0" y="120000"/>
-                </a:lnTo>
-                <a:close/>
-              </a:path>
-            </a:pathLst>
-          </a:custGeom>
-          <a:noFill/>
-          <a:ln w="12700" cap="flat" cmpd="sng">
-            <a:solidFill>
-              <a:srgbClr val="000000"/>
-            </a:solidFill>
-            <a:prstDash val="solid"/>
-            <a:round/>
-            <a:headEnd type="none" w="sm" len="sm"/>
-            <a:tailEnd type="none" w="sm" len="sm"/>
-          </a:ln>
-        </p:spPr>
-      </p:sp>
-    </p:spTree>
-  </p:cSld>
-  <p:clrMapOvr>
-    <a:masterClrMapping/>
-  </p:clrMapOvr>
-</p:notes>
-</file>
-
-<file path=ppt/notesSlides/notesSlide5.xml><?xml version="1.0" encoding="utf-8"?>
-<p:notes xmlns:a="http://schemas.openxmlformats.org/drawingml/2006/main" xmlns:r="http://schemas.openxmlformats.org/officeDocument/2006/relationships" xmlns:p="http://schemas.openxmlformats.org/presentationml/2006/main" showMasterSp="0" showMasterPhAnim="0">
-  <p:cSld>
-    <p:spTree>
-      <p:nvGrpSpPr>
-        <p:cNvPr id="1" name="Shape 151"/>
-        <p:cNvGrpSpPr/>
-        <p:nvPr/>
-      </p:nvGrpSpPr>
-      <p:grpSpPr>
-        <a:xfrm>
-          <a:off x="0" y="0"/>
-          <a:ext cx="0" cy="0"/>
-          <a:chOff x="0" y="0"/>
-          <a:chExt cx="0" cy="0"/>
-        </a:xfrm>
-      </p:grpSpPr>
-      <p:sp>
-        <p:nvSpPr>
-          <p:cNvPr id="152" name="Google Shape;152;p14:notes"/>
-          <p:cNvSpPr txBox="1">
-            <a:spLocks noGrp="1"/>
-          </p:cNvSpPr>
-          <p:nvPr>
-            <p:ph type="body" idx="1"/>
-          </p:nvPr>
-        </p:nvSpPr>
-        <p:spPr>
-          <a:xfrm>
-            <a:off x="685800" y="4400550"/>
-            <a:ext cx="5486400" cy="3600450"/>
-          </a:xfrm>
-          <a:prstGeom prst="rect">
-            <a:avLst/>
-          </a:prstGeom>
-          <a:noFill/>
-          <a:ln>
-            <a:noFill/>
-          </a:ln>
-        </p:spPr>
-        <p:txBody>
-          <a:bodyPr spcFirstLastPara="1" wrap="square" lIns="91425" tIns="45700" rIns="91425" bIns="45700" anchor="t" anchorCtr="0">
-            <a:noAutofit/>
-          </a:bodyPr>
-          <a:lstStyle/>
-          <a:p>
-            <a:pPr marL="0" lvl="0" indent="0" algn="l" rtl="0">
-              <a:lnSpc>
-                <a:spcPct val="100000"/>
-              </a:lnSpc>
-              <a:spcBef>
-                <a:spcPts val="0"/>
-              </a:spcBef>
-              <a:spcAft>
-                <a:spcPts val="0"/>
-              </a:spcAft>
-              <a:buSzPts val="1400"/>
-              <a:buNone/>
-            </a:pPr>
-            <a:endParaRPr sz="1200" b="0" i="0" u="none" strike="noStrike" cap="none">
-              <a:solidFill>
-                <a:schemeClr val="dk1"/>
-              </a:solidFill>
-              <a:latin typeface="Calibri"/>
-              <a:ea typeface="Calibri"/>
-              <a:cs typeface="Calibri"/>
-              <a:sym typeface="Calibri"/>
-            </a:endParaRPr>
-          </a:p>
-        </p:txBody>
-      </p:sp>
-      <p:sp>
-        <p:nvSpPr>
-          <p:cNvPr id="153" name="Google Shape;153;p14:notes"/>
-          <p:cNvSpPr>
-            <a:spLocks noGrp="1" noRot="1" noChangeAspect="1"/>
-          </p:cNvSpPr>
-          <p:nvPr>
-            <p:ph type="sldImg" idx="2"/>
-          </p:nvPr>
-        </p:nvSpPr>
-        <p:spPr>
-          <a:xfrm>
-            <a:off x="685800" y="1143000"/>
-            <a:ext cx="5486400" cy="3086100"/>
-          </a:xfrm>
-          <a:custGeom>
-            <a:avLst/>
-            <a:gdLst/>
-            <a:ahLst/>
-            <a:cxnLst/>
-            <a:rect l="l" t="t" r="r" b="b"/>
-            <a:pathLst>
-              <a:path w="120000" h="120000" extrusionOk="0">
-                <a:moveTo>
-                  <a:pt x="0" y="0"/>
-                </a:moveTo>
-                <a:lnTo>
-                  <a:pt x="120000" y="0"/>
-                </a:lnTo>
-                <a:lnTo>
-                  <a:pt x="120000" y="120000"/>
-                </a:lnTo>
-                <a:lnTo>
-                  <a:pt x="0" y="120000"/>
-                </a:lnTo>
-                <a:close/>
-              </a:path>
-            </a:pathLst>
-          </a:custGeom>
-          <a:noFill/>
-          <a:ln w="12700" cap="flat" cmpd="sng">
-            <a:solidFill>
-              <a:srgbClr val="000000"/>
-            </a:solidFill>
-            <a:prstDash val="solid"/>
-            <a:round/>
-            <a:headEnd type="none" w="sm" len="sm"/>
-            <a:tailEnd type="none" w="sm" len="sm"/>
-          </a:ln>
-        </p:spPr>
-      </p:sp>
-    </p:spTree>
-  </p:cSld>
-  <p:clrMapOvr>
-    <a:masterClrMapping/>
-  </p:clrMapOvr>
-</p:notes>
-</file>
-
-<file path=ppt/notesSlides/notesSlide6.xml><?xml version="1.0" encoding="utf-8"?>
-<p:notes xmlns:a="http://schemas.openxmlformats.org/drawingml/2006/main" xmlns:r="http://schemas.openxmlformats.org/officeDocument/2006/relationships" xmlns:p="http://schemas.openxmlformats.org/presentationml/2006/main" showMasterSp="0" showMasterPhAnim="0">
-  <p:cSld>
-    <p:spTree>
-      <p:nvGrpSpPr>
-        <p:cNvPr id="1" name="Shape 195"/>
-        <p:cNvGrpSpPr/>
-        <p:nvPr/>
-      </p:nvGrpSpPr>
-      <p:grpSpPr>
-        <a:xfrm>
-          <a:off x="0" y="0"/>
-          <a:ext cx="0" cy="0"/>
-          <a:chOff x="0" y="0"/>
-          <a:chExt cx="0" cy="0"/>
-        </a:xfrm>
-      </p:grpSpPr>
-      <p:sp>
-        <p:nvSpPr>
-          <p:cNvPr id="196" name="Google Shape;196;p19:notes"/>
-          <p:cNvSpPr txBox="1">
-            <a:spLocks noGrp="1"/>
-          </p:cNvSpPr>
-          <p:nvPr>
-            <p:ph type="body" idx="1"/>
-          </p:nvPr>
-        </p:nvSpPr>
-        <p:spPr>
-          <a:xfrm>
-            <a:off x="685800" y="4400550"/>
-            <a:ext cx="5486400" cy="3600450"/>
-          </a:xfrm>
-          <a:prstGeom prst="rect">
-            <a:avLst/>
-          </a:prstGeom>
-          <a:noFill/>
-          <a:ln>
-            <a:noFill/>
-          </a:ln>
-        </p:spPr>
-        <p:txBody>
-          <a:bodyPr spcFirstLastPara="1" wrap="square" lIns="91425" tIns="45700" rIns="91425" bIns="45700" anchor="t" anchorCtr="0">
-            <a:noAutofit/>
-          </a:bodyPr>
-          <a:lstStyle/>
-          <a:p>
-            <a:pPr marL="0" lvl="0" indent="0" algn="l" rtl="0">
-              <a:lnSpc>
-                <a:spcPct val="100000"/>
-              </a:lnSpc>
-              <a:spcBef>
-                <a:spcPts val="0"/>
-              </a:spcBef>
-              <a:spcAft>
-                <a:spcPts val="0"/>
-              </a:spcAft>
-              <a:buSzPts val="1400"/>
-              <a:buNone/>
-            </a:pPr>
-            <a:endParaRPr sz="1200" b="0" i="0" u="none" strike="noStrike" cap="none">
-              <a:solidFill>
-                <a:schemeClr val="dk1"/>
-              </a:solidFill>
-              <a:latin typeface="Calibri"/>
-              <a:ea typeface="Calibri"/>
-              <a:cs typeface="Calibri"/>
-              <a:sym typeface="Calibri"/>
-            </a:endParaRPr>
-          </a:p>
-        </p:txBody>
-      </p:sp>
-      <p:sp>
-        <p:nvSpPr>
-          <p:cNvPr id="197" name="Google Shape;197;p19:notes"/>
-          <p:cNvSpPr>
-            <a:spLocks noGrp="1" noRot="1" noChangeAspect="1"/>
-          </p:cNvSpPr>
-          <p:nvPr>
-            <p:ph type="sldImg" idx="2"/>
-          </p:nvPr>
-        </p:nvSpPr>
-        <p:spPr>
-          <a:xfrm>
-            <a:off x="685800" y="1143000"/>
-            <a:ext cx="5486400" cy="3086100"/>
-          </a:xfrm>
-          <a:custGeom>
-            <a:avLst/>
-            <a:gdLst/>
-            <a:ahLst/>
-            <a:cxnLst/>
-            <a:rect l="l" t="t" r="r" b="b"/>
-            <a:pathLst>
-              <a:path w="120000" h="120000" extrusionOk="0">
-                <a:moveTo>
-                  <a:pt x="0" y="0"/>
-                </a:moveTo>
-                <a:lnTo>
-                  <a:pt x="120000" y="0"/>
-                </a:lnTo>
-                <a:lnTo>
-                  <a:pt x="120000" y="120000"/>
-                </a:lnTo>
-                <a:lnTo>
-                  <a:pt x="0" y="120000"/>
-                </a:lnTo>
-                <a:close/>
-              </a:path>
-            </a:pathLst>
-          </a:custGeom>
-          <a:noFill/>
-          <a:ln w="12700" cap="flat" cmpd="sng">
-            <a:solidFill>
-              <a:srgbClr val="000000"/>
-            </a:solidFill>
-            <a:prstDash val="solid"/>
-            <a:round/>
-            <a:headEnd type="none" w="sm" len="sm"/>
-            <a:tailEnd type="none" w="sm" len="sm"/>
-          </a:ln>
-        </p:spPr>
-      </p:sp>
-    </p:spTree>
-  </p:cSld>
-  <p:clrMapOvr>
-    <a:masterClrMapping/>
-  </p:clrMapOvr>
-</p:notes>
-</file>
-
-<file path=ppt/notesSlides/notesSlide7.xml><?xml version="1.0" encoding="utf-8"?>
-<p:notes xmlns:a="http://schemas.openxmlformats.org/drawingml/2006/main" xmlns:r="http://schemas.openxmlformats.org/officeDocument/2006/relationships" xmlns:p="http://schemas.openxmlformats.org/presentationml/2006/main" showMasterSp="0" showMasterPhAnim="0">
-  <p:cSld>
-    <p:spTree>
-      <p:nvGrpSpPr>
-        <p:cNvPr id="1" name="Shape 256"/>
-        <p:cNvGrpSpPr/>
-        <p:nvPr/>
-      </p:nvGrpSpPr>
-      <p:grpSpPr>
-        <a:xfrm>
-          <a:off x="0" y="0"/>
-          <a:ext cx="0" cy="0"/>
-          <a:chOff x="0" y="0"/>
-          <a:chExt cx="0" cy="0"/>
-        </a:xfrm>
-      </p:grpSpPr>
-      <p:sp>
-        <p:nvSpPr>
-          <p:cNvPr id="257" name="Google Shape;257;p26:notes"/>
-          <p:cNvSpPr txBox="1">
-            <a:spLocks noGrp="1"/>
-          </p:cNvSpPr>
-          <p:nvPr>
-            <p:ph type="body" idx="1"/>
-          </p:nvPr>
-        </p:nvSpPr>
-        <p:spPr>
-          <a:xfrm>
-            <a:off x="685800" y="4400550"/>
-            <a:ext cx="5486400" cy="3600450"/>
-          </a:xfrm>
-          <a:prstGeom prst="rect">
-            <a:avLst/>
-          </a:prstGeom>
-          <a:noFill/>
-          <a:ln>
-            <a:noFill/>
-          </a:ln>
-        </p:spPr>
-        <p:txBody>
-          <a:bodyPr spcFirstLastPara="1" wrap="square" lIns="91425" tIns="45700" rIns="91425" bIns="45700" anchor="t" anchorCtr="0">
-            <a:noAutofit/>
-          </a:bodyPr>
-          <a:lstStyle/>
-          <a:p>
-            <a:pPr marL="0" lvl="0" indent="0" algn="l" rtl="0">
-              <a:lnSpc>
-                <a:spcPct val="100000"/>
-              </a:lnSpc>
-              <a:spcBef>
-                <a:spcPts val="0"/>
-              </a:spcBef>
-              <a:spcAft>
-                <a:spcPts val="0"/>
-              </a:spcAft>
-              <a:buSzPts val="1400"/>
-              <a:buNone/>
-            </a:pPr>
-            <a:endParaRPr sz="1200" b="0" i="0" u="none" strike="noStrike" cap="none">
-              <a:solidFill>
-                <a:schemeClr val="dk1"/>
-              </a:solidFill>
-              <a:latin typeface="Calibri"/>
-              <a:ea typeface="Calibri"/>
-              <a:cs typeface="Calibri"/>
-              <a:sym typeface="Calibri"/>
-            </a:endParaRPr>
-          </a:p>
-        </p:txBody>
-      </p:sp>
-      <p:sp>
-        <p:nvSpPr>
-          <p:cNvPr id="258" name="Google Shape;258;p26:notes"/>
-          <p:cNvSpPr>
-            <a:spLocks noGrp="1" noRot="1" noChangeAspect="1"/>
-          </p:cNvSpPr>
-          <p:nvPr>
-            <p:ph type="sldImg" idx="2"/>
-          </p:nvPr>
-        </p:nvSpPr>
-        <p:spPr>
-          <a:xfrm>
-            <a:off x="685800" y="1143000"/>
-            <a:ext cx="5486400" cy="3086100"/>
-          </a:xfrm>
-          <a:custGeom>
-            <a:avLst/>
-            <a:gdLst/>
-            <a:ahLst/>
-            <a:cxnLst/>
-            <a:rect l="l" t="t" r="r" b="b"/>
-            <a:pathLst>
-              <a:path w="120000" h="120000" extrusionOk="0">
-                <a:moveTo>
-                  <a:pt x="0" y="0"/>
-                </a:moveTo>
-                <a:lnTo>
-                  <a:pt x="120000" y="0"/>
-                </a:lnTo>
-                <a:lnTo>
-                  <a:pt x="120000" y="120000"/>
-                </a:lnTo>
-                <a:lnTo>
-                  <a:pt x="0" y="120000"/>
-                </a:lnTo>
-                <a:close/>
-              </a:path>
-            </a:pathLst>
-          </a:custGeom>
-          <a:noFill/>
-          <a:ln w="12700" cap="flat" cmpd="sng">
-            <a:solidFill>
-              <a:srgbClr val="000000"/>
-            </a:solidFill>
-            <a:prstDash val="solid"/>
-            <a:round/>
-            <a:headEnd type="none" w="sm" len="sm"/>
-            <a:tailEnd type="none" w="sm" len="sm"/>
-          </a:ln>
-        </p:spPr>
-      </p:sp>
-    </p:spTree>
-  </p:cSld>
-  <p:clrMapOvr>
-    <a:masterClrMapping/>
-  </p:clrMapOvr>
-</p:notes>
-</file>
-
-<file path=ppt/notesSlides/notesSlide8.xml><?xml version="1.0" encoding="utf-8"?>
-<p:notes xmlns:a="http://schemas.openxmlformats.org/drawingml/2006/main" xmlns:r="http://schemas.openxmlformats.org/officeDocument/2006/relationships" xmlns:p="http://schemas.openxmlformats.org/presentationml/2006/main" showMasterSp="0" showMasterPhAnim="0">
-  <p:cSld>
-    <p:spTree>
-      <p:nvGrpSpPr>
         <p:cNvPr id="1" name="Shape 263"/>
         <p:cNvGrpSpPr/>
         <p:nvPr/>
@@ -2771,7 +2247,7 @@
 </p:notes>
 </file>
 
-<file path=ppt/notesSlides/notesSlide9.xml><?xml version="1.0" encoding="utf-8"?>
+<file path=ppt/notesSlides/notesSlide5.xml><?xml version="1.0" encoding="utf-8"?>
 <p:notes xmlns:a="http://schemas.openxmlformats.org/drawingml/2006/main" xmlns:r="http://schemas.openxmlformats.org/officeDocument/2006/relationships" xmlns:p="http://schemas.openxmlformats.org/presentationml/2006/main" showMasterSp="0" showMasterPhAnim="0">
   <p:cSld>
     <p:spTree>
@@ -7462,1528 +6938,6 @@
         <p:cNvPr id="1" name="">
           <a:extLst>
             <a:ext uri="{FF2B5EF4-FFF2-40B4-BE49-F238E27FC236}">
-              <a16:creationId xmlns:a16="http://schemas.microsoft.com/office/drawing/2014/main" id="{BB1CF933-984F-C354-820A-2395D7409B79}"/>
-            </a:ext>
-          </a:extLst>
-        </p:cNvPr>
-        <p:cNvGrpSpPr/>
-        <p:nvPr/>
-      </p:nvGrpSpPr>
-      <p:grpSpPr>
-        <a:xfrm>
-          <a:off x="0" y="0"/>
-          <a:ext cx="0" cy="0"/>
-          <a:chOff x="0" y="0"/>
-          <a:chExt cx="0" cy="0"/>
-        </a:xfrm>
-      </p:grpSpPr>
-      <p:sp>
-        <p:nvSpPr>
-          <p:cNvPr id="8" name="Retângulo 7">
-            <a:extLst>
-              <a:ext uri="{FF2B5EF4-FFF2-40B4-BE49-F238E27FC236}">
-                <a16:creationId xmlns:a16="http://schemas.microsoft.com/office/drawing/2014/main" id="{D48A15A2-90B8-0D3A-6AA1-F15BEDFC55C0}"/>
-              </a:ext>
-            </a:extLst>
-          </p:cNvPr>
-          <p:cNvSpPr/>
-          <p:nvPr/>
-        </p:nvSpPr>
-        <p:spPr>
-          <a:xfrm>
-            <a:off x="0" y="0"/>
-            <a:ext cx="12192000" cy="6858000"/>
-          </a:xfrm>
-          <a:prstGeom prst="rect">
-            <a:avLst/>
-          </a:prstGeom>
-          <a:solidFill>
-            <a:schemeClr val="tx1">
-              <a:lumMod val="85000"/>
-              <a:lumOff val="15000"/>
-            </a:schemeClr>
-          </a:solidFill>
-        </p:spPr>
-        <p:style>
-          <a:lnRef idx="2">
-            <a:schemeClr val="dk1">
-              <a:shade val="15000"/>
-            </a:schemeClr>
-          </a:lnRef>
-          <a:fillRef idx="1">
-            <a:schemeClr val="dk1"/>
-          </a:fillRef>
-          <a:effectRef idx="0">
-            <a:schemeClr val="dk1"/>
-          </a:effectRef>
-          <a:fontRef idx="minor">
-            <a:schemeClr val="lt1"/>
-          </a:fontRef>
-        </p:style>
-        <p:txBody>
-          <a:bodyPr rtlCol="0" anchor="ctr"/>
-          <a:lstStyle/>
-          <a:p>
-            <a:pPr algn="ctr"/>
-            <a:endParaRPr lang="pt-BR" dirty="0"/>
-          </a:p>
-        </p:txBody>
-      </p:sp>
-      <p:sp>
-        <p:nvSpPr>
-          <p:cNvPr id="3" name="Espaço Reservado para Número de Slide 2">
-            <a:extLst>
-              <a:ext uri="{FF2B5EF4-FFF2-40B4-BE49-F238E27FC236}">
-                <a16:creationId xmlns:a16="http://schemas.microsoft.com/office/drawing/2014/main" id="{5E2738F2-39B9-F4B6-BB37-7A6005386937}"/>
-              </a:ext>
-            </a:extLst>
-          </p:cNvPr>
-          <p:cNvSpPr>
-            <a:spLocks noGrp="1"/>
-          </p:cNvSpPr>
-          <p:nvPr>
-            <p:ph type="sldNum" idx="4294967295"/>
-          </p:nvPr>
-        </p:nvSpPr>
-        <p:spPr>
-          <a:xfrm>
-            <a:off x="11353800" y="5594350"/>
-            <a:ext cx="838200" cy="365125"/>
-          </a:xfrm>
-        </p:spPr>
-        <p:txBody>
-          <a:bodyPr/>
-          <a:lstStyle/>
-          <a:p>
-            <a:pPr lvl="0"/>
-            <a:fld id="{00000000-1234-1234-1234-123412341234}" type="slidenum">
-              <a:rPr lang="pt-BR" smtClean="0"/>
-              <a:pPr lvl="0"/>
-              <a:t>10</a:t>
-            </a:fld>
-            <a:endParaRPr lang="pt-BR"/>
-          </a:p>
-        </p:txBody>
-      </p:sp>
-      <p:pic>
-        <p:nvPicPr>
-          <p:cNvPr id="7" name="Imagem 6">
-            <a:extLst>
-              <a:ext uri="{FF2B5EF4-FFF2-40B4-BE49-F238E27FC236}">
-                <a16:creationId xmlns:a16="http://schemas.microsoft.com/office/drawing/2014/main" id="{14D34A8C-1606-8DAB-EC13-C5C5D779A9C3}"/>
-              </a:ext>
-            </a:extLst>
-          </p:cNvPr>
-          <p:cNvPicPr>
-            <a:picLocks noChangeAspect="1"/>
-          </p:cNvPicPr>
-          <p:nvPr/>
-        </p:nvPicPr>
-        <p:blipFill>
-          <a:blip r:embed="rId2"/>
-          <a:stretch>
-            <a:fillRect/>
-          </a:stretch>
-        </p:blipFill>
-        <p:spPr>
-          <a:xfrm>
-            <a:off x="-215900" y="-71438"/>
-            <a:ext cx="12522201" cy="7043738"/>
-          </a:xfrm>
-          <a:prstGeom prst="rect">
-            <a:avLst/>
-          </a:prstGeom>
-        </p:spPr>
-      </p:pic>
-      <p:cxnSp>
-        <p:nvCxnSpPr>
-          <p:cNvPr id="18" name="Conector reto 17">
-            <a:extLst>
-              <a:ext uri="{FF2B5EF4-FFF2-40B4-BE49-F238E27FC236}">
-                <a16:creationId xmlns:a16="http://schemas.microsoft.com/office/drawing/2014/main" id="{C6EEA2D4-21E2-6C37-80B9-ED79C003DF4E}"/>
-              </a:ext>
-            </a:extLst>
-          </p:cNvPr>
-          <p:cNvCxnSpPr>
-            <a:cxnSpLocks/>
-          </p:cNvCxnSpPr>
-          <p:nvPr/>
-        </p:nvCxnSpPr>
-        <p:spPr>
-          <a:xfrm>
-            <a:off x="856932" y="743587"/>
-            <a:ext cx="0" cy="828040"/>
-          </a:xfrm>
-          <a:prstGeom prst="line">
-            <a:avLst/>
-          </a:prstGeom>
-          <a:ln>
-            <a:solidFill>
-              <a:srgbClr val="ED145B"/>
-            </a:solidFill>
-          </a:ln>
-        </p:spPr>
-        <p:style>
-          <a:lnRef idx="3">
-            <a:schemeClr val="dk1"/>
-          </a:lnRef>
-          <a:fillRef idx="0">
-            <a:schemeClr val="dk1"/>
-          </a:fillRef>
-          <a:effectRef idx="2">
-            <a:schemeClr val="dk1"/>
-          </a:effectRef>
-          <a:fontRef idx="minor">
-            <a:schemeClr val="tx1"/>
-          </a:fontRef>
-        </p:style>
-      </p:cxnSp>
-      <p:sp>
-        <p:nvSpPr>
-          <p:cNvPr id="22" name="Google Shape;85;p6">
-            <a:extLst>
-              <a:ext uri="{FF2B5EF4-FFF2-40B4-BE49-F238E27FC236}">
-                <a16:creationId xmlns:a16="http://schemas.microsoft.com/office/drawing/2014/main" id="{3E2C7A9D-27FD-5960-C404-8C320F368F8E}"/>
-              </a:ext>
-            </a:extLst>
-          </p:cNvPr>
-          <p:cNvSpPr txBox="1">
-            <a:spLocks/>
-          </p:cNvSpPr>
-          <p:nvPr/>
-        </p:nvSpPr>
-        <p:spPr>
-          <a:xfrm>
-            <a:off x="945515" y="664529"/>
-            <a:ext cx="10300970" cy="986155"/>
-          </a:xfrm>
-          <a:prstGeom prst="rect">
-            <a:avLst/>
-          </a:prstGeom>
-          <a:noFill/>
-          <a:ln>
-            <a:noFill/>
-          </a:ln>
-        </p:spPr>
-        <p:txBody>
-          <a:bodyPr spcFirstLastPara="1" wrap="square" lIns="91425" tIns="45700" rIns="91425" bIns="45700" anchor="ctr" anchorCtr="0">
-            <a:noAutofit/>
-          </a:bodyPr>
-          <a:lstStyle>
-            <a:defPPr marR="0" lvl="0" algn="l" rtl="0">
-              <a:lnSpc>
-                <a:spcPct val="100000"/>
-              </a:lnSpc>
-              <a:spcBef>
-                <a:spcPts val="0"/>
-              </a:spcBef>
-              <a:spcAft>
-                <a:spcPts val="0"/>
-              </a:spcAft>
-            </a:defPPr>
-            <a:lvl1pPr marR="0" lvl="0" algn="l" rtl="0">
-              <a:lnSpc>
-                <a:spcPct val="100000"/>
-              </a:lnSpc>
-              <a:spcBef>
-                <a:spcPts val="0"/>
-              </a:spcBef>
-              <a:spcAft>
-                <a:spcPts val="0"/>
-              </a:spcAft>
-              <a:buClr>
-                <a:srgbClr val="000000"/>
-              </a:buClr>
-              <a:buFont typeface="Arial"/>
-              <a:defRPr sz="1400" b="0" i="0" u="none" strike="noStrike" cap="none">
-                <a:solidFill>
-                  <a:srgbClr val="000000"/>
-                </a:solidFill>
-                <a:latin typeface="Arial"/>
-                <a:ea typeface="Arial"/>
-                <a:cs typeface="Arial"/>
-                <a:sym typeface="Arial"/>
-              </a:defRPr>
-            </a:lvl1pPr>
-            <a:lvl2pPr marR="0" lvl="1" algn="l" rtl="0">
-              <a:lnSpc>
-                <a:spcPct val="100000"/>
-              </a:lnSpc>
-              <a:spcBef>
-                <a:spcPts val="0"/>
-              </a:spcBef>
-              <a:spcAft>
-                <a:spcPts val="0"/>
-              </a:spcAft>
-              <a:buClr>
-                <a:srgbClr val="000000"/>
-              </a:buClr>
-              <a:buFont typeface="Arial"/>
-              <a:defRPr sz="1400" b="0" i="0" u="none" strike="noStrike" cap="none">
-                <a:solidFill>
-                  <a:srgbClr val="000000"/>
-                </a:solidFill>
-                <a:latin typeface="Arial"/>
-                <a:ea typeface="Arial"/>
-                <a:cs typeface="Arial"/>
-                <a:sym typeface="Arial"/>
-              </a:defRPr>
-            </a:lvl2pPr>
-            <a:lvl3pPr marR="0" lvl="2" algn="l" rtl="0">
-              <a:lnSpc>
-                <a:spcPct val="100000"/>
-              </a:lnSpc>
-              <a:spcBef>
-                <a:spcPts val="0"/>
-              </a:spcBef>
-              <a:spcAft>
-                <a:spcPts val="0"/>
-              </a:spcAft>
-              <a:buClr>
-                <a:srgbClr val="000000"/>
-              </a:buClr>
-              <a:buFont typeface="Arial"/>
-              <a:defRPr sz="1400" b="0" i="0" u="none" strike="noStrike" cap="none">
-                <a:solidFill>
-                  <a:srgbClr val="000000"/>
-                </a:solidFill>
-                <a:latin typeface="Arial"/>
-                <a:ea typeface="Arial"/>
-                <a:cs typeface="Arial"/>
-                <a:sym typeface="Arial"/>
-              </a:defRPr>
-            </a:lvl3pPr>
-            <a:lvl4pPr marR="0" lvl="3" algn="l" rtl="0">
-              <a:lnSpc>
-                <a:spcPct val="100000"/>
-              </a:lnSpc>
-              <a:spcBef>
-                <a:spcPts val="0"/>
-              </a:spcBef>
-              <a:spcAft>
-                <a:spcPts val="0"/>
-              </a:spcAft>
-              <a:buClr>
-                <a:srgbClr val="000000"/>
-              </a:buClr>
-              <a:buFont typeface="Arial"/>
-              <a:defRPr sz="1400" b="0" i="0" u="none" strike="noStrike" cap="none">
-                <a:solidFill>
-                  <a:srgbClr val="000000"/>
-                </a:solidFill>
-                <a:latin typeface="Arial"/>
-                <a:ea typeface="Arial"/>
-                <a:cs typeface="Arial"/>
-                <a:sym typeface="Arial"/>
-              </a:defRPr>
-            </a:lvl4pPr>
-            <a:lvl5pPr marR="0" lvl="4" algn="l" rtl="0">
-              <a:lnSpc>
-                <a:spcPct val="100000"/>
-              </a:lnSpc>
-              <a:spcBef>
-                <a:spcPts val="0"/>
-              </a:spcBef>
-              <a:spcAft>
-                <a:spcPts val="0"/>
-              </a:spcAft>
-              <a:buClr>
-                <a:srgbClr val="000000"/>
-              </a:buClr>
-              <a:buFont typeface="Arial"/>
-              <a:defRPr sz="1400" b="0" i="0" u="none" strike="noStrike" cap="none">
-                <a:solidFill>
-                  <a:srgbClr val="000000"/>
-                </a:solidFill>
-                <a:latin typeface="Arial"/>
-                <a:ea typeface="Arial"/>
-                <a:cs typeface="Arial"/>
-                <a:sym typeface="Arial"/>
-              </a:defRPr>
-            </a:lvl5pPr>
-            <a:lvl6pPr marR="0" lvl="5" algn="l" rtl="0">
-              <a:lnSpc>
-                <a:spcPct val="100000"/>
-              </a:lnSpc>
-              <a:spcBef>
-                <a:spcPts val="0"/>
-              </a:spcBef>
-              <a:spcAft>
-                <a:spcPts val="0"/>
-              </a:spcAft>
-              <a:buClr>
-                <a:srgbClr val="000000"/>
-              </a:buClr>
-              <a:buFont typeface="Arial"/>
-              <a:defRPr sz="1400" b="0" i="0" u="none" strike="noStrike" cap="none">
-                <a:solidFill>
-                  <a:srgbClr val="000000"/>
-                </a:solidFill>
-                <a:latin typeface="Arial"/>
-                <a:ea typeface="Arial"/>
-                <a:cs typeface="Arial"/>
-                <a:sym typeface="Arial"/>
-              </a:defRPr>
-            </a:lvl6pPr>
-            <a:lvl7pPr marR="0" lvl="6" algn="l" rtl="0">
-              <a:lnSpc>
-                <a:spcPct val="100000"/>
-              </a:lnSpc>
-              <a:spcBef>
-                <a:spcPts val="0"/>
-              </a:spcBef>
-              <a:spcAft>
-                <a:spcPts val="0"/>
-              </a:spcAft>
-              <a:buClr>
-                <a:srgbClr val="000000"/>
-              </a:buClr>
-              <a:buFont typeface="Arial"/>
-              <a:defRPr sz="1400" b="0" i="0" u="none" strike="noStrike" cap="none">
-                <a:solidFill>
-                  <a:srgbClr val="000000"/>
-                </a:solidFill>
-                <a:latin typeface="Arial"/>
-                <a:ea typeface="Arial"/>
-                <a:cs typeface="Arial"/>
-                <a:sym typeface="Arial"/>
-              </a:defRPr>
-            </a:lvl7pPr>
-            <a:lvl8pPr marR="0" lvl="7" algn="l" rtl="0">
-              <a:lnSpc>
-                <a:spcPct val="100000"/>
-              </a:lnSpc>
-              <a:spcBef>
-                <a:spcPts val="0"/>
-              </a:spcBef>
-              <a:spcAft>
-                <a:spcPts val="0"/>
-              </a:spcAft>
-              <a:buClr>
-                <a:srgbClr val="000000"/>
-              </a:buClr>
-              <a:buFont typeface="Arial"/>
-              <a:defRPr sz="1400" b="0" i="0" u="none" strike="noStrike" cap="none">
-                <a:solidFill>
-                  <a:srgbClr val="000000"/>
-                </a:solidFill>
-                <a:latin typeface="Arial"/>
-                <a:ea typeface="Arial"/>
-                <a:cs typeface="Arial"/>
-                <a:sym typeface="Arial"/>
-              </a:defRPr>
-            </a:lvl8pPr>
-            <a:lvl9pPr marR="0" lvl="8" algn="l" rtl="0">
-              <a:lnSpc>
-                <a:spcPct val="100000"/>
-              </a:lnSpc>
-              <a:spcBef>
-                <a:spcPts val="0"/>
-              </a:spcBef>
-              <a:spcAft>
-                <a:spcPts val="0"/>
-              </a:spcAft>
-              <a:buClr>
-                <a:srgbClr val="000000"/>
-              </a:buClr>
-              <a:buFont typeface="Arial"/>
-              <a:defRPr sz="1400" b="0" i="0" u="none" strike="noStrike" cap="none">
-                <a:solidFill>
-                  <a:srgbClr val="000000"/>
-                </a:solidFill>
-                <a:latin typeface="Arial"/>
-                <a:ea typeface="Arial"/>
-                <a:cs typeface="Arial"/>
-                <a:sym typeface="Arial"/>
-              </a:defRPr>
-            </a:lvl9pPr>
-          </a:lstStyle>
-          <a:p>
-            <a:pPr>
-              <a:lnSpc>
-                <a:spcPct val="120000"/>
-              </a:lnSpc>
-              <a:buClr>
-                <a:srgbClr val="595959"/>
-              </a:buClr>
-              <a:buSzPct val="222222"/>
-            </a:pPr>
-            <a:r>
-              <a:rPr lang="pt-BR" sz="4300" dirty="0" err="1">
-                <a:solidFill>
-                  <a:schemeClr val="bg1"/>
-                </a:solidFill>
-              </a:rPr>
-              <a:t>Pseudo-classes</a:t>
-            </a:r>
-            <a:r>
-              <a:rPr lang="pt-BR" sz="4300" dirty="0">
-                <a:solidFill>
-                  <a:schemeClr val="bg1"/>
-                </a:solidFill>
-              </a:rPr>
-              <a:t> estruturais</a:t>
-            </a:r>
-            <a:br>
-              <a:rPr lang="pt-BR" sz="4300" dirty="0">
-                <a:solidFill>
-                  <a:schemeClr val="tx2">
-                    <a:lumMod val="90000"/>
-                  </a:schemeClr>
-                </a:solidFill>
-              </a:rPr>
-            </a:br>
-            <a:r>
-              <a:rPr lang="pt-BR" sz="2000" dirty="0">
-                <a:solidFill>
-                  <a:schemeClr val="tx2">
-                    <a:lumMod val="90000"/>
-                  </a:schemeClr>
-                </a:solidFill>
-              </a:rPr>
-              <a:t>Servem para selecionar um elemento da estrutura do código.</a:t>
-            </a:r>
-          </a:p>
-        </p:txBody>
-      </p:sp>
-      <p:sp>
-        <p:nvSpPr>
-          <p:cNvPr id="23" name="Google Shape;87;p6">
-            <a:extLst>
-              <a:ext uri="{FF2B5EF4-FFF2-40B4-BE49-F238E27FC236}">
-                <a16:creationId xmlns:a16="http://schemas.microsoft.com/office/drawing/2014/main" id="{3A771CCF-00B2-73C2-4249-212936ED856D}"/>
-              </a:ext>
-            </a:extLst>
-          </p:cNvPr>
-          <p:cNvSpPr txBox="1"/>
-          <p:nvPr/>
-        </p:nvSpPr>
-        <p:spPr>
-          <a:xfrm>
-            <a:off x="856932" y="1901055"/>
-            <a:ext cx="6652200" cy="1597843"/>
-          </a:xfrm>
-          <a:prstGeom prst="rect">
-            <a:avLst/>
-          </a:prstGeom>
-          <a:noFill/>
-          <a:ln>
-            <a:noFill/>
-          </a:ln>
-        </p:spPr>
-        <p:txBody>
-          <a:bodyPr spcFirstLastPara="1" wrap="square" lIns="91425" tIns="91425" rIns="91425" bIns="91425" anchor="t" anchorCtr="0">
-            <a:spAutoFit/>
-          </a:bodyPr>
-          <a:lstStyle/>
-          <a:p>
-            <a:pPr marL="0" marR="0" lvl="0" indent="0" rtl="0">
-              <a:lnSpc>
-                <a:spcPct val="150000"/>
-              </a:lnSpc>
-              <a:spcBef>
-                <a:spcPts val="2000"/>
-              </a:spcBef>
-              <a:spcAft>
-                <a:spcPts val="1100"/>
-              </a:spcAft>
-              <a:buClr>
-                <a:schemeClr val="dk1"/>
-              </a:buClr>
-              <a:buSzPts val="3600"/>
-              <a:buFont typeface="Arial"/>
-              <a:buNone/>
-            </a:pPr>
-            <a:r>
-              <a:rPr lang="pt-BR" sz="4400" b="1" i="0" u="none" strike="noStrike" cap="none" dirty="0">
-                <a:solidFill>
-                  <a:schemeClr val="tx2">
-                    <a:lumMod val="90000"/>
-                  </a:schemeClr>
-                </a:solidFill>
-                <a:latin typeface="Arial"/>
-                <a:ea typeface="Arial"/>
-                <a:cs typeface="Arial"/>
-                <a:sym typeface="Arial"/>
-              </a:rPr>
-              <a:t>:</a:t>
-            </a:r>
-            <a:r>
-              <a:rPr lang="pt-BR" sz="4400" b="1" dirty="0" err="1">
-                <a:solidFill>
-                  <a:schemeClr val="tx2">
-                    <a:lumMod val="90000"/>
-                  </a:schemeClr>
-                </a:solidFill>
-              </a:rPr>
-              <a:t>first-child</a:t>
-            </a:r>
-            <a:r>
-              <a:rPr lang="pt-BR" sz="4400" b="1" dirty="0">
-                <a:solidFill>
-                  <a:schemeClr val="tx2">
-                    <a:lumMod val="90000"/>
-                  </a:schemeClr>
-                </a:solidFill>
-              </a:rPr>
-              <a:t> e :</a:t>
-            </a:r>
-            <a:r>
-              <a:rPr lang="pt-BR" sz="4400" b="1" dirty="0" err="1">
-                <a:solidFill>
-                  <a:schemeClr val="tx2">
-                    <a:lumMod val="90000"/>
-                  </a:schemeClr>
-                </a:solidFill>
-              </a:rPr>
-              <a:t>last-child</a:t>
-            </a:r>
-            <a:endParaRPr sz="4400" b="1" i="0" u="none" strike="noStrike" cap="none" dirty="0">
-              <a:solidFill>
-                <a:schemeClr val="tx2">
-                  <a:lumMod val="90000"/>
-                </a:schemeClr>
-              </a:solidFill>
-              <a:highlight>
-                <a:schemeClr val="accent6"/>
-              </a:highlight>
-              <a:latin typeface="Arial"/>
-              <a:ea typeface="Arial"/>
-              <a:cs typeface="Arial"/>
-              <a:sym typeface="Arial"/>
-            </a:endParaRPr>
-          </a:p>
-        </p:txBody>
-      </p:sp>
-      <p:sp>
-        <p:nvSpPr>
-          <p:cNvPr id="2" name="Google Shape;131;p11">
-            <a:extLst>
-              <a:ext uri="{FF2B5EF4-FFF2-40B4-BE49-F238E27FC236}">
-                <a16:creationId xmlns:a16="http://schemas.microsoft.com/office/drawing/2014/main" id="{DE332816-77A3-4979-0FD4-26686FE5A14E}"/>
-              </a:ext>
-            </a:extLst>
-          </p:cNvPr>
-          <p:cNvSpPr txBox="1"/>
-          <p:nvPr/>
-        </p:nvSpPr>
-        <p:spPr>
-          <a:xfrm>
-            <a:off x="736397" y="3247936"/>
-            <a:ext cx="10719205" cy="1002665"/>
-          </a:xfrm>
-          <a:prstGeom prst="rect">
-            <a:avLst/>
-          </a:prstGeom>
-          <a:noFill/>
-          <a:ln>
-            <a:noFill/>
-          </a:ln>
-        </p:spPr>
-        <p:txBody>
-          <a:bodyPr spcFirstLastPara="1" wrap="square" lIns="91425" tIns="91425" rIns="91425" bIns="91425" anchor="t" anchorCtr="0">
-            <a:noAutofit/>
-          </a:bodyPr>
-          <a:lstStyle/>
-          <a:p>
-            <a:pPr marL="114300" marR="0" lvl="0" indent="0" algn="just" rtl="0">
-              <a:lnSpc>
-                <a:spcPct val="100000"/>
-              </a:lnSpc>
-              <a:spcBef>
-                <a:spcPts val="0"/>
-              </a:spcBef>
-              <a:spcAft>
-                <a:spcPts val="0"/>
-              </a:spcAft>
-              <a:buClr>
-                <a:schemeClr val="dk1"/>
-              </a:buClr>
-              <a:buSzPts val="1800"/>
-              <a:buFont typeface="Arial"/>
-              <a:buNone/>
-            </a:pPr>
-            <a:r>
-              <a:rPr lang="pt-BR" sz="2400" b="0" i="0" u="none" strike="noStrike" cap="none" dirty="0">
-                <a:solidFill>
-                  <a:schemeClr val="tx2">
-                    <a:lumMod val="90000"/>
-                  </a:schemeClr>
-                </a:solidFill>
-                <a:latin typeface="Arial"/>
-                <a:ea typeface="Arial"/>
-                <a:cs typeface="Arial"/>
-                <a:sym typeface="Arial"/>
-              </a:rPr>
-              <a:t>Usada para estilizar o </a:t>
-            </a:r>
-            <a:r>
-              <a:rPr lang="pt-BR" sz="2400" b="1" i="0" u="none" strike="noStrike" cap="none" dirty="0">
-                <a:solidFill>
-                  <a:srgbClr val="ED145B"/>
-                </a:solidFill>
-                <a:latin typeface="Arial"/>
-                <a:ea typeface="Arial"/>
-                <a:cs typeface="Arial"/>
-                <a:sym typeface="Arial"/>
-              </a:rPr>
-              <a:t>primeiro filho (</a:t>
-            </a:r>
-            <a:r>
-              <a:rPr lang="pt-BR" sz="2400" b="1" i="0" u="none" strike="noStrike" cap="none" dirty="0" err="1">
-                <a:solidFill>
-                  <a:srgbClr val="ED145B"/>
-                </a:solidFill>
-                <a:latin typeface="Arial"/>
-                <a:ea typeface="Arial"/>
-                <a:cs typeface="Arial"/>
-                <a:sym typeface="Arial"/>
-              </a:rPr>
-              <a:t>first-child</a:t>
-            </a:r>
-            <a:r>
-              <a:rPr lang="pt-BR" sz="2400" b="1" i="0" u="none" strike="noStrike" cap="none" dirty="0">
-                <a:solidFill>
-                  <a:srgbClr val="ED145B"/>
-                </a:solidFill>
-                <a:latin typeface="Arial"/>
-                <a:ea typeface="Arial"/>
-                <a:cs typeface="Arial"/>
-                <a:sym typeface="Arial"/>
-              </a:rPr>
-              <a:t>)</a:t>
-            </a:r>
-            <a:r>
-              <a:rPr lang="pt-BR" sz="2400" b="0" i="0" u="none" strike="noStrike" cap="none" dirty="0">
-                <a:solidFill>
-                  <a:schemeClr val="tx2">
-                    <a:lumMod val="90000"/>
-                  </a:schemeClr>
-                </a:solidFill>
-                <a:latin typeface="Arial"/>
-                <a:ea typeface="Arial"/>
-                <a:cs typeface="Arial"/>
-                <a:sym typeface="Arial"/>
-              </a:rPr>
-              <a:t> ou o </a:t>
-            </a:r>
-            <a:r>
-              <a:rPr lang="pt-BR" sz="2400" b="1" i="0" u="none" strike="noStrike" cap="none" dirty="0">
-                <a:solidFill>
-                  <a:srgbClr val="ED145B"/>
-                </a:solidFill>
-                <a:latin typeface="Arial"/>
-                <a:ea typeface="Arial"/>
-                <a:cs typeface="Arial"/>
-                <a:sym typeface="Arial"/>
-              </a:rPr>
-              <a:t>último filho (</a:t>
-            </a:r>
-            <a:r>
-              <a:rPr lang="pt-BR" sz="2400" b="1" i="0" u="none" strike="noStrike" cap="none" dirty="0" err="1">
-                <a:solidFill>
-                  <a:srgbClr val="ED145B"/>
-                </a:solidFill>
-                <a:latin typeface="Arial"/>
-                <a:ea typeface="Arial"/>
-                <a:cs typeface="Arial"/>
-                <a:sym typeface="Arial"/>
-              </a:rPr>
-              <a:t>last-child</a:t>
-            </a:r>
-            <a:r>
-              <a:rPr lang="pt-BR" sz="2400" b="1" i="0" u="none" strike="noStrike" cap="none" dirty="0">
-                <a:solidFill>
-                  <a:srgbClr val="ED145B"/>
-                </a:solidFill>
-                <a:latin typeface="Arial"/>
-                <a:ea typeface="Arial"/>
-                <a:cs typeface="Arial"/>
-                <a:sym typeface="Arial"/>
-              </a:rPr>
-              <a:t>)</a:t>
-            </a:r>
-            <a:r>
-              <a:rPr lang="pt-BR" sz="2400" b="0" i="0" u="none" strike="noStrike" cap="none" dirty="0">
-                <a:solidFill>
-                  <a:schemeClr val="tx2">
-                    <a:lumMod val="90000"/>
-                  </a:schemeClr>
-                </a:solidFill>
-                <a:latin typeface="Arial"/>
-                <a:ea typeface="Arial"/>
-                <a:cs typeface="Arial"/>
-                <a:sym typeface="Arial"/>
-              </a:rPr>
-              <a:t> dentro de uma sequência do mesmo elemento.</a:t>
-            </a:r>
-            <a:endParaRPr sz="2400" b="0" i="0" u="none" strike="noStrike" cap="none" dirty="0">
-              <a:solidFill>
-                <a:schemeClr val="tx2">
-                  <a:lumMod val="90000"/>
-                </a:schemeClr>
-              </a:solidFill>
-              <a:latin typeface="Arial"/>
-              <a:ea typeface="Arial"/>
-              <a:cs typeface="Arial"/>
-              <a:sym typeface="Arial"/>
-            </a:endParaRPr>
-          </a:p>
-          <a:p>
-            <a:pPr marL="0" marR="0" lvl="0" indent="0" algn="just" rtl="0">
-              <a:lnSpc>
-                <a:spcPct val="100000"/>
-              </a:lnSpc>
-              <a:spcBef>
-                <a:spcPts val="0"/>
-              </a:spcBef>
-              <a:spcAft>
-                <a:spcPts val="0"/>
-              </a:spcAft>
-              <a:buClr>
-                <a:schemeClr val="dk1"/>
-              </a:buClr>
-              <a:buSzPts val="1100"/>
-              <a:buFont typeface="Arial"/>
-              <a:buNone/>
-            </a:pPr>
-            <a:endParaRPr sz="2200" b="0" i="0" u="none" strike="noStrike" cap="none" dirty="0">
-              <a:solidFill>
-                <a:srgbClr val="3F3F3F"/>
-              </a:solidFill>
-              <a:latin typeface="Arial"/>
-              <a:ea typeface="Arial"/>
-              <a:cs typeface="Arial"/>
-              <a:sym typeface="Arial"/>
-            </a:endParaRPr>
-          </a:p>
-          <a:p>
-            <a:pPr marL="0" marR="0" lvl="0" indent="0" algn="just" rtl="0">
-              <a:lnSpc>
-                <a:spcPct val="100000"/>
-              </a:lnSpc>
-              <a:spcBef>
-                <a:spcPts val="0"/>
-              </a:spcBef>
-              <a:spcAft>
-                <a:spcPts val="0"/>
-              </a:spcAft>
-              <a:buClr>
-                <a:schemeClr val="dk1"/>
-              </a:buClr>
-              <a:buSzPts val="1100"/>
-              <a:buFont typeface="Arial"/>
-              <a:buNone/>
-            </a:pPr>
-            <a:endParaRPr sz="2200" b="0" i="0" u="none" strike="noStrike" cap="none" dirty="0">
-              <a:solidFill>
-                <a:srgbClr val="3F3F3F"/>
-              </a:solidFill>
-              <a:latin typeface="Arial"/>
-              <a:ea typeface="Arial"/>
-              <a:cs typeface="Arial"/>
-              <a:sym typeface="Arial"/>
-            </a:endParaRPr>
-          </a:p>
-          <a:p>
-            <a:pPr marL="0" marR="0" lvl="0" indent="0" algn="just" rtl="0">
-              <a:lnSpc>
-                <a:spcPct val="100000"/>
-              </a:lnSpc>
-              <a:spcBef>
-                <a:spcPts val="0"/>
-              </a:spcBef>
-              <a:spcAft>
-                <a:spcPts val="0"/>
-              </a:spcAft>
-              <a:buClr>
-                <a:schemeClr val="dk1"/>
-              </a:buClr>
-              <a:buSzPts val="1600"/>
-              <a:buFont typeface="Arial"/>
-              <a:buNone/>
-            </a:pPr>
-            <a:endParaRPr sz="2200" b="0" i="0" u="none" strike="noStrike" cap="none" dirty="0">
-              <a:solidFill>
-                <a:srgbClr val="3F3F3F"/>
-              </a:solidFill>
-              <a:latin typeface="Arial"/>
-              <a:ea typeface="Arial"/>
-              <a:cs typeface="Arial"/>
-              <a:sym typeface="Arial"/>
-            </a:endParaRPr>
-          </a:p>
-          <a:p>
-            <a:pPr marL="0" marR="0" lvl="0" indent="0" algn="just" rtl="0">
-              <a:lnSpc>
-                <a:spcPct val="115000"/>
-              </a:lnSpc>
-              <a:spcBef>
-                <a:spcPts val="0"/>
-              </a:spcBef>
-              <a:spcAft>
-                <a:spcPts val="0"/>
-              </a:spcAft>
-              <a:buClr>
-                <a:schemeClr val="dk1"/>
-              </a:buClr>
-              <a:buSzPts val="1800"/>
-              <a:buFont typeface="Arial"/>
-              <a:buNone/>
-            </a:pPr>
-            <a:endParaRPr sz="2200" b="0" i="0" u="none" strike="noStrike" cap="none" dirty="0">
-              <a:solidFill>
-                <a:srgbClr val="3F3F3F"/>
-              </a:solidFill>
-              <a:latin typeface="Arial"/>
-              <a:ea typeface="Arial"/>
-              <a:cs typeface="Arial"/>
-              <a:sym typeface="Arial"/>
-            </a:endParaRPr>
-          </a:p>
-          <a:p>
-            <a:pPr marL="0" marR="0" lvl="0" indent="0" algn="just" rtl="0">
-              <a:lnSpc>
-                <a:spcPct val="100000"/>
-              </a:lnSpc>
-              <a:spcBef>
-                <a:spcPts val="0"/>
-              </a:spcBef>
-              <a:spcAft>
-                <a:spcPts val="0"/>
-              </a:spcAft>
-              <a:buClr>
-                <a:schemeClr val="dk1"/>
-              </a:buClr>
-              <a:buSzPts val="1400"/>
-              <a:buFont typeface="Arial"/>
-              <a:buNone/>
-            </a:pPr>
-            <a:endParaRPr sz="2200" b="0" i="0" u="none" strike="noStrike" cap="none" dirty="0">
-              <a:solidFill>
-                <a:srgbClr val="3F3F3F"/>
-              </a:solidFill>
-              <a:latin typeface="Arial"/>
-              <a:ea typeface="Arial"/>
-              <a:cs typeface="Arial"/>
-              <a:sym typeface="Arial"/>
-            </a:endParaRPr>
-          </a:p>
-        </p:txBody>
-      </p:sp>
-      <p:graphicFrame>
-        <p:nvGraphicFramePr>
-          <p:cNvPr id="4" name="Google Shape;132;p11">
-            <a:extLst>
-              <a:ext uri="{FF2B5EF4-FFF2-40B4-BE49-F238E27FC236}">
-                <a16:creationId xmlns:a16="http://schemas.microsoft.com/office/drawing/2014/main" id="{9FB6166D-37B3-0DA7-3A1B-40E823F7755C}"/>
-              </a:ext>
-            </a:extLst>
-          </p:cNvPr>
-          <p:cNvGraphicFramePr/>
-          <p:nvPr>
-            <p:extLst>
-              <p:ext uri="{D42A27DB-BD31-4B8C-83A1-F6EECF244321}">
-                <p14:modId xmlns:p14="http://schemas.microsoft.com/office/powerpoint/2010/main" val="998692989"/>
-              </p:ext>
-            </p:extLst>
-          </p:nvPr>
-        </p:nvGraphicFramePr>
-        <p:xfrm>
-          <a:off x="6623111" y="4727073"/>
-          <a:ext cx="3380100" cy="1224281"/>
-        </p:xfrm>
-        <a:graphic>
-          <a:graphicData uri="http://schemas.openxmlformats.org/drawingml/2006/table">
-            <a:tbl>
-              <a:tblPr>
-                <a:noFill/>
-                <a:tableStyleId>{63B152E9-AFB2-458E-BFAF-78D379E83702}</a:tableStyleId>
-              </a:tblPr>
-              <a:tblGrid>
-                <a:gridCol w="3380100">
-                  <a:extLst>
-                    <a:ext uri="{9D8B030D-6E8A-4147-A177-3AD203B41FA5}">
-                      <a16:colId xmlns:a16="http://schemas.microsoft.com/office/drawing/2014/main" val="20000"/>
-                    </a:ext>
-                  </a:extLst>
-                </a:gridCol>
-              </a:tblGrid>
-              <a:tr h="1224281">
-                <a:tc>
-                  <a:txBody>
-                    <a:bodyPr/>
-                    <a:lstStyle/>
-                    <a:p>
-                      <a:pPr marL="0" marR="0" lvl="0" indent="0" algn="l" rtl="0">
-                        <a:lnSpc>
-                          <a:spcPct val="100000"/>
-                        </a:lnSpc>
-                        <a:spcBef>
-                          <a:spcPts val="0"/>
-                        </a:spcBef>
-                        <a:spcAft>
-                          <a:spcPts val="0"/>
-                        </a:spcAft>
-                        <a:buClr>
-                          <a:srgbClr val="000000"/>
-                        </a:buClr>
-                        <a:buSzPts val="1600"/>
-                        <a:buFont typeface="Arial"/>
-                        <a:buNone/>
-                      </a:pPr>
-                      <a:r>
-                        <a:rPr lang="pt-BR" sz="2400" b="0" i="0" u="none" strike="noStrike" cap="none" dirty="0" err="1">
-                          <a:solidFill>
-                            <a:srgbClr val="FF79C6"/>
-                          </a:solidFill>
-                          <a:latin typeface="Consolas"/>
-                          <a:ea typeface="Consolas"/>
-                          <a:cs typeface="Consolas"/>
-                          <a:sym typeface="Consolas"/>
-                        </a:rPr>
-                        <a:t>li</a:t>
-                      </a:r>
-                      <a:r>
-                        <a:rPr lang="pt-BR" sz="2400" b="0" i="1" u="none" strike="noStrike" cap="none" dirty="0" err="1">
-                          <a:solidFill>
-                            <a:srgbClr val="FF79C6"/>
-                          </a:solidFill>
-                          <a:latin typeface="Consolas"/>
-                          <a:ea typeface="Consolas"/>
-                          <a:cs typeface="Consolas"/>
-                          <a:sym typeface="Consolas"/>
-                        </a:rPr>
-                        <a:t>:</a:t>
-                      </a:r>
-                      <a:r>
-                        <a:rPr lang="pt-BR" sz="2400" b="0" i="1" u="none" strike="noStrike" cap="none" dirty="0" err="1">
-                          <a:solidFill>
-                            <a:srgbClr val="50FA7B"/>
-                          </a:solidFill>
-                          <a:latin typeface="Consolas"/>
-                          <a:ea typeface="Consolas"/>
-                          <a:cs typeface="Consolas"/>
-                          <a:sym typeface="Consolas"/>
-                        </a:rPr>
-                        <a:t>last-child</a:t>
-                      </a:r>
-                      <a:r>
-                        <a:rPr lang="pt-BR" sz="2400" b="0" i="0" u="none" strike="noStrike" cap="none" dirty="0">
-                          <a:solidFill>
-                            <a:srgbClr val="F8F8F2"/>
-                          </a:solidFill>
-                          <a:latin typeface="Consolas"/>
-                          <a:ea typeface="Consolas"/>
-                          <a:cs typeface="Consolas"/>
-                          <a:sym typeface="Consolas"/>
-                        </a:rPr>
-                        <a:t> { </a:t>
-                      </a:r>
-                      <a:endParaRPr sz="2400" u="none" strike="noStrike" cap="none" dirty="0"/>
-                    </a:p>
-                    <a:p>
-                      <a:pPr marL="0" marR="0" lvl="0" indent="0" algn="l" rtl="0">
-                        <a:lnSpc>
-                          <a:spcPct val="100000"/>
-                        </a:lnSpc>
-                        <a:spcBef>
-                          <a:spcPts val="0"/>
-                        </a:spcBef>
-                        <a:spcAft>
-                          <a:spcPts val="0"/>
-                        </a:spcAft>
-                        <a:buClr>
-                          <a:srgbClr val="000000"/>
-                        </a:buClr>
-                        <a:buSzPts val="1600"/>
-                        <a:buFont typeface="Arial"/>
-                        <a:buNone/>
-                      </a:pPr>
-                      <a:r>
-                        <a:rPr lang="pt-BR" sz="2400" b="0" i="0" u="none" strike="noStrike" cap="none" dirty="0">
-                          <a:solidFill>
-                            <a:srgbClr val="F8F8F2"/>
-                          </a:solidFill>
-                          <a:latin typeface="Consolas"/>
-                          <a:ea typeface="Consolas"/>
-                          <a:cs typeface="Consolas"/>
-                          <a:sym typeface="Consolas"/>
-                        </a:rPr>
-                        <a:t>    </a:t>
-                      </a:r>
-                      <a:r>
-                        <a:rPr lang="pt-BR" sz="2400" b="0" i="0" u="none" strike="noStrike" cap="none" dirty="0">
-                          <a:solidFill>
-                            <a:srgbClr val="8BE9FD"/>
-                          </a:solidFill>
-                          <a:latin typeface="Consolas"/>
-                          <a:ea typeface="Consolas"/>
-                          <a:cs typeface="Consolas"/>
-                          <a:sym typeface="Consolas"/>
-                        </a:rPr>
-                        <a:t>color</a:t>
-                      </a:r>
-                      <a:r>
-                        <a:rPr lang="pt-BR" sz="2400" b="0" i="0" u="none" strike="noStrike" cap="none" dirty="0">
-                          <a:solidFill>
-                            <a:srgbClr val="FF79C6"/>
-                          </a:solidFill>
-                          <a:latin typeface="Consolas"/>
-                          <a:ea typeface="Consolas"/>
-                          <a:cs typeface="Consolas"/>
-                          <a:sym typeface="Consolas"/>
-                        </a:rPr>
-                        <a:t>:</a:t>
-                      </a:r>
-                      <a:r>
-                        <a:rPr lang="pt-BR" sz="2400" b="0" i="0" u="none" strike="noStrike" cap="none" dirty="0">
-                          <a:solidFill>
-                            <a:srgbClr val="F8F8F2"/>
-                          </a:solidFill>
-                          <a:latin typeface="Consolas"/>
-                          <a:ea typeface="Consolas"/>
-                          <a:cs typeface="Consolas"/>
-                          <a:sym typeface="Consolas"/>
-                        </a:rPr>
-                        <a:t> </a:t>
-                      </a:r>
-                      <a:r>
-                        <a:rPr lang="pt-BR" sz="2400" b="0" i="0" u="none" strike="noStrike" cap="none" dirty="0" err="1">
-                          <a:solidFill>
-                            <a:srgbClr val="BD93F9"/>
-                          </a:solidFill>
-                          <a:latin typeface="Consolas"/>
-                          <a:ea typeface="Consolas"/>
-                          <a:cs typeface="Consolas"/>
-                          <a:sym typeface="Consolas"/>
-                        </a:rPr>
-                        <a:t>red</a:t>
-                      </a:r>
-                      <a:r>
-                        <a:rPr lang="pt-BR" sz="2400" b="0" i="0" u="none" strike="noStrike" cap="none" dirty="0">
-                          <a:solidFill>
-                            <a:srgbClr val="F8F8F2"/>
-                          </a:solidFill>
-                          <a:latin typeface="Consolas"/>
-                          <a:ea typeface="Consolas"/>
-                          <a:cs typeface="Consolas"/>
-                          <a:sym typeface="Consolas"/>
-                        </a:rPr>
-                        <a:t>; </a:t>
-                      </a:r>
-                      <a:endParaRPr sz="2400" u="none" strike="noStrike" cap="none" dirty="0"/>
-                    </a:p>
-                    <a:p>
-                      <a:pPr marL="0" marR="0" lvl="0" indent="0" algn="l" rtl="0">
-                        <a:lnSpc>
-                          <a:spcPct val="100000"/>
-                        </a:lnSpc>
-                        <a:spcBef>
-                          <a:spcPts val="0"/>
-                        </a:spcBef>
-                        <a:spcAft>
-                          <a:spcPts val="0"/>
-                        </a:spcAft>
-                        <a:buClr>
-                          <a:srgbClr val="000000"/>
-                        </a:buClr>
-                        <a:buSzPts val="1600"/>
-                        <a:buFont typeface="Arial"/>
-                        <a:buNone/>
-                      </a:pPr>
-                      <a:r>
-                        <a:rPr lang="pt-BR" sz="2400" b="0" i="0" u="none" strike="noStrike" cap="none" dirty="0">
-                          <a:solidFill>
-                            <a:srgbClr val="F8F8F2"/>
-                          </a:solidFill>
-                          <a:latin typeface="Consolas"/>
-                          <a:ea typeface="Consolas"/>
-                          <a:cs typeface="Consolas"/>
-                          <a:sym typeface="Consolas"/>
-                        </a:rPr>
-                        <a:t>}</a:t>
-                      </a:r>
-                      <a:endParaRPr sz="2400" b="0" i="0" u="none" strike="noStrike" cap="none" dirty="0">
-                        <a:solidFill>
-                          <a:srgbClr val="F8F8F2"/>
-                        </a:solidFill>
-                        <a:latin typeface="Consolas"/>
-                        <a:ea typeface="Consolas"/>
-                        <a:cs typeface="Consolas"/>
-                        <a:sym typeface="Consolas"/>
-                      </a:endParaRPr>
-                    </a:p>
-                  </a:txBody>
-                  <a:tcPr marL="63500" marR="63500" marT="63500" marB="63500">
-                    <a:lnL w="38100" cap="flat" cmpd="sng">
-                      <a:solidFill>
-                        <a:srgbClr val="EAFF6A"/>
-                      </a:solidFill>
-                      <a:prstDash val="solid"/>
-                      <a:round/>
-                      <a:headEnd type="none" w="sm" len="sm"/>
-                      <a:tailEnd type="none" w="sm" len="sm"/>
-                    </a:lnL>
-                    <a:lnR w="38100" cap="flat" cmpd="sng">
-                      <a:solidFill>
-                        <a:srgbClr val="EAFF6A"/>
-                      </a:solidFill>
-                      <a:prstDash val="solid"/>
-                      <a:round/>
-                      <a:headEnd type="none" w="sm" len="sm"/>
-                      <a:tailEnd type="none" w="sm" len="sm"/>
-                    </a:lnR>
-                    <a:lnT w="38100" cap="flat" cmpd="sng">
-                      <a:solidFill>
-                        <a:srgbClr val="EAFF6A"/>
-                      </a:solidFill>
-                      <a:prstDash val="solid"/>
-                      <a:round/>
-                      <a:headEnd type="none" w="sm" len="sm"/>
-                      <a:tailEnd type="none" w="sm" len="sm"/>
-                    </a:lnT>
-                    <a:lnB w="38100" cap="flat" cmpd="sng">
-                      <a:solidFill>
-                        <a:srgbClr val="EAFF6A"/>
-                      </a:solidFill>
-                      <a:prstDash val="solid"/>
-                      <a:round/>
-                      <a:headEnd type="none" w="sm" len="sm"/>
-                      <a:tailEnd type="none" w="sm" len="sm"/>
-                    </a:lnB>
-                    <a:solidFill>
-                      <a:srgbClr val="0C343D"/>
-                    </a:solidFill>
-                  </a:tcPr>
-                </a:tc>
-                <a:extLst>
-                  <a:ext uri="{0D108BD9-81ED-4DB2-BD59-A6C34878D82A}">
-                    <a16:rowId xmlns:a16="http://schemas.microsoft.com/office/drawing/2014/main" val="10000"/>
-                  </a:ext>
-                </a:extLst>
-              </a:tr>
-            </a:tbl>
-          </a:graphicData>
-        </a:graphic>
-      </p:graphicFrame>
-      <p:graphicFrame>
-        <p:nvGraphicFramePr>
-          <p:cNvPr id="5" name="Google Shape;132;p11">
-            <a:extLst>
-              <a:ext uri="{FF2B5EF4-FFF2-40B4-BE49-F238E27FC236}">
-                <a16:creationId xmlns:a16="http://schemas.microsoft.com/office/drawing/2014/main" id="{B5319B39-64AA-CFED-AB11-7F6A51A3558D}"/>
-              </a:ext>
-            </a:extLst>
-          </p:cNvPr>
-          <p:cNvGraphicFramePr/>
-          <p:nvPr>
-            <p:extLst>
-              <p:ext uri="{D42A27DB-BD31-4B8C-83A1-F6EECF244321}">
-                <p14:modId xmlns:p14="http://schemas.microsoft.com/office/powerpoint/2010/main" val="1948257197"/>
-              </p:ext>
-            </p:extLst>
-          </p:nvPr>
-        </p:nvGraphicFramePr>
-        <p:xfrm>
-          <a:off x="1902630" y="4730816"/>
-          <a:ext cx="3380100" cy="1224280"/>
-        </p:xfrm>
-        <a:graphic>
-          <a:graphicData uri="http://schemas.openxmlformats.org/drawingml/2006/table">
-            <a:tbl>
-              <a:tblPr>
-                <a:noFill/>
-                <a:tableStyleId>{63B152E9-AFB2-458E-BFAF-78D379E83702}</a:tableStyleId>
-              </a:tblPr>
-              <a:tblGrid>
-                <a:gridCol w="3380100">
-                  <a:extLst>
-                    <a:ext uri="{9D8B030D-6E8A-4147-A177-3AD203B41FA5}">
-                      <a16:colId xmlns:a16="http://schemas.microsoft.com/office/drawing/2014/main" val="20000"/>
-                    </a:ext>
-                  </a:extLst>
-                </a:gridCol>
-              </a:tblGrid>
-              <a:tr h="1207634">
-                <a:tc>
-                  <a:txBody>
-                    <a:bodyPr/>
-                    <a:lstStyle/>
-                    <a:p>
-                      <a:pPr marL="0" marR="0" lvl="0" indent="0" algn="l" rtl="0">
-                        <a:lnSpc>
-                          <a:spcPct val="100000"/>
-                        </a:lnSpc>
-                        <a:spcBef>
-                          <a:spcPts val="0"/>
-                        </a:spcBef>
-                        <a:spcAft>
-                          <a:spcPts val="0"/>
-                        </a:spcAft>
-                        <a:buClr>
-                          <a:srgbClr val="000000"/>
-                        </a:buClr>
-                        <a:buSzPts val="1600"/>
-                        <a:buFont typeface="Arial"/>
-                        <a:buNone/>
-                      </a:pPr>
-                      <a:r>
-                        <a:rPr lang="pt-BR" sz="2400" b="0" u="none" strike="noStrike" cap="none" dirty="0" err="1">
-                          <a:solidFill>
-                            <a:srgbClr val="FF79C6"/>
-                          </a:solidFill>
-                          <a:latin typeface="Consolas"/>
-                          <a:ea typeface="Consolas"/>
-                          <a:cs typeface="Consolas"/>
-                          <a:sym typeface="Consolas"/>
-                        </a:rPr>
-                        <a:t>li</a:t>
-                      </a:r>
-                      <a:r>
-                        <a:rPr lang="pt-BR" sz="2400" b="0" i="1" u="none" strike="noStrike" cap="none" dirty="0" err="1">
-                          <a:solidFill>
-                            <a:srgbClr val="FF79C6"/>
-                          </a:solidFill>
-                          <a:latin typeface="Consolas"/>
-                          <a:ea typeface="Consolas"/>
-                          <a:cs typeface="Consolas"/>
-                          <a:sym typeface="Consolas"/>
-                        </a:rPr>
-                        <a:t>:</a:t>
-                      </a:r>
-                      <a:r>
-                        <a:rPr lang="pt-BR" sz="2400" b="0" i="1" u="none" strike="noStrike" cap="none" dirty="0" err="1">
-                          <a:solidFill>
-                            <a:srgbClr val="50FA7B"/>
-                          </a:solidFill>
-                          <a:latin typeface="Consolas"/>
-                          <a:ea typeface="Consolas"/>
-                          <a:cs typeface="Consolas"/>
-                          <a:sym typeface="Consolas"/>
-                        </a:rPr>
-                        <a:t>first-child</a:t>
-                      </a:r>
-                      <a:r>
-                        <a:rPr lang="pt-BR" sz="2400" b="0" u="none" strike="noStrike" cap="none" dirty="0">
-                          <a:solidFill>
-                            <a:srgbClr val="F8F8F2"/>
-                          </a:solidFill>
-                          <a:latin typeface="Consolas"/>
-                          <a:ea typeface="Consolas"/>
-                          <a:cs typeface="Consolas"/>
-                          <a:sym typeface="Consolas"/>
-                        </a:rPr>
-                        <a:t> { </a:t>
-                      </a:r>
-                      <a:endParaRPr sz="2400" u="none" strike="noStrike" cap="none" dirty="0"/>
-                    </a:p>
-                    <a:p>
-                      <a:pPr marL="0" marR="0" lvl="0" indent="0" algn="l" rtl="0">
-                        <a:lnSpc>
-                          <a:spcPct val="100000"/>
-                        </a:lnSpc>
-                        <a:spcBef>
-                          <a:spcPts val="0"/>
-                        </a:spcBef>
-                        <a:spcAft>
-                          <a:spcPts val="0"/>
-                        </a:spcAft>
-                        <a:buClr>
-                          <a:srgbClr val="000000"/>
-                        </a:buClr>
-                        <a:buSzPts val="1600"/>
-                        <a:buFont typeface="Arial"/>
-                        <a:buNone/>
-                      </a:pPr>
-                      <a:r>
-                        <a:rPr lang="pt-BR" sz="2400" b="0" u="none" strike="noStrike" cap="none" dirty="0">
-                          <a:solidFill>
-                            <a:srgbClr val="F8F8F2"/>
-                          </a:solidFill>
-                          <a:latin typeface="Consolas"/>
-                          <a:ea typeface="Consolas"/>
-                          <a:cs typeface="Consolas"/>
-                          <a:sym typeface="Consolas"/>
-                        </a:rPr>
-                        <a:t>    </a:t>
-                      </a:r>
-                      <a:r>
-                        <a:rPr lang="pt-BR" sz="2400" b="0" u="none" strike="noStrike" cap="none" dirty="0">
-                          <a:solidFill>
-                            <a:srgbClr val="8BE9FD"/>
-                          </a:solidFill>
-                          <a:latin typeface="Consolas"/>
-                          <a:ea typeface="Consolas"/>
-                          <a:cs typeface="Consolas"/>
-                          <a:sym typeface="Consolas"/>
-                        </a:rPr>
-                        <a:t>color</a:t>
-                      </a:r>
-                      <a:r>
-                        <a:rPr lang="pt-BR" sz="2400" b="0" u="none" strike="noStrike" cap="none" dirty="0">
-                          <a:solidFill>
-                            <a:srgbClr val="FF79C6"/>
-                          </a:solidFill>
-                          <a:latin typeface="Consolas"/>
-                          <a:ea typeface="Consolas"/>
-                          <a:cs typeface="Consolas"/>
-                          <a:sym typeface="Consolas"/>
-                        </a:rPr>
-                        <a:t>:</a:t>
-                      </a:r>
-                      <a:r>
-                        <a:rPr lang="pt-BR" sz="2400" b="0" u="none" strike="noStrike" cap="none" dirty="0">
-                          <a:solidFill>
-                            <a:srgbClr val="F8F8F2"/>
-                          </a:solidFill>
-                          <a:latin typeface="Consolas"/>
-                          <a:ea typeface="Consolas"/>
-                          <a:cs typeface="Consolas"/>
-                          <a:sym typeface="Consolas"/>
-                        </a:rPr>
-                        <a:t> </a:t>
-                      </a:r>
-                      <a:r>
-                        <a:rPr lang="pt-BR" sz="2400" b="0" u="none" strike="noStrike" cap="none" dirty="0" err="1">
-                          <a:solidFill>
-                            <a:srgbClr val="BD93F9"/>
-                          </a:solidFill>
-                          <a:latin typeface="Consolas"/>
-                          <a:ea typeface="Consolas"/>
-                          <a:cs typeface="Consolas"/>
-                          <a:sym typeface="Consolas"/>
-                        </a:rPr>
-                        <a:t>orange</a:t>
-                      </a:r>
-                      <a:r>
-                        <a:rPr lang="pt-BR" sz="2400" b="0" u="none" strike="noStrike" cap="none" dirty="0">
-                          <a:solidFill>
-                            <a:srgbClr val="F8F8F2"/>
-                          </a:solidFill>
-                          <a:latin typeface="Consolas"/>
-                          <a:ea typeface="Consolas"/>
-                          <a:cs typeface="Consolas"/>
-                          <a:sym typeface="Consolas"/>
-                        </a:rPr>
-                        <a:t>; </a:t>
-                      </a:r>
-                      <a:endParaRPr sz="2400" u="none" strike="noStrike" cap="none" dirty="0"/>
-                    </a:p>
-                    <a:p>
-                      <a:pPr marL="0" marR="0" lvl="0" indent="0" algn="l" rtl="0">
-                        <a:lnSpc>
-                          <a:spcPct val="100000"/>
-                        </a:lnSpc>
-                        <a:spcBef>
-                          <a:spcPts val="0"/>
-                        </a:spcBef>
-                        <a:spcAft>
-                          <a:spcPts val="0"/>
-                        </a:spcAft>
-                        <a:buClr>
-                          <a:srgbClr val="000000"/>
-                        </a:buClr>
-                        <a:buSzPts val="1600"/>
-                        <a:buFont typeface="Arial"/>
-                        <a:buNone/>
-                      </a:pPr>
-                      <a:r>
-                        <a:rPr lang="pt-BR" sz="2400" b="0" u="none" strike="noStrike" cap="none" dirty="0">
-                          <a:solidFill>
-                            <a:srgbClr val="F8F8F2"/>
-                          </a:solidFill>
-                          <a:latin typeface="Consolas"/>
-                          <a:ea typeface="Consolas"/>
-                          <a:cs typeface="Consolas"/>
-                          <a:sym typeface="Consolas"/>
-                        </a:rPr>
-                        <a:t>}</a:t>
-                      </a:r>
-                      <a:endParaRPr sz="2400" b="0" i="0" u="none" strike="noStrike" cap="none" dirty="0">
-                        <a:solidFill>
-                          <a:srgbClr val="F8F8F2"/>
-                        </a:solidFill>
-                        <a:latin typeface="Consolas"/>
-                        <a:ea typeface="Consolas"/>
-                        <a:cs typeface="Consolas"/>
-                        <a:sym typeface="Consolas"/>
-                      </a:endParaRPr>
-                    </a:p>
-                  </a:txBody>
-                  <a:tcPr marL="63500" marR="63500" marT="63500" marB="63500">
-                    <a:lnL w="38100" cap="flat" cmpd="sng">
-                      <a:solidFill>
-                        <a:srgbClr val="EAFF6A"/>
-                      </a:solidFill>
-                      <a:prstDash val="solid"/>
-                      <a:round/>
-                      <a:headEnd type="none" w="sm" len="sm"/>
-                      <a:tailEnd type="none" w="sm" len="sm"/>
-                    </a:lnL>
-                    <a:lnR w="38100" cap="flat" cmpd="sng">
-                      <a:solidFill>
-                        <a:srgbClr val="EAFF6A"/>
-                      </a:solidFill>
-                      <a:prstDash val="solid"/>
-                      <a:round/>
-                      <a:headEnd type="none" w="sm" len="sm"/>
-                      <a:tailEnd type="none" w="sm" len="sm"/>
-                    </a:lnR>
-                    <a:lnT w="38100" cap="flat" cmpd="sng">
-                      <a:solidFill>
-                        <a:srgbClr val="EAFF6A"/>
-                      </a:solidFill>
-                      <a:prstDash val="solid"/>
-                      <a:round/>
-                      <a:headEnd type="none" w="sm" len="sm"/>
-                      <a:tailEnd type="none" w="sm" len="sm"/>
-                    </a:lnT>
-                    <a:lnB w="38100" cap="flat" cmpd="sng">
-                      <a:solidFill>
-                        <a:srgbClr val="EAFF6A"/>
-                      </a:solidFill>
-                      <a:prstDash val="solid"/>
-                      <a:round/>
-                      <a:headEnd type="none" w="sm" len="sm"/>
-                      <a:tailEnd type="none" w="sm" len="sm"/>
-                    </a:lnB>
-                    <a:solidFill>
-                      <a:srgbClr val="0C343D"/>
-                    </a:solidFill>
-                  </a:tcPr>
-                </a:tc>
-                <a:extLst>
-                  <a:ext uri="{0D108BD9-81ED-4DB2-BD59-A6C34878D82A}">
-                    <a16:rowId xmlns:a16="http://schemas.microsoft.com/office/drawing/2014/main" val="10000"/>
-                  </a:ext>
-                </a:extLst>
-              </a:tr>
-            </a:tbl>
-          </a:graphicData>
-        </a:graphic>
-      </p:graphicFrame>
-    </p:spTree>
-    <p:extLst>
-      <p:ext uri="{BB962C8B-B14F-4D97-AF65-F5344CB8AC3E}">
-        <p14:creationId xmlns:p14="http://schemas.microsoft.com/office/powerpoint/2010/main" val="1181597645"/>
-      </p:ext>
-    </p:extLst>
-  </p:cSld>
-  <p:clrMapOvr>
-    <a:masterClrMapping/>
-  </p:clrMapOvr>
-</p:sld>
-</file>
-
-<file path=ppt/slides/slide11.xml><?xml version="1.0" encoding="utf-8"?>
-<p:sld xmlns:a="http://schemas.openxmlformats.org/drawingml/2006/main" xmlns:r="http://schemas.openxmlformats.org/officeDocument/2006/relationships" xmlns:p="http://schemas.openxmlformats.org/presentationml/2006/main">
-  <p:cSld>
-    <p:spTree>
-      <p:nvGrpSpPr>
-        <p:cNvPr id="1" name="">
-          <a:extLst>
-            <a:ext uri="{FF2B5EF4-FFF2-40B4-BE49-F238E27FC236}">
               <a16:creationId xmlns:a16="http://schemas.microsoft.com/office/drawing/2014/main" id="{3B374F97-BA41-5EFF-5004-28CF4248A856}"/>
             </a:ext>
           </a:extLst>
@@ -9081,7 +7035,7 @@
             <a:fld id="{00000000-1234-1234-1234-123412341234}" type="slidenum">
               <a:rPr lang="pt-BR" smtClean="0"/>
               <a:pPr lvl="0"/>
-              <a:t>11</a:t>
+              <a:t>10</a:t>
             </a:fld>
             <a:endParaRPr lang="pt-BR"/>
           </a:p>
@@ -10445,7 +8399,7 @@
 </p:sld>
 </file>
 
-<file path=ppt/slides/slide12.xml><?xml version="1.0" encoding="utf-8"?>
+<file path=ppt/slides/slide11.xml><?xml version="1.0" encoding="utf-8"?>
 <p:sld xmlns:a="http://schemas.openxmlformats.org/drawingml/2006/main" xmlns:r="http://schemas.openxmlformats.org/officeDocument/2006/relationships" xmlns:p="http://schemas.openxmlformats.org/presentationml/2006/main">
   <p:cSld>
     <p:spTree>
@@ -10550,7 +8504,7 @@
             <a:fld id="{00000000-1234-1234-1234-123412341234}" type="slidenum">
               <a:rPr lang="pt-BR" smtClean="0"/>
               <a:pPr lvl="0"/>
-              <a:t>12</a:t>
+              <a:t>11</a:t>
             </a:fld>
             <a:endParaRPr lang="pt-BR"/>
           </a:p>
@@ -11791,492 +9745,7 @@
 </p:sld>
 </file>
 
-<file path=ppt/slides/slide13.xml><?xml version="1.0" encoding="utf-8"?>
-<p:sld xmlns:a="http://schemas.openxmlformats.org/drawingml/2006/main" xmlns:r="http://schemas.openxmlformats.org/officeDocument/2006/relationships" xmlns:p="http://schemas.openxmlformats.org/presentationml/2006/main" show="0">
-  <p:cSld>
-    <p:spTree>
-      <p:nvGrpSpPr>
-        <p:cNvPr id="1" name="Shape 154"/>
-        <p:cNvGrpSpPr/>
-        <p:nvPr/>
-      </p:nvGrpSpPr>
-      <p:grpSpPr>
-        <a:xfrm>
-          <a:off x="0" y="0"/>
-          <a:ext cx="0" cy="0"/>
-          <a:chOff x="0" y="0"/>
-          <a:chExt cx="0" cy="0"/>
-        </a:xfrm>
-      </p:grpSpPr>
-      <p:sp>
-        <p:nvSpPr>
-          <p:cNvPr id="155" name="Google Shape;155;p14"/>
-          <p:cNvSpPr txBox="1">
-            <a:spLocks noGrp="1"/>
-          </p:cNvSpPr>
-          <p:nvPr>
-            <p:ph type="title"/>
-          </p:nvPr>
-        </p:nvSpPr>
-        <p:spPr>
-          <a:xfrm>
-            <a:off x="838200" y="387985"/>
-            <a:ext cx="10300970" cy="986155"/>
-          </a:xfrm>
-          <a:prstGeom prst="rect">
-            <a:avLst/>
-          </a:prstGeom>
-          <a:noFill/>
-          <a:ln>
-            <a:noFill/>
-          </a:ln>
-        </p:spPr>
-        <p:txBody>
-          <a:bodyPr spcFirstLastPara="1" wrap="square" lIns="91425" tIns="45700" rIns="91425" bIns="45700" anchor="ctr" anchorCtr="0">
-            <a:normAutofit/>
-          </a:bodyPr>
-          <a:lstStyle/>
-          <a:p>
-            <a:pPr marL="0" lvl="0" indent="0" algn="l" rtl="0">
-              <a:lnSpc>
-                <a:spcPct val="90000"/>
-              </a:lnSpc>
-              <a:spcBef>
-                <a:spcPts val="0"/>
-              </a:spcBef>
-              <a:spcAft>
-                <a:spcPts val="0"/>
-              </a:spcAft>
-              <a:buClr>
-                <a:srgbClr val="595959"/>
-              </a:buClr>
-              <a:buSzPts val="4400"/>
-              <a:buFont typeface="Arial"/>
-              <a:buNone/>
-            </a:pPr>
-            <a:r>
-              <a:rPr lang="pt-BR"/>
-              <a:t>Para Praticar!</a:t>
-            </a:r>
-            <a:endParaRPr/>
-          </a:p>
-        </p:txBody>
-      </p:sp>
-      <p:sp>
-        <p:nvSpPr>
-          <p:cNvPr id="157" name="Google Shape;157;p14"/>
-          <p:cNvSpPr txBox="1"/>
-          <p:nvPr/>
-        </p:nvSpPr>
-        <p:spPr>
-          <a:xfrm>
-            <a:off x="911860" y="1628775"/>
-            <a:ext cx="9499600" cy="4549140"/>
-          </a:xfrm>
-          <a:prstGeom prst="rect">
-            <a:avLst/>
-          </a:prstGeom>
-          <a:noFill/>
-          <a:ln>
-            <a:noFill/>
-          </a:ln>
-        </p:spPr>
-        <p:txBody>
-          <a:bodyPr spcFirstLastPara="1" wrap="square" lIns="91425" tIns="91425" rIns="91425" bIns="91425" anchor="t" anchorCtr="0">
-            <a:noAutofit/>
-          </a:bodyPr>
-          <a:lstStyle/>
-          <a:p>
-            <a:pPr marL="0" marR="0" lvl="0" indent="0" algn="l" rtl="0">
-              <a:lnSpc>
-                <a:spcPct val="100000"/>
-              </a:lnSpc>
-              <a:spcBef>
-                <a:spcPts val="0"/>
-              </a:spcBef>
-              <a:spcAft>
-                <a:spcPts val="0"/>
-              </a:spcAft>
-              <a:buClr>
-                <a:srgbClr val="000000"/>
-              </a:buClr>
-              <a:buSzPts val="2800"/>
-              <a:buFont typeface="Arial"/>
-              <a:buNone/>
-            </a:pPr>
-            <a:r>
-              <a:rPr lang="pt-BR" sz="2800" b="1" i="0" u="none" strike="noStrike" cap="none">
-                <a:solidFill>
-                  <a:srgbClr val="000000"/>
-                </a:solidFill>
-                <a:latin typeface="Arial"/>
-                <a:ea typeface="Arial"/>
-                <a:cs typeface="Arial"/>
-                <a:sym typeface="Arial"/>
-              </a:rPr>
-              <a:t>Descrição da atividade. </a:t>
-            </a:r>
-            <a:endParaRPr sz="2800" b="1" i="0" u="none" strike="noStrike" cap="none">
-              <a:solidFill>
-                <a:srgbClr val="000000"/>
-              </a:solidFill>
-              <a:latin typeface="Arial"/>
-              <a:ea typeface="Arial"/>
-              <a:cs typeface="Arial"/>
-              <a:sym typeface="Arial"/>
-            </a:endParaRPr>
-          </a:p>
-          <a:p>
-            <a:pPr marL="0" marR="0" lvl="0" indent="0" algn="l" rtl="0">
-              <a:lnSpc>
-                <a:spcPct val="100000"/>
-              </a:lnSpc>
-              <a:spcBef>
-                <a:spcPts val="0"/>
-              </a:spcBef>
-              <a:spcAft>
-                <a:spcPts val="0"/>
-              </a:spcAft>
-              <a:buClr>
-                <a:srgbClr val="000000"/>
-              </a:buClr>
-              <a:buSzPts val="2800"/>
-              <a:buFont typeface="Arial"/>
-              <a:buNone/>
-            </a:pPr>
-            <a:endParaRPr sz="2800" b="1" i="0" u="none" strike="noStrike" cap="none">
-              <a:solidFill>
-                <a:srgbClr val="000000"/>
-              </a:solidFill>
-              <a:latin typeface="Arial"/>
-              <a:ea typeface="Arial"/>
-              <a:cs typeface="Arial"/>
-              <a:sym typeface="Arial"/>
-            </a:endParaRPr>
-          </a:p>
-          <a:p>
-            <a:pPr marL="0" marR="0" lvl="0" indent="0" algn="l" rtl="0">
-              <a:lnSpc>
-                <a:spcPct val="100000"/>
-              </a:lnSpc>
-              <a:spcBef>
-                <a:spcPts val="0"/>
-              </a:spcBef>
-              <a:spcAft>
-                <a:spcPts val="0"/>
-              </a:spcAft>
-              <a:buClr>
-                <a:srgbClr val="000000"/>
-              </a:buClr>
-              <a:buSzPts val="2800"/>
-              <a:buFont typeface="Arial"/>
-              <a:buNone/>
-            </a:pPr>
-            <a:r>
-              <a:rPr lang="pt-BR" sz="2800" b="0" i="0" u="none" strike="noStrike" cap="none">
-                <a:solidFill>
-                  <a:srgbClr val="000000"/>
-                </a:solidFill>
-                <a:latin typeface="Arial"/>
-                <a:ea typeface="Arial"/>
-                <a:cs typeface="Arial"/>
-                <a:sym typeface="Arial"/>
-              </a:rPr>
-              <a:t>Instruções: Crie alguns elementos usando as tags HTML e insira nesses elementos as pseudo-classes que aprendemos:</a:t>
-            </a:r>
-            <a:endParaRPr sz="2800" b="0" i="0" u="none" strike="noStrike" cap="none">
-              <a:solidFill>
-                <a:srgbClr val="000000"/>
-              </a:solidFill>
-              <a:latin typeface="Arial"/>
-              <a:ea typeface="Arial"/>
-              <a:cs typeface="Arial"/>
-              <a:sym typeface="Arial"/>
-            </a:endParaRPr>
-          </a:p>
-          <a:p>
-            <a:pPr marL="0" marR="0" lvl="0" indent="0" algn="l" rtl="0">
-              <a:lnSpc>
-                <a:spcPct val="100000"/>
-              </a:lnSpc>
-              <a:spcBef>
-                <a:spcPts val="0"/>
-              </a:spcBef>
-              <a:spcAft>
-                <a:spcPts val="0"/>
-              </a:spcAft>
-              <a:buClr>
-                <a:srgbClr val="000000"/>
-              </a:buClr>
-              <a:buSzPts val="2800"/>
-              <a:buFont typeface="Arial"/>
-              <a:buNone/>
-            </a:pPr>
-            <a:endParaRPr sz="2800" b="0" i="0" u="none" strike="noStrike" cap="none">
-              <a:solidFill>
-                <a:srgbClr val="000000"/>
-              </a:solidFill>
-              <a:latin typeface="Arial"/>
-              <a:ea typeface="Arial"/>
-              <a:cs typeface="Arial"/>
-              <a:sym typeface="Arial"/>
-            </a:endParaRPr>
-          </a:p>
-          <a:p>
-            <a:pPr marL="457200" marR="0" lvl="0" indent="-457200" algn="l" rtl="0">
-              <a:lnSpc>
-                <a:spcPct val="100000"/>
-              </a:lnSpc>
-              <a:spcBef>
-                <a:spcPts val="0"/>
-              </a:spcBef>
-              <a:spcAft>
-                <a:spcPts val="0"/>
-              </a:spcAft>
-              <a:buClr>
-                <a:srgbClr val="000000"/>
-              </a:buClr>
-              <a:buSzPts val="2800"/>
-              <a:buFont typeface="Noto Sans Symbols"/>
-              <a:buChar char="✔"/>
-            </a:pPr>
-            <a:r>
-              <a:rPr lang="pt-BR" sz="2800" b="0" i="0" u="none" strike="noStrike" cap="none">
-                <a:solidFill>
-                  <a:srgbClr val="000000"/>
-                </a:solidFill>
-                <a:latin typeface="Arial"/>
-                <a:ea typeface="Arial"/>
-                <a:cs typeface="Arial"/>
-                <a:sym typeface="Arial"/>
-              </a:rPr>
-              <a:t>first-child</a:t>
-            </a:r>
-            <a:endParaRPr sz="2800" b="0" i="0" u="none" strike="noStrike" cap="none">
-              <a:solidFill>
-                <a:srgbClr val="000000"/>
-              </a:solidFill>
-              <a:latin typeface="Arial"/>
-              <a:ea typeface="Arial"/>
-              <a:cs typeface="Arial"/>
-              <a:sym typeface="Arial"/>
-            </a:endParaRPr>
-          </a:p>
-          <a:p>
-            <a:pPr marL="457200" marR="0" lvl="0" indent="-457200" algn="l" rtl="0">
-              <a:lnSpc>
-                <a:spcPct val="100000"/>
-              </a:lnSpc>
-              <a:spcBef>
-                <a:spcPts val="0"/>
-              </a:spcBef>
-              <a:spcAft>
-                <a:spcPts val="0"/>
-              </a:spcAft>
-              <a:buClr>
-                <a:srgbClr val="000000"/>
-              </a:buClr>
-              <a:buSzPts val="2800"/>
-              <a:buFont typeface="Noto Sans Symbols"/>
-              <a:buChar char="✔"/>
-            </a:pPr>
-            <a:r>
-              <a:rPr lang="pt-BR" sz="2800" b="0" i="0" u="none" strike="noStrike" cap="none">
-                <a:solidFill>
-                  <a:srgbClr val="000000"/>
-                </a:solidFill>
-                <a:latin typeface="Arial"/>
-                <a:ea typeface="Arial"/>
-                <a:cs typeface="Arial"/>
-                <a:sym typeface="Arial"/>
-              </a:rPr>
-              <a:t>last-child</a:t>
-            </a:r>
-            <a:endParaRPr sz="2800" b="0" i="0" u="none" strike="noStrike" cap="none">
-              <a:solidFill>
-                <a:srgbClr val="000000"/>
-              </a:solidFill>
-              <a:latin typeface="Arial"/>
-              <a:ea typeface="Arial"/>
-              <a:cs typeface="Arial"/>
-              <a:sym typeface="Arial"/>
-            </a:endParaRPr>
-          </a:p>
-          <a:p>
-            <a:pPr marL="457200" marR="0" lvl="0" indent="-457200" algn="l" rtl="0">
-              <a:lnSpc>
-                <a:spcPct val="100000"/>
-              </a:lnSpc>
-              <a:spcBef>
-                <a:spcPts val="0"/>
-              </a:spcBef>
-              <a:spcAft>
-                <a:spcPts val="0"/>
-              </a:spcAft>
-              <a:buClr>
-                <a:srgbClr val="000000"/>
-              </a:buClr>
-              <a:buSzPts val="2800"/>
-              <a:buFont typeface="Noto Sans Symbols"/>
-              <a:buChar char="✔"/>
-            </a:pPr>
-            <a:r>
-              <a:rPr lang="pt-BR" sz="2800" b="0" i="0" u="none" strike="noStrike" cap="none">
-                <a:solidFill>
-                  <a:srgbClr val="000000"/>
-                </a:solidFill>
-                <a:latin typeface="Arial"/>
-                <a:ea typeface="Arial"/>
-                <a:cs typeface="Arial"/>
-                <a:sym typeface="Arial"/>
-              </a:rPr>
-              <a:t>nth-child</a:t>
-            </a:r>
-            <a:endParaRPr sz="2800" b="0" i="0" u="none" strike="noStrike" cap="none">
-              <a:solidFill>
-                <a:srgbClr val="000000"/>
-              </a:solidFill>
-              <a:latin typeface="Arial"/>
-              <a:ea typeface="Arial"/>
-              <a:cs typeface="Arial"/>
-              <a:sym typeface="Arial"/>
-            </a:endParaRPr>
-          </a:p>
-          <a:p>
-            <a:pPr marL="457200" marR="0" lvl="0" indent="-457200" algn="l" rtl="0">
-              <a:lnSpc>
-                <a:spcPct val="100000"/>
-              </a:lnSpc>
-              <a:spcBef>
-                <a:spcPts val="0"/>
-              </a:spcBef>
-              <a:spcAft>
-                <a:spcPts val="0"/>
-              </a:spcAft>
-              <a:buClr>
-                <a:srgbClr val="000000"/>
-              </a:buClr>
-              <a:buSzPts val="2800"/>
-              <a:buFont typeface="Noto Sans Symbols"/>
-              <a:buChar char="✔"/>
-            </a:pPr>
-            <a:r>
-              <a:rPr lang="pt-BR" sz="2800" b="0" i="0" u="none" strike="noStrike" cap="none">
-                <a:solidFill>
-                  <a:srgbClr val="000000"/>
-                </a:solidFill>
-                <a:latin typeface="Arial"/>
-                <a:ea typeface="Arial"/>
-                <a:cs typeface="Arial"/>
-                <a:sym typeface="Arial"/>
-              </a:rPr>
-              <a:t>not</a:t>
-            </a:r>
-            <a:endParaRPr sz="2800" b="0" i="0" u="none" strike="noStrike" cap="none">
-              <a:solidFill>
-                <a:srgbClr val="000000"/>
-              </a:solidFill>
-              <a:latin typeface="Arial"/>
-              <a:ea typeface="Arial"/>
-              <a:cs typeface="Arial"/>
-              <a:sym typeface="Arial"/>
-            </a:endParaRPr>
-          </a:p>
-          <a:p>
-            <a:pPr marL="0" marR="0" lvl="0" indent="0" algn="l" rtl="0">
-              <a:lnSpc>
-                <a:spcPct val="100000"/>
-              </a:lnSpc>
-              <a:spcBef>
-                <a:spcPts val="0"/>
-              </a:spcBef>
-              <a:spcAft>
-                <a:spcPts val="0"/>
-              </a:spcAft>
-              <a:buClr>
-                <a:srgbClr val="000000"/>
-              </a:buClr>
-              <a:buSzPts val="2800"/>
-              <a:buFont typeface="Arial"/>
-              <a:buNone/>
-            </a:pPr>
-            <a:endParaRPr sz="2800" b="0" i="0" u="none" strike="noStrike" cap="none">
-              <a:solidFill>
-                <a:srgbClr val="000000"/>
-              </a:solidFill>
-              <a:latin typeface="Arial"/>
-              <a:ea typeface="Arial"/>
-              <a:cs typeface="Arial"/>
-              <a:sym typeface="Arial"/>
-            </a:endParaRPr>
-          </a:p>
-          <a:p>
-            <a:pPr marL="0" marR="0" lvl="0" indent="0" algn="l" rtl="0">
-              <a:lnSpc>
-                <a:spcPct val="100000"/>
-              </a:lnSpc>
-              <a:spcBef>
-                <a:spcPts val="0"/>
-              </a:spcBef>
-              <a:spcAft>
-                <a:spcPts val="0"/>
-              </a:spcAft>
-              <a:buClr>
-                <a:schemeClr val="dk1"/>
-              </a:buClr>
-              <a:buSzPts val="1100"/>
-              <a:buFont typeface="Arial"/>
-              <a:buNone/>
-            </a:pPr>
-            <a:endParaRPr sz="2800" b="0" i="0" u="none" strike="noStrike" cap="none">
-              <a:solidFill>
-                <a:srgbClr val="000000"/>
-              </a:solidFill>
-              <a:latin typeface="Arial"/>
-              <a:ea typeface="Arial"/>
-              <a:cs typeface="Arial"/>
-              <a:sym typeface="Arial"/>
-            </a:endParaRPr>
-          </a:p>
-          <a:p>
-            <a:pPr marL="0" marR="0" lvl="0" indent="0" algn="l" rtl="0">
-              <a:lnSpc>
-                <a:spcPct val="100000"/>
-              </a:lnSpc>
-              <a:spcBef>
-                <a:spcPts val="0"/>
-              </a:spcBef>
-              <a:spcAft>
-                <a:spcPts val="0"/>
-              </a:spcAft>
-              <a:buClr>
-                <a:srgbClr val="000000"/>
-              </a:buClr>
-              <a:buSzPts val="2800"/>
-              <a:buFont typeface="Arial"/>
-              <a:buNone/>
-            </a:pPr>
-            <a:endParaRPr sz="2800" b="0" i="0" u="none" strike="noStrike" cap="none">
-              <a:solidFill>
-                <a:srgbClr val="000000"/>
-              </a:solidFill>
-              <a:latin typeface="Arial"/>
-              <a:ea typeface="Arial"/>
-              <a:cs typeface="Arial"/>
-              <a:sym typeface="Arial"/>
-            </a:endParaRPr>
-          </a:p>
-        </p:txBody>
-      </p:sp>
-    </p:spTree>
-  </p:cSld>
-  <p:clrMapOvr>
-    <a:masterClrMapping/>
-  </p:clrMapOvr>
-</p:sld>
-</file>
-
-<file path=ppt/slides/slide14.xml><?xml version="1.0" encoding="utf-8"?>
+<file path=ppt/slides/slide12.xml><?xml version="1.0" encoding="utf-8"?>
 <p:sld xmlns:a="http://schemas.openxmlformats.org/drawingml/2006/main" xmlns:r="http://schemas.openxmlformats.org/officeDocument/2006/relationships" xmlns:p="http://schemas.openxmlformats.org/presentationml/2006/main">
   <p:cSld>
     <p:spTree>
@@ -12390,7 +9859,7 @@
             <a:fld id="{00000000-1234-1234-1234-123412341234}" type="slidenum">
               <a:rPr lang="pt-BR" smtClean="0"/>
               <a:pPr lvl="0"/>
-              <a:t>14</a:t>
+              <a:t>12</a:t>
             </a:fld>
             <a:endParaRPr lang="pt-BR"/>
           </a:p>
@@ -13448,7 +10917,7 @@
 </p:sld>
 </file>
 
-<file path=ppt/slides/slide15.xml><?xml version="1.0" encoding="utf-8"?>
+<file path=ppt/slides/slide13.xml><?xml version="1.0" encoding="utf-8"?>
 <p:sld xmlns:a="http://schemas.openxmlformats.org/drawingml/2006/main" xmlns:r="http://schemas.openxmlformats.org/officeDocument/2006/relationships" xmlns:p="http://schemas.openxmlformats.org/presentationml/2006/main">
   <p:cSld>
     <p:spTree>
@@ -13562,7 +11031,7 @@
             <a:fld id="{00000000-1234-1234-1234-123412341234}" type="slidenum">
               <a:rPr lang="pt-BR" smtClean="0"/>
               <a:pPr lvl="0"/>
-              <a:t>15</a:t>
+              <a:t>13</a:t>
             </a:fld>
             <a:endParaRPr lang="pt-BR"/>
           </a:p>
@@ -15453,7 +12922,7 @@
 </p:sld>
 </file>
 
-<file path=ppt/slides/slide16.xml><?xml version="1.0" encoding="utf-8"?>
+<file path=ppt/slides/slide14.xml><?xml version="1.0" encoding="utf-8"?>
 <p:sld xmlns:a="http://schemas.openxmlformats.org/drawingml/2006/main" xmlns:r="http://schemas.openxmlformats.org/officeDocument/2006/relationships" xmlns:p="http://schemas.openxmlformats.org/presentationml/2006/main">
   <p:cSld>
     <p:spTree>
@@ -15567,7 +13036,7 @@
             <a:fld id="{00000000-1234-1234-1234-123412341234}" type="slidenum">
               <a:rPr lang="pt-BR" smtClean="0"/>
               <a:pPr lvl="0"/>
-              <a:t>16</a:t>
+              <a:t>14</a:t>
             </a:fld>
             <a:endParaRPr lang="pt-BR"/>
           </a:p>
@@ -17121,7 +14590,7 @@
 </p:sld>
 </file>
 
-<file path=ppt/slides/slide17.xml><?xml version="1.0" encoding="utf-8"?>
+<file path=ppt/slides/slide15.xml><?xml version="1.0" encoding="utf-8"?>
 <p:sld xmlns:a="http://schemas.openxmlformats.org/drawingml/2006/main" xmlns:r="http://schemas.openxmlformats.org/officeDocument/2006/relationships" xmlns:p="http://schemas.openxmlformats.org/presentationml/2006/main">
   <p:cSld>
     <p:spTree>
@@ -17235,7 +14704,7 @@
             <a:fld id="{00000000-1234-1234-1234-123412341234}" type="slidenum">
               <a:rPr lang="pt-BR" smtClean="0"/>
               <a:pPr lvl="0"/>
-              <a:t>17</a:t>
+              <a:t>15</a:t>
             </a:fld>
             <a:endParaRPr lang="pt-BR"/>
           </a:p>
@@ -18823,456 +16292,7 @@
 </p:sld>
 </file>
 
-<file path=ppt/slides/slide18.xml><?xml version="1.0" encoding="utf-8"?>
-<p:sld xmlns:a="http://schemas.openxmlformats.org/drawingml/2006/main" xmlns:r="http://schemas.openxmlformats.org/officeDocument/2006/relationships" xmlns:p="http://schemas.openxmlformats.org/presentationml/2006/main" show="0">
-  <p:cSld>
-    <p:spTree>
-      <p:nvGrpSpPr>
-        <p:cNvPr id="1" name="Shape 198"/>
-        <p:cNvGrpSpPr/>
-        <p:nvPr/>
-      </p:nvGrpSpPr>
-      <p:grpSpPr>
-        <a:xfrm>
-          <a:off x="0" y="0"/>
-          <a:ext cx="0" cy="0"/>
-          <a:chOff x="0" y="0"/>
-          <a:chExt cx="0" cy="0"/>
-        </a:xfrm>
-      </p:grpSpPr>
-      <p:sp>
-        <p:nvSpPr>
-          <p:cNvPr id="199" name="Google Shape;199;p19"/>
-          <p:cNvSpPr txBox="1">
-            <a:spLocks noGrp="1"/>
-          </p:cNvSpPr>
-          <p:nvPr>
-            <p:ph type="title"/>
-          </p:nvPr>
-        </p:nvSpPr>
-        <p:spPr>
-          <a:xfrm>
-            <a:off x="838200" y="387985"/>
-            <a:ext cx="10300970" cy="986155"/>
-          </a:xfrm>
-          <a:prstGeom prst="rect">
-            <a:avLst/>
-          </a:prstGeom>
-          <a:noFill/>
-          <a:ln>
-            <a:noFill/>
-          </a:ln>
-        </p:spPr>
-        <p:txBody>
-          <a:bodyPr spcFirstLastPara="1" wrap="square" lIns="91425" tIns="45700" rIns="91425" bIns="45700" anchor="ctr" anchorCtr="0">
-            <a:normAutofit/>
-          </a:bodyPr>
-          <a:lstStyle/>
-          <a:p>
-            <a:pPr marL="0" lvl="0" indent="0" algn="l" rtl="0">
-              <a:lnSpc>
-                <a:spcPct val="90000"/>
-              </a:lnSpc>
-              <a:spcBef>
-                <a:spcPts val="0"/>
-              </a:spcBef>
-              <a:spcAft>
-                <a:spcPts val="0"/>
-              </a:spcAft>
-              <a:buClr>
-                <a:srgbClr val="595959"/>
-              </a:buClr>
-              <a:buSzPts val="4400"/>
-              <a:buFont typeface="Arial"/>
-              <a:buNone/>
-            </a:pPr>
-            <a:r>
-              <a:rPr lang="pt-BR"/>
-              <a:t>Para Praticar!</a:t>
-            </a:r>
-            <a:endParaRPr/>
-          </a:p>
-        </p:txBody>
-      </p:sp>
-      <p:sp>
-        <p:nvSpPr>
-          <p:cNvPr id="201" name="Google Shape;201;p19"/>
-          <p:cNvSpPr txBox="1"/>
-          <p:nvPr/>
-        </p:nvSpPr>
-        <p:spPr>
-          <a:xfrm>
-            <a:off x="911860" y="1557020"/>
-            <a:ext cx="10365740" cy="4493508"/>
-          </a:xfrm>
-          <a:prstGeom prst="rect">
-            <a:avLst/>
-          </a:prstGeom>
-          <a:noFill/>
-          <a:ln>
-            <a:noFill/>
-          </a:ln>
-        </p:spPr>
-        <p:txBody>
-          <a:bodyPr spcFirstLastPara="1" wrap="square" lIns="91425" tIns="91425" rIns="91425" bIns="91425" anchor="t" anchorCtr="0">
-            <a:spAutoFit/>
-          </a:bodyPr>
-          <a:lstStyle/>
-          <a:p>
-            <a:pPr marL="0" marR="0" lvl="0" indent="0" algn="l" rtl="0">
-              <a:lnSpc>
-                <a:spcPct val="100000"/>
-              </a:lnSpc>
-              <a:spcBef>
-                <a:spcPts val="0"/>
-              </a:spcBef>
-              <a:spcAft>
-                <a:spcPts val="0"/>
-              </a:spcAft>
-              <a:buClr>
-                <a:srgbClr val="000000"/>
-              </a:buClr>
-              <a:buSzPts val="2800"/>
-              <a:buFont typeface="Arial"/>
-              <a:buNone/>
-            </a:pPr>
-            <a:r>
-              <a:rPr lang="pt-BR" sz="2800" b="1" i="0" u="none" strike="noStrike" cap="none" dirty="0">
-                <a:solidFill>
-                  <a:srgbClr val="000000"/>
-                </a:solidFill>
-                <a:latin typeface="Arial"/>
-                <a:ea typeface="Arial"/>
-                <a:cs typeface="Arial"/>
-                <a:sym typeface="Arial"/>
-              </a:rPr>
-              <a:t>Descrição da atividade. </a:t>
-            </a:r>
-            <a:endParaRPr sz="2800" b="1" i="0" u="none" strike="noStrike" cap="none" dirty="0">
-              <a:solidFill>
-                <a:srgbClr val="000000"/>
-              </a:solidFill>
-              <a:latin typeface="Arial"/>
-              <a:ea typeface="Arial"/>
-              <a:cs typeface="Arial"/>
-              <a:sym typeface="Arial"/>
-            </a:endParaRPr>
-          </a:p>
-          <a:p>
-            <a:pPr marL="0" marR="0" lvl="0" indent="0" algn="l" rtl="0">
-              <a:lnSpc>
-                <a:spcPct val="100000"/>
-              </a:lnSpc>
-              <a:spcBef>
-                <a:spcPts val="0"/>
-              </a:spcBef>
-              <a:spcAft>
-                <a:spcPts val="0"/>
-              </a:spcAft>
-              <a:buClr>
-                <a:srgbClr val="000000"/>
-              </a:buClr>
-              <a:buSzPts val="2800"/>
-              <a:buFont typeface="Arial"/>
-              <a:buNone/>
-            </a:pPr>
-            <a:endParaRPr sz="2800" b="0" i="0" u="none" strike="noStrike" cap="none" dirty="0">
-              <a:solidFill>
-                <a:srgbClr val="000000"/>
-              </a:solidFill>
-              <a:latin typeface="Arial"/>
-              <a:ea typeface="Arial"/>
-              <a:cs typeface="Arial"/>
-              <a:sym typeface="Arial"/>
-            </a:endParaRPr>
-          </a:p>
-          <a:p>
-            <a:pPr marL="0" marR="0" lvl="0" indent="0" algn="l" rtl="0">
-              <a:lnSpc>
-                <a:spcPct val="100000"/>
-              </a:lnSpc>
-              <a:spcBef>
-                <a:spcPts val="0"/>
-              </a:spcBef>
-              <a:spcAft>
-                <a:spcPts val="0"/>
-              </a:spcAft>
-              <a:buClr>
-                <a:schemeClr val="dk1"/>
-              </a:buClr>
-              <a:buSzPts val="1100"/>
-              <a:buFont typeface="Arial"/>
-              <a:buNone/>
-            </a:pPr>
-            <a:r>
-              <a:rPr lang="pt-BR" sz="2800" b="0" i="0" u="none" strike="noStrike" cap="none" dirty="0">
-                <a:solidFill>
-                  <a:srgbClr val="000000"/>
-                </a:solidFill>
-                <a:latin typeface="Arial"/>
-                <a:ea typeface="Arial"/>
-                <a:cs typeface="Arial"/>
-                <a:sym typeface="Arial"/>
-              </a:rPr>
-              <a:t>Instruções: Crie alguns elementos usando as </a:t>
-            </a:r>
-            <a:r>
-              <a:rPr lang="pt-BR" sz="2800" b="0" i="0" u="none" strike="noStrike" cap="none" dirty="0" err="1">
-                <a:solidFill>
-                  <a:srgbClr val="000000"/>
-                </a:solidFill>
-                <a:latin typeface="Arial"/>
-                <a:ea typeface="Arial"/>
-                <a:cs typeface="Arial"/>
-                <a:sym typeface="Arial"/>
-              </a:rPr>
-              <a:t>tags</a:t>
-            </a:r>
-            <a:r>
-              <a:rPr lang="pt-BR" sz="2800" b="0" i="0" u="none" strike="noStrike" cap="none" dirty="0">
-                <a:solidFill>
-                  <a:srgbClr val="000000"/>
-                </a:solidFill>
-                <a:latin typeface="Arial"/>
-                <a:ea typeface="Arial"/>
-                <a:cs typeface="Arial"/>
-                <a:sym typeface="Arial"/>
-              </a:rPr>
-              <a:t> HTML e insira nesses elementos as </a:t>
-            </a:r>
-            <a:r>
-              <a:rPr lang="pt-BR" sz="2800" b="0" i="0" u="none" strike="noStrike" cap="none" dirty="0" err="1">
-                <a:solidFill>
-                  <a:srgbClr val="000000"/>
-                </a:solidFill>
-                <a:latin typeface="Arial"/>
-                <a:ea typeface="Arial"/>
-                <a:cs typeface="Arial"/>
-                <a:sym typeface="Arial"/>
-              </a:rPr>
-              <a:t>pseudo-classes</a:t>
-            </a:r>
-            <a:r>
-              <a:rPr lang="pt-BR" sz="2800" b="0" i="0" u="none" strike="noStrike" cap="none" dirty="0">
-                <a:solidFill>
-                  <a:srgbClr val="000000"/>
-                </a:solidFill>
-                <a:latin typeface="Arial"/>
-                <a:ea typeface="Arial"/>
-                <a:cs typeface="Arial"/>
-                <a:sym typeface="Arial"/>
-              </a:rPr>
-              <a:t> que aprendemos:</a:t>
-            </a:r>
-            <a:endParaRPr sz="2800" b="0" i="0" u="none" strike="noStrike" cap="none" dirty="0">
-              <a:solidFill>
-                <a:srgbClr val="000000"/>
-              </a:solidFill>
-              <a:latin typeface="Arial"/>
-              <a:ea typeface="Arial"/>
-              <a:cs typeface="Arial"/>
-              <a:sym typeface="Arial"/>
-            </a:endParaRPr>
-          </a:p>
-          <a:p>
-            <a:pPr marL="0" marR="0" lvl="0" indent="0" algn="l" rtl="0">
-              <a:lnSpc>
-                <a:spcPct val="100000"/>
-              </a:lnSpc>
-              <a:spcBef>
-                <a:spcPts val="0"/>
-              </a:spcBef>
-              <a:spcAft>
-                <a:spcPts val="0"/>
-              </a:spcAft>
-              <a:buClr>
-                <a:schemeClr val="dk1"/>
-              </a:buClr>
-              <a:buSzPts val="1100"/>
-              <a:buFont typeface="Arial"/>
-              <a:buNone/>
-            </a:pPr>
-            <a:endParaRPr sz="2800" b="0" i="0" u="none" strike="noStrike" cap="none" dirty="0">
-              <a:solidFill>
-                <a:srgbClr val="000000"/>
-              </a:solidFill>
-              <a:latin typeface="Arial"/>
-              <a:ea typeface="Arial"/>
-              <a:cs typeface="Arial"/>
-              <a:sym typeface="Arial"/>
-            </a:endParaRPr>
-          </a:p>
-          <a:p>
-            <a:pPr marL="457200" lvl="0" indent="-314325">
-              <a:buSzPts val="1350"/>
-              <a:buFont typeface="DM Sans"/>
-              <a:buChar char="✓"/>
-            </a:pPr>
-            <a:r>
-              <a:rPr lang="pt-BR" sz="2800" dirty="0" err="1"/>
-              <a:t>required</a:t>
-            </a:r>
-            <a:endParaRPr lang="pt-BR" sz="2800" dirty="0"/>
-          </a:p>
-          <a:p>
-            <a:pPr marL="457200" lvl="0" indent="-314325">
-              <a:buSzPts val="1350"/>
-              <a:buFont typeface="DM Sans"/>
-              <a:buChar char="✓"/>
-            </a:pPr>
-            <a:r>
-              <a:rPr lang="pt-BR" sz="2800" b="0" i="0" u="none" strike="noStrike" cap="none" dirty="0" err="1">
-                <a:solidFill>
-                  <a:srgbClr val="000000"/>
-                </a:solidFill>
-                <a:latin typeface="Arial"/>
-                <a:ea typeface="Arial"/>
-                <a:cs typeface="Arial"/>
-                <a:sym typeface="Arial"/>
-              </a:rPr>
-              <a:t>checked</a:t>
-            </a:r>
-            <a:endParaRPr sz="2800" b="0" i="0" u="none" strike="noStrike" cap="none" dirty="0">
-              <a:solidFill>
-                <a:srgbClr val="000000"/>
-              </a:solidFill>
-              <a:latin typeface="Arial"/>
-              <a:ea typeface="Arial"/>
-              <a:cs typeface="Arial"/>
-              <a:sym typeface="Arial"/>
-            </a:endParaRPr>
-          </a:p>
-          <a:p>
-            <a:pPr marL="457200" marR="0" lvl="0" indent="-314325" algn="l" rtl="0">
-              <a:lnSpc>
-                <a:spcPct val="100000"/>
-              </a:lnSpc>
-              <a:spcBef>
-                <a:spcPts val="0"/>
-              </a:spcBef>
-              <a:spcAft>
-                <a:spcPts val="0"/>
-              </a:spcAft>
-              <a:buClr>
-                <a:srgbClr val="000000"/>
-              </a:buClr>
-              <a:buSzPts val="1350"/>
-              <a:buFont typeface="DM Sans"/>
-              <a:buChar char="✓"/>
-            </a:pPr>
-            <a:r>
-              <a:rPr lang="pt-BR" sz="2800" b="0" i="0" u="none" strike="noStrike" cap="none" dirty="0" err="1">
-                <a:solidFill>
-                  <a:srgbClr val="000000"/>
-                </a:solidFill>
-                <a:latin typeface="Arial"/>
-                <a:ea typeface="Arial"/>
-                <a:cs typeface="Arial"/>
-                <a:sym typeface="Arial"/>
-              </a:rPr>
-              <a:t>disabled</a:t>
-            </a:r>
-            <a:endParaRPr sz="2800" b="0" i="0" u="none" strike="noStrike" cap="none" dirty="0">
-              <a:solidFill>
-                <a:srgbClr val="000000"/>
-              </a:solidFill>
-              <a:latin typeface="Arial"/>
-              <a:ea typeface="Arial"/>
-              <a:cs typeface="Arial"/>
-              <a:sym typeface="Arial"/>
-            </a:endParaRPr>
-          </a:p>
-          <a:p>
-            <a:pPr marL="457200" marR="0" lvl="0" indent="-314325" algn="l" rtl="0">
-              <a:lnSpc>
-                <a:spcPct val="100000"/>
-              </a:lnSpc>
-              <a:spcBef>
-                <a:spcPts val="0"/>
-              </a:spcBef>
-              <a:spcAft>
-                <a:spcPts val="0"/>
-              </a:spcAft>
-              <a:buClr>
-                <a:srgbClr val="000000"/>
-              </a:buClr>
-              <a:buSzPts val="1350"/>
-              <a:buFont typeface="DM Sans"/>
-              <a:buChar char="✓"/>
-            </a:pPr>
-            <a:r>
-              <a:rPr lang="pt-BR" sz="2800" b="0" i="0" u="none" strike="noStrike" cap="none" dirty="0" err="1">
-                <a:solidFill>
-                  <a:srgbClr val="000000"/>
-                </a:solidFill>
-                <a:latin typeface="Arial"/>
-                <a:ea typeface="Arial"/>
-                <a:cs typeface="Arial"/>
-                <a:sym typeface="Arial"/>
-              </a:rPr>
-              <a:t>valid</a:t>
-            </a:r>
-            <a:endParaRPr sz="2800" b="0" i="0" u="none" strike="noStrike" cap="none" dirty="0">
-              <a:solidFill>
-                <a:srgbClr val="000000"/>
-              </a:solidFill>
-              <a:latin typeface="Arial"/>
-              <a:ea typeface="Arial"/>
-              <a:cs typeface="Arial"/>
-              <a:sym typeface="Arial"/>
-            </a:endParaRPr>
-          </a:p>
-          <a:p>
-            <a:pPr marL="457200" marR="0" lvl="0" indent="-314325" algn="l" rtl="0">
-              <a:lnSpc>
-                <a:spcPct val="100000"/>
-              </a:lnSpc>
-              <a:spcBef>
-                <a:spcPts val="0"/>
-              </a:spcBef>
-              <a:spcAft>
-                <a:spcPts val="0"/>
-              </a:spcAft>
-              <a:buClr>
-                <a:srgbClr val="000000"/>
-              </a:buClr>
-              <a:buSzPts val="1350"/>
-              <a:buFont typeface="DM Sans"/>
-              <a:buChar char="✓"/>
-            </a:pPr>
-            <a:r>
-              <a:rPr lang="pt-BR" sz="2800" b="0" i="0" u="none" strike="noStrike" cap="none" dirty="0" err="1">
-                <a:solidFill>
-                  <a:srgbClr val="000000"/>
-                </a:solidFill>
-                <a:latin typeface="Arial"/>
-                <a:ea typeface="Arial"/>
-                <a:cs typeface="Arial"/>
-                <a:sym typeface="Arial"/>
-              </a:rPr>
-              <a:t>invalid</a:t>
-            </a:r>
-            <a:endParaRPr sz="2800" b="0" i="0" u="none" strike="noStrike" cap="none" dirty="0">
-              <a:solidFill>
-                <a:srgbClr val="000000"/>
-              </a:solidFill>
-              <a:latin typeface="Arial"/>
-              <a:ea typeface="Arial"/>
-              <a:cs typeface="Arial"/>
-              <a:sym typeface="Arial"/>
-            </a:endParaRPr>
-          </a:p>
-        </p:txBody>
-      </p:sp>
-    </p:spTree>
-  </p:cSld>
-  <p:clrMapOvr>
-    <a:masterClrMapping/>
-  </p:clrMapOvr>
-</p:sld>
-</file>
-
-<file path=ppt/slides/slide19.xml><?xml version="1.0" encoding="utf-8"?>
+<file path=ppt/slides/slide16.xml><?xml version="1.0" encoding="utf-8"?>
 <p:sld xmlns:a="http://schemas.openxmlformats.org/drawingml/2006/main" xmlns:r="http://schemas.openxmlformats.org/officeDocument/2006/relationships" xmlns:p="http://schemas.openxmlformats.org/presentationml/2006/main">
   <p:cSld>
     <p:spTree>
@@ -19386,7 +16406,7 @@
             <a:fld id="{00000000-1234-1234-1234-123412341234}" type="slidenum">
               <a:rPr lang="pt-BR" smtClean="0"/>
               <a:pPr lvl="0"/>
-              <a:t>19</a:t>
+              <a:t>16</a:t>
             </a:fld>
             <a:endParaRPr lang="pt-BR"/>
           </a:p>
@@ -20252,12 +17272,18 @@
 </p:sld>
 </file>
 
-<file path=ppt/slides/slide2.xml><?xml version="1.0" encoding="utf-8"?>
+<file path=ppt/slides/slide17.xml><?xml version="1.0" encoding="utf-8"?>
 <p:sld xmlns:a="http://schemas.openxmlformats.org/drawingml/2006/main" xmlns:r="http://schemas.openxmlformats.org/officeDocument/2006/relationships" xmlns:p="http://schemas.openxmlformats.org/presentationml/2006/main">
   <p:cSld>
     <p:spTree>
       <p:nvGrpSpPr>
-        <p:cNvPr id="1" name="Shape 64"/>
+        <p:cNvPr id="1" name="">
+          <a:extLst>
+            <a:ext uri="{FF2B5EF4-FFF2-40B4-BE49-F238E27FC236}">
+              <a16:creationId xmlns:a16="http://schemas.microsoft.com/office/drawing/2014/main" id="{E39B55FB-CF7F-261C-8F6F-AC64C7574CEC}"/>
+            </a:ext>
+          </a:extLst>
+        </p:cNvPr>
         <p:cNvGrpSpPr/>
         <p:nvPr/>
       </p:nvGrpSpPr>
@@ -20269,12 +17295,100 @@
           <a:chExt cx="0" cy="0"/>
         </a:xfrm>
       </p:grpSpPr>
+      <p:sp>
+        <p:nvSpPr>
+          <p:cNvPr id="8" name="Retângulo 7">
+            <a:extLst>
+              <a:ext uri="{FF2B5EF4-FFF2-40B4-BE49-F238E27FC236}">
+                <a16:creationId xmlns:a16="http://schemas.microsoft.com/office/drawing/2014/main" id="{DDE713B7-A93D-4E8E-9C92-CB37C4DDA960}"/>
+              </a:ext>
+            </a:extLst>
+          </p:cNvPr>
+          <p:cNvSpPr/>
+          <p:nvPr/>
+        </p:nvSpPr>
+        <p:spPr>
+          <a:xfrm>
+            <a:off x="0" y="0"/>
+            <a:ext cx="12192000" cy="6858000"/>
+          </a:xfrm>
+          <a:prstGeom prst="rect">
+            <a:avLst/>
+          </a:prstGeom>
+          <a:solidFill>
+            <a:schemeClr val="tx1">
+              <a:lumMod val="85000"/>
+              <a:lumOff val="15000"/>
+            </a:schemeClr>
+          </a:solidFill>
+        </p:spPr>
+        <p:style>
+          <a:lnRef idx="2">
+            <a:schemeClr val="dk1">
+              <a:shade val="15000"/>
+            </a:schemeClr>
+          </a:lnRef>
+          <a:fillRef idx="1">
+            <a:schemeClr val="dk1"/>
+          </a:fillRef>
+          <a:effectRef idx="0">
+            <a:schemeClr val="dk1"/>
+          </a:effectRef>
+          <a:fontRef idx="minor">
+            <a:schemeClr val="lt1"/>
+          </a:fontRef>
+        </p:style>
+        <p:txBody>
+          <a:bodyPr rtlCol="0" anchor="ctr"/>
+          <a:lstStyle/>
+          <a:p>
+            <a:pPr algn="ctr"/>
+            <a:endParaRPr lang="pt-BR" dirty="0"/>
+          </a:p>
+        </p:txBody>
+      </p:sp>
+      <p:sp>
+        <p:nvSpPr>
+          <p:cNvPr id="3" name="Espaço Reservado para Número de Slide 2">
+            <a:extLst>
+              <a:ext uri="{FF2B5EF4-FFF2-40B4-BE49-F238E27FC236}">
+                <a16:creationId xmlns:a16="http://schemas.microsoft.com/office/drawing/2014/main" id="{58733BB9-3C59-B9BD-913A-4D42D5D7B2D7}"/>
+              </a:ext>
+            </a:extLst>
+          </p:cNvPr>
+          <p:cNvSpPr>
+            <a:spLocks noGrp="1"/>
+          </p:cNvSpPr>
+          <p:nvPr>
+            <p:ph type="sldNum" idx="4294967295"/>
+          </p:nvPr>
+        </p:nvSpPr>
+        <p:spPr>
+          <a:xfrm>
+            <a:off x="11353800" y="5594350"/>
+            <a:ext cx="838200" cy="365125"/>
+          </a:xfrm>
+        </p:spPr>
+        <p:txBody>
+          <a:bodyPr/>
+          <a:lstStyle/>
+          <a:p>
+            <a:pPr lvl="0"/>
+            <a:fld id="{00000000-1234-1234-1234-123412341234}" type="slidenum">
+              <a:rPr lang="pt-BR" smtClean="0"/>
+              <a:pPr lvl="0"/>
+              <a:t>17</a:t>
+            </a:fld>
+            <a:endParaRPr lang="pt-BR"/>
+          </a:p>
+        </p:txBody>
+      </p:sp>
       <p:pic>
         <p:nvPicPr>
-          <p:cNvPr id="10" name="Imagem 9">
+          <p:cNvPr id="7" name="Imagem 6">
             <a:extLst>
               <a:ext uri="{FF2B5EF4-FFF2-40B4-BE49-F238E27FC236}">
-                <a16:creationId xmlns:a16="http://schemas.microsoft.com/office/drawing/2014/main" id="{A7199026-5003-32A9-5A4F-BF02DE3DF027}"/>
+                <a16:creationId xmlns:a16="http://schemas.microsoft.com/office/drawing/2014/main" id="{00DF8A01-0860-23D2-DEF1-5CF341BFF5FB}"/>
               </a:ext>
             </a:extLst>
           </p:cNvPr>
@@ -20284,41 +17398,82 @@
           <p:nvPr/>
         </p:nvPicPr>
         <p:blipFill>
-          <a:blip r:embed="rId3"/>
+          <a:blip r:embed="rId2"/>
           <a:stretch>
             <a:fillRect/>
           </a:stretch>
         </p:blipFill>
         <p:spPr>
-          <a:xfrm flipH="1">
-            <a:off x="-128588" y="0"/>
-            <a:ext cx="11901487" cy="6858000"/>
+          <a:xfrm>
+            <a:off x="-215900" y="-71438"/>
+            <a:ext cx="12522201" cy="7043738"/>
           </a:xfrm>
           <a:prstGeom prst="rect">
             <a:avLst/>
           </a:prstGeom>
-          <a:scene3d>
-            <a:camera prst="orthographicFront">
-              <a:rot lat="0" lon="0" rev="0"/>
-            </a:camera>
-            <a:lightRig rig="threePt" dir="t"/>
-          </a:scene3d>
         </p:spPr>
       </p:pic>
+      <p:cxnSp>
+        <p:nvCxnSpPr>
+          <p:cNvPr id="18" name="Conector reto 17">
+            <a:extLst>
+              <a:ext uri="{FF2B5EF4-FFF2-40B4-BE49-F238E27FC236}">
+                <a16:creationId xmlns:a16="http://schemas.microsoft.com/office/drawing/2014/main" id="{ADEC6381-2EEA-A45B-77E2-7BE0D45DEC1C}"/>
+              </a:ext>
+            </a:extLst>
+          </p:cNvPr>
+          <p:cNvCxnSpPr>
+            <a:cxnSpLocks/>
+          </p:cNvCxnSpPr>
+          <p:nvPr/>
+        </p:nvCxnSpPr>
+        <p:spPr>
+          <a:xfrm>
+            <a:off x="856932" y="743587"/>
+            <a:ext cx="0" cy="828040"/>
+          </a:xfrm>
+          <a:prstGeom prst="line">
+            <a:avLst/>
+          </a:prstGeom>
+          <a:ln>
+            <a:solidFill>
+              <a:srgbClr val="ED145B"/>
+            </a:solidFill>
+          </a:ln>
+        </p:spPr>
+        <p:style>
+          <a:lnRef idx="3">
+            <a:schemeClr val="dk1"/>
+          </a:lnRef>
+          <a:fillRef idx="0">
+            <a:schemeClr val="dk1"/>
+          </a:fillRef>
+          <a:effectRef idx="2">
+            <a:schemeClr val="dk1"/>
+          </a:effectRef>
+          <a:fontRef idx="minor">
+            <a:schemeClr val="tx1"/>
+          </a:fontRef>
+        </p:style>
+      </p:cxnSp>
       <p:sp>
         <p:nvSpPr>
-          <p:cNvPr id="65" name="Google Shape;65;p3"/>
+          <p:cNvPr id="22" name="Google Shape;85;p6">
+            <a:extLst>
+              <a:ext uri="{FF2B5EF4-FFF2-40B4-BE49-F238E27FC236}">
+                <a16:creationId xmlns:a16="http://schemas.microsoft.com/office/drawing/2014/main" id="{92C6C37A-4602-F79E-44D0-02C07B35B4CB}"/>
+              </a:ext>
+            </a:extLst>
+          </p:cNvPr>
           <p:cNvSpPr txBox="1">
-            <a:spLocks noGrp="1"/>
+            <a:spLocks/>
           </p:cNvSpPr>
-          <p:nvPr>
-            <p:ph type="title"/>
-          </p:nvPr>
+          <p:nvPr/>
         </p:nvSpPr>
         <p:spPr>
           <a:xfrm>
-            <a:off x="838198" y="3017044"/>
-            <a:ext cx="10515600" cy="823912"/>
+            <a:off x="945515" y="664529"/>
+            <a:ext cx="10300970" cy="986155"/>
           </a:xfrm>
           <a:prstGeom prst="rect">
             <a:avLst/>
@@ -20330,68 +17485,824 @@
         </p:spPr>
         <p:txBody>
           <a:bodyPr spcFirstLastPara="1" wrap="square" lIns="91425" tIns="45700" rIns="91425" bIns="45700" anchor="ctr" anchorCtr="0">
-            <a:normAutofit fontScale="90000"/>
+            <a:noAutofit/>
+          </a:bodyPr>
+          <a:lstStyle>
+            <a:defPPr marR="0" lvl="0" algn="l" rtl="0">
+              <a:lnSpc>
+                <a:spcPct val="100000"/>
+              </a:lnSpc>
+              <a:spcBef>
+                <a:spcPts val="0"/>
+              </a:spcBef>
+              <a:spcAft>
+                <a:spcPts val="0"/>
+              </a:spcAft>
+            </a:defPPr>
+            <a:lvl1pPr marR="0" lvl="0" algn="l" rtl="0">
+              <a:lnSpc>
+                <a:spcPct val="100000"/>
+              </a:lnSpc>
+              <a:spcBef>
+                <a:spcPts val="0"/>
+              </a:spcBef>
+              <a:spcAft>
+                <a:spcPts val="0"/>
+              </a:spcAft>
+              <a:buClr>
+                <a:srgbClr val="000000"/>
+              </a:buClr>
+              <a:buFont typeface="Arial"/>
+              <a:defRPr sz="1400" b="0" i="0" u="none" strike="noStrike" cap="none">
+                <a:solidFill>
+                  <a:srgbClr val="000000"/>
+                </a:solidFill>
+                <a:latin typeface="Arial"/>
+                <a:ea typeface="Arial"/>
+                <a:cs typeface="Arial"/>
+                <a:sym typeface="Arial"/>
+              </a:defRPr>
+            </a:lvl1pPr>
+            <a:lvl2pPr marR="0" lvl="1" algn="l" rtl="0">
+              <a:lnSpc>
+                <a:spcPct val="100000"/>
+              </a:lnSpc>
+              <a:spcBef>
+                <a:spcPts val="0"/>
+              </a:spcBef>
+              <a:spcAft>
+                <a:spcPts val="0"/>
+              </a:spcAft>
+              <a:buClr>
+                <a:srgbClr val="000000"/>
+              </a:buClr>
+              <a:buFont typeface="Arial"/>
+              <a:defRPr sz="1400" b="0" i="0" u="none" strike="noStrike" cap="none">
+                <a:solidFill>
+                  <a:srgbClr val="000000"/>
+                </a:solidFill>
+                <a:latin typeface="Arial"/>
+                <a:ea typeface="Arial"/>
+                <a:cs typeface="Arial"/>
+                <a:sym typeface="Arial"/>
+              </a:defRPr>
+            </a:lvl2pPr>
+            <a:lvl3pPr marR="0" lvl="2" algn="l" rtl="0">
+              <a:lnSpc>
+                <a:spcPct val="100000"/>
+              </a:lnSpc>
+              <a:spcBef>
+                <a:spcPts val="0"/>
+              </a:spcBef>
+              <a:spcAft>
+                <a:spcPts val="0"/>
+              </a:spcAft>
+              <a:buClr>
+                <a:srgbClr val="000000"/>
+              </a:buClr>
+              <a:buFont typeface="Arial"/>
+              <a:defRPr sz="1400" b="0" i="0" u="none" strike="noStrike" cap="none">
+                <a:solidFill>
+                  <a:srgbClr val="000000"/>
+                </a:solidFill>
+                <a:latin typeface="Arial"/>
+                <a:ea typeface="Arial"/>
+                <a:cs typeface="Arial"/>
+                <a:sym typeface="Arial"/>
+              </a:defRPr>
+            </a:lvl3pPr>
+            <a:lvl4pPr marR="0" lvl="3" algn="l" rtl="0">
+              <a:lnSpc>
+                <a:spcPct val="100000"/>
+              </a:lnSpc>
+              <a:spcBef>
+                <a:spcPts val="0"/>
+              </a:spcBef>
+              <a:spcAft>
+                <a:spcPts val="0"/>
+              </a:spcAft>
+              <a:buClr>
+                <a:srgbClr val="000000"/>
+              </a:buClr>
+              <a:buFont typeface="Arial"/>
+              <a:defRPr sz="1400" b="0" i="0" u="none" strike="noStrike" cap="none">
+                <a:solidFill>
+                  <a:srgbClr val="000000"/>
+                </a:solidFill>
+                <a:latin typeface="Arial"/>
+                <a:ea typeface="Arial"/>
+                <a:cs typeface="Arial"/>
+                <a:sym typeface="Arial"/>
+              </a:defRPr>
+            </a:lvl4pPr>
+            <a:lvl5pPr marR="0" lvl="4" algn="l" rtl="0">
+              <a:lnSpc>
+                <a:spcPct val="100000"/>
+              </a:lnSpc>
+              <a:spcBef>
+                <a:spcPts val="0"/>
+              </a:spcBef>
+              <a:spcAft>
+                <a:spcPts val="0"/>
+              </a:spcAft>
+              <a:buClr>
+                <a:srgbClr val="000000"/>
+              </a:buClr>
+              <a:buFont typeface="Arial"/>
+              <a:defRPr sz="1400" b="0" i="0" u="none" strike="noStrike" cap="none">
+                <a:solidFill>
+                  <a:srgbClr val="000000"/>
+                </a:solidFill>
+                <a:latin typeface="Arial"/>
+                <a:ea typeface="Arial"/>
+                <a:cs typeface="Arial"/>
+                <a:sym typeface="Arial"/>
+              </a:defRPr>
+            </a:lvl5pPr>
+            <a:lvl6pPr marR="0" lvl="5" algn="l" rtl="0">
+              <a:lnSpc>
+                <a:spcPct val="100000"/>
+              </a:lnSpc>
+              <a:spcBef>
+                <a:spcPts val="0"/>
+              </a:spcBef>
+              <a:spcAft>
+                <a:spcPts val="0"/>
+              </a:spcAft>
+              <a:buClr>
+                <a:srgbClr val="000000"/>
+              </a:buClr>
+              <a:buFont typeface="Arial"/>
+              <a:defRPr sz="1400" b="0" i="0" u="none" strike="noStrike" cap="none">
+                <a:solidFill>
+                  <a:srgbClr val="000000"/>
+                </a:solidFill>
+                <a:latin typeface="Arial"/>
+                <a:ea typeface="Arial"/>
+                <a:cs typeface="Arial"/>
+                <a:sym typeface="Arial"/>
+              </a:defRPr>
+            </a:lvl6pPr>
+            <a:lvl7pPr marR="0" lvl="6" algn="l" rtl="0">
+              <a:lnSpc>
+                <a:spcPct val="100000"/>
+              </a:lnSpc>
+              <a:spcBef>
+                <a:spcPts val="0"/>
+              </a:spcBef>
+              <a:spcAft>
+                <a:spcPts val="0"/>
+              </a:spcAft>
+              <a:buClr>
+                <a:srgbClr val="000000"/>
+              </a:buClr>
+              <a:buFont typeface="Arial"/>
+              <a:defRPr sz="1400" b="0" i="0" u="none" strike="noStrike" cap="none">
+                <a:solidFill>
+                  <a:srgbClr val="000000"/>
+                </a:solidFill>
+                <a:latin typeface="Arial"/>
+                <a:ea typeface="Arial"/>
+                <a:cs typeface="Arial"/>
+                <a:sym typeface="Arial"/>
+              </a:defRPr>
+            </a:lvl7pPr>
+            <a:lvl8pPr marR="0" lvl="7" algn="l" rtl="0">
+              <a:lnSpc>
+                <a:spcPct val="100000"/>
+              </a:lnSpc>
+              <a:spcBef>
+                <a:spcPts val="0"/>
+              </a:spcBef>
+              <a:spcAft>
+                <a:spcPts val="0"/>
+              </a:spcAft>
+              <a:buClr>
+                <a:srgbClr val="000000"/>
+              </a:buClr>
+              <a:buFont typeface="Arial"/>
+              <a:defRPr sz="1400" b="0" i="0" u="none" strike="noStrike" cap="none">
+                <a:solidFill>
+                  <a:srgbClr val="000000"/>
+                </a:solidFill>
+                <a:latin typeface="Arial"/>
+                <a:ea typeface="Arial"/>
+                <a:cs typeface="Arial"/>
+                <a:sym typeface="Arial"/>
+              </a:defRPr>
+            </a:lvl8pPr>
+            <a:lvl9pPr marR="0" lvl="8" algn="l" rtl="0">
+              <a:lnSpc>
+                <a:spcPct val="100000"/>
+              </a:lnSpc>
+              <a:spcBef>
+                <a:spcPts val="0"/>
+              </a:spcBef>
+              <a:spcAft>
+                <a:spcPts val="0"/>
+              </a:spcAft>
+              <a:buClr>
+                <a:srgbClr val="000000"/>
+              </a:buClr>
+              <a:buFont typeface="Arial"/>
+              <a:defRPr sz="1400" b="0" i="0" u="none" strike="noStrike" cap="none">
+                <a:solidFill>
+                  <a:srgbClr val="000000"/>
+                </a:solidFill>
+                <a:latin typeface="Arial"/>
+                <a:ea typeface="Arial"/>
+                <a:cs typeface="Arial"/>
+                <a:sym typeface="Arial"/>
+              </a:defRPr>
+            </a:lvl9pPr>
+          </a:lstStyle>
+          <a:p>
+            <a:pPr>
+              <a:lnSpc>
+                <a:spcPct val="120000"/>
+              </a:lnSpc>
+              <a:buClr>
+                <a:srgbClr val="595959"/>
+              </a:buClr>
+              <a:buSzPct val="222222"/>
+            </a:pPr>
+            <a:r>
+              <a:rPr lang="pt-BR" sz="4300" dirty="0" err="1">
+                <a:solidFill>
+                  <a:schemeClr val="bg1"/>
+                </a:solidFill>
+              </a:rPr>
+              <a:t>Pseudo-elemento</a:t>
+            </a:r>
+            <a:br>
+              <a:rPr lang="pt-BR" sz="4300" dirty="0">
+                <a:solidFill>
+                  <a:schemeClr val="tx2">
+                    <a:lumMod val="90000"/>
+                  </a:schemeClr>
+                </a:solidFill>
+              </a:rPr>
+            </a:br>
+            <a:r>
+              <a:rPr lang="pt-BR" sz="2000" dirty="0">
+                <a:solidFill>
+                  <a:schemeClr val="tx2">
+                    <a:lumMod val="90000"/>
+                  </a:schemeClr>
+                </a:solidFill>
+              </a:rPr>
+              <a:t>Servem para selecionar uma parte específica de um elemento.</a:t>
+            </a:r>
+          </a:p>
+        </p:txBody>
+      </p:sp>
+      <p:sp>
+        <p:nvSpPr>
+          <p:cNvPr id="23" name="Google Shape;87;p6">
+            <a:extLst>
+              <a:ext uri="{FF2B5EF4-FFF2-40B4-BE49-F238E27FC236}">
+                <a16:creationId xmlns:a16="http://schemas.microsoft.com/office/drawing/2014/main" id="{F963F7C5-612D-1778-4203-718B42A24BB6}"/>
+              </a:ext>
+            </a:extLst>
+          </p:cNvPr>
+          <p:cNvSpPr txBox="1"/>
+          <p:nvPr/>
+        </p:nvSpPr>
+        <p:spPr>
+          <a:xfrm>
+            <a:off x="856932" y="1831157"/>
+            <a:ext cx="6652200" cy="1597843"/>
+          </a:xfrm>
+          <a:prstGeom prst="rect">
+            <a:avLst/>
+          </a:prstGeom>
+          <a:noFill/>
+          <a:ln>
+            <a:noFill/>
+          </a:ln>
+        </p:spPr>
+        <p:txBody>
+          <a:bodyPr spcFirstLastPara="1" wrap="square" lIns="91425" tIns="91425" rIns="91425" bIns="91425" anchor="t" anchorCtr="0">
+            <a:spAutoFit/>
           </a:bodyPr>
           <a:lstStyle/>
           <a:p>
-            <a:pPr marL="0" lvl="0" indent="0" algn="ctr" rtl="0">
-              <a:lnSpc>
-                <a:spcPct val="90000"/>
-              </a:lnSpc>
-              <a:spcBef>
-                <a:spcPts val="0"/>
-              </a:spcBef>
-              <a:spcAft>
-                <a:spcPts val="0"/>
-              </a:spcAft>
-              <a:buClr>
-                <a:srgbClr val="D8D8D8"/>
-              </a:buClr>
-              <a:buSzPct val="100000"/>
+            <a:pPr marL="0" marR="0" lvl="0" indent="0" rtl="0">
+              <a:lnSpc>
+                <a:spcPct val="150000"/>
+              </a:lnSpc>
+              <a:spcBef>
+                <a:spcPts val="2000"/>
+              </a:spcBef>
+              <a:spcAft>
+                <a:spcPts val="1100"/>
+              </a:spcAft>
+              <a:buClr>
+                <a:schemeClr val="dk1"/>
+              </a:buClr>
+              <a:buSzPts val="3600"/>
               <a:buFont typeface="Arial"/>
               <a:buNone/>
             </a:pPr>
             <a:r>
-              <a:rPr lang="pt-BR" dirty="0" err="1">
+              <a:rPr lang="pt-BR" sz="4400" b="1" i="0" u="none" strike="noStrike" cap="none" dirty="0">
                 <a:solidFill>
                   <a:schemeClr val="tx2">
                     <a:lumMod val="90000"/>
                   </a:schemeClr>
                 </a:solidFill>
+                <a:latin typeface="Arial"/>
+                <a:ea typeface="Arial"/>
+                <a:cs typeface="Arial"/>
+                <a:sym typeface="Arial"/>
               </a:rPr>
-              <a:t>Pseudo-classes</a:t>
+              <a:t>::</a:t>
             </a:r>
             <a:r>
-              <a:rPr lang="pt-BR" dirty="0">
+              <a:rPr lang="pt-BR" sz="4400" b="1" i="0" u="none" strike="noStrike" cap="none" dirty="0" err="1">
                 <a:solidFill>
                   <a:schemeClr val="tx2">
                     <a:lumMod val="90000"/>
                   </a:schemeClr>
                 </a:solidFill>
+                <a:latin typeface="Arial"/>
+                <a:ea typeface="Arial"/>
+                <a:cs typeface="Arial"/>
+                <a:sym typeface="Arial"/>
               </a:rPr>
-              <a:t> e </a:t>
+              <a:t>first-letter</a:t>
             </a:r>
-            <a:r>
-              <a:rPr lang="pt-BR" dirty="0" err="1">
-                <a:solidFill>
-                  <a:schemeClr val="tx2">
-                    <a:lumMod val="90000"/>
-                  </a:schemeClr>
-                </a:solidFill>
-              </a:rPr>
-              <a:t>Pseudo-elementos</a:t>
-            </a:r>
-            <a:endParaRPr dirty="0">
+            <a:endParaRPr sz="4400" b="1" i="0" u="none" strike="noStrike" cap="none" dirty="0">
               <a:solidFill>
                 <a:schemeClr val="tx2">
                   <a:lumMod val="90000"/>
                 </a:schemeClr>
               </a:solidFill>
+              <a:highlight>
+                <a:schemeClr val="accent6"/>
+              </a:highlight>
+              <a:latin typeface="Arial"/>
+              <a:ea typeface="Arial"/>
+              <a:cs typeface="Arial"/>
+              <a:sym typeface="Arial"/>
             </a:endParaRPr>
           </a:p>
         </p:txBody>
       </p:sp>
+      <p:sp>
+        <p:nvSpPr>
+          <p:cNvPr id="2" name="Google Shape;149;p13">
+            <a:extLst>
+              <a:ext uri="{FF2B5EF4-FFF2-40B4-BE49-F238E27FC236}">
+                <a16:creationId xmlns:a16="http://schemas.microsoft.com/office/drawing/2014/main" id="{A51297D0-1AA8-332A-9759-733B8528C423}"/>
+              </a:ext>
+            </a:extLst>
+          </p:cNvPr>
+          <p:cNvSpPr txBox="1"/>
+          <p:nvPr/>
+        </p:nvSpPr>
+        <p:spPr>
+          <a:xfrm>
+            <a:off x="783272" y="3161030"/>
+            <a:ext cx="10625455" cy="752159"/>
+          </a:xfrm>
+          <a:prstGeom prst="rect">
+            <a:avLst/>
+          </a:prstGeom>
+          <a:noFill/>
+          <a:ln>
+            <a:noFill/>
+          </a:ln>
+        </p:spPr>
+        <p:txBody>
+          <a:bodyPr spcFirstLastPara="1" wrap="square" lIns="91425" tIns="91425" rIns="91425" bIns="91425" anchor="t" anchorCtr="0">
+            <a:noAutofit/>
+          </a:bodyPr>
+          <a:lstStyle/>
+          <a:p>
+            <a:pPr marL="114300" lvl="0">
+              <a:buClr>
+                <a:schemeClr val="dk1"/>
+              </a:buClr>
+              <a:buSzPts val="1800"/>
+            </a:pPr>
+            <a:r>
+              <a:rPr lang="pt-BR" sz="2400" dirty="0">
+                <a:solidFill>
+                  <a:schemeClr val="tx2">
+                    <a:lumMod val="90000"/>
+                  </a:schemeClr>
+                </a:solidFill>
+              </a:rPr>
+              <a:t>Usada para formatar a </a:t>
+            </a:r>
+            <a:r>
+              <a:rPr lang="pt-BR" sz="2400" b="1" dirty="0">
+                <a:solidFill>
+                  <a:srgbClr val="ED145B"/>
+                </a:solidFill>
+              </a:rPr>
+              <a:t>primeira letra</a:t>
+            </a:r>
+            <a:r>
+              <a:rPr lang="pt-BR" sz="2400" dirty="0">
+                <a:solidFill>
+                  <a:schemeClr val="tx2">
+                    <a:lumMod val="90000"/>
+                  </a:schemeClr>
+                </a:solidFill>
+              </a:rPr>
+              <a:t> da primeira linha de um elemento.</a:t>
+            </a:r>
+          </a:p>
+        </p:txBody>
+      </p:sp>
+      <p:graphicFrame>
+        <p:nvGraphicFramePr>
+          <p:cNvPr id="4" name="Google Shape;228;p22">
+            <a:extLst>
+              <a:ext uri="{FF2B5EF4-FFF2-40B4-BE49-F238E27FC236}">
+                <a16:creationId xmlns:a16="http://schemas.microsoft.com/office/drawing/2014/main" id="{FE944FF8-BFC5-3FF2-0889-3568B9497B81}"/>
+              </a:ext>
+            </a:extLst>
+          </p:cNvPr>
+          <p:cNvGraphicFramePr/>
+          <p:nvPr>
+            <p:extLst>
+              <p:ext uri="{D42A27DB-BD31-4B8C-83A1-F6EECF244321}">
+                <p14:modId xmlns:p14="http://schemas.microsoft.com/office/powerpoint/2010/main" val="3883275631"/>
+              </p:ext>
+            </p:extLst>
+          </p:nvPr>
+        </p:nvGraphicFramePr>
+        <p:xfrm>
+          <a:off x="3367725" y="4257675"/>
+          <a:ext cx="5354950" cy="1701800"/>
+        </p:xfrm>
+        <a:graphic>
+          <a:graphicData uri="http://schemas.openxmlformats.org/drawingml/2006/table">
+            <a:tbl>
+              <a:tblPr>
+                <a:noFill/>
+                <a:tableStyleId>{63B152E9-AFB2-458E-BFAF-78D379E83702}</a:tableStyleId>
+              </a:tblPr>
+              <a:tblGrid>
+                <a:gridCol w="5354950">
+                  <a:extLst>
+                    <a:ext uri="{9D8B030D-6E8A-4147-A177-3AD203B41FA5}">
+                      <a16:colId xmlns:a16="http://schemas.microsoft.com/office/drawing/2014/main" val="20000"/>
+                    </a:ext>
+                  </a:extLst>
+                </a:gridCol>
+              </a:tblGrid>
+              <a:tr h="1701800">
+                <a:tc>
+                  <a:txBody>
+                    <a:bodyPr/>
+                    <a:lstStyle/>
+                    <a:p>
+                      <a:pPr marL="0" marR="0" lvl="0" indent="0" algn="l" rtl="0">
+                        <a:lnSpc>
+                          <a:spcPct val="100000"/>
+                        </a:lnSpc>
+                        <a:spcBef>
+                          <a:spcPts val="0"/>
+                        </a:spcBef>
+                        <a:spcAft>
+                          <a:spcPts val="0"/>
+                        </a:spcAft>
+                        <a:buClr>
+                          <a:srgbClr val="000000"/>
+                        </a:buClr>
+                        <a:buSzPts val="1600"/>
+                        <a:buFont typeface="Arial"/>
+                        <a:buNone/>
+                      </a:pPr>
+                      <a:r>
+                        <a:rPr lang="pt-BR" sz="2400" b="0" u="none" strike="noStrike" cap="none" dirty="0">
+                          <a:solidFill>
+                            <a:srgbClr val="FF79C6"/>
+                          </a:solidFill>
+                          <a:latin typeface="Consolas"/>
+                          <a:ea typeface="Consolas"/>
+                          <a:cs typeface="Consolas"/>
+                          <a:sym typeface="Consolas"/>
+                        </a:rPr>
+                        <a:t>p</a:t>
+                      </a:r>
+                      <a:r>
+                        <a:rPr lang="pt-BR" sz="2400" b="0" i="1" u="none" strike="noStrike" cap="none" dirty="0">
+                          <a:solidFill>
+                            <a:srgbClr val="FF79C6"/>
+                          </a:solidFill>
+                          <a:latin typeface="Consolas"/>
+                          <a:ea typeface="Consolas"/>
+                          <a:cs typeface="Consolas"/>
+                          <a:sym typeface="Consolas"/>
+                        </a:rPr>
+                        <a:t>::</a:t>
+                      </a:r>
+                      <a:r>
+                        <a:rPr lang="pt-BR" sz="2400" b="0" i="1" u="none" strike="noStrike" cap="none" dirty="0">
+                          <a:solidFill>
+                            <a:srgbClr val="50FA7B"/>
+                          </a:solidFill>
+                          <a:latin typeface="Consolas"/>
+                          <a:ea typeface="Consolas"/>
+                          <a:cs typeface="Consolas"/>
+                          <a:sym typeface="Consolas"/>
+                        </a:rPr>
+                        <a:t>first-letter</a:t>
+                      </a:r>
+                      <a:r>
+                        <a:rPr lang="pt-BR" sz="2400" b="0" u="none" strike="noStrike" cap="none" dirty="0">
+                          <a:solidFill>
+                            <a:srgbClr val="F8F8F2"/>
+                          </a:solidFill>
+                          <a:latin typeface="Consolas"/>
+                          <a:ea typeface="Consolas"/>
+                          <a:cs typeface="Consolas"/>
+                          <a:sym typeface="Consolas"/>
+                        </a:rPr>
+                        <a:t> {</a:t>
+                      </a:r>
+                      <a:endParaRPr sz="2400" u="none" strike="noStrike" cap="none" dirty="0"/>
+                    </a:p>
+                    <a:p>
+                      <a:pPr marL="0" marR="0" lvl="0" indent="0" algn="l" rtl="0">
+                        <a:lnSpc>
+                          <a:spcPct val="100000"/>
+                        </a:lnSpc>
+                        <a:spcBef>
+                          <a:spcPts val="0"/>
+                        </a:spcBef>
+                        <a:spcAft>
+                          <a:spcPts val="0"/>
+                        </a:spcAft>
+                        <a:buClr>
+                          <a:srgbClr val="000000"/>
+                        </a:buClr>
+                        <a:buSzPts val="1600"/>
+                        <a:buFont typeface="Arial"/>
+                        <a:buNone/>
+                      </a:pPr>
+                      <a:r>
+                        <a:rPr lang="pt-BR" sz="2400" b="0" u="none" strike="noStrike" cap="none" dirty="0">
+                          <a:solidFill>
+                            <a:srgbClr val="F8F8F2"/>
+                          </a:solidFill>
+                          <a:latin typeface="Consolas"/>
+                          <a:ea typeface="Consolas"/>
+                          <a:cs typeface="Consolas"/>
+                          <a:sym typeface="Consolas"/>
+                        </a:rPr>
+                        <a:t>    </a:t>
+                      </a:r>
+                      <a:r>
+                        <a:rPr lang="pt-BR" sz="2400" b="0" u="none" strike="noStrike" cap="none" dirty="0">
+                          <a:solidFill>
+                            <a:srgbClr val="8BE9FD"/>
+                          </a:solidFill>
+                          <a:latin typeface="Consolas"/>
+                          <a:ea typeface="Consolas"/>
+                          <a:cs typeface="Consolas"/>
+                          <a:sym typeface="Consolas"/>
+                        </a:rPr>
+                        <a:t>color</a:t>
+                      </a:r>
+                      <a:r>
+                        <a:rPr lang="pt-BR" sz="2400" b="0" u="none" strike="noStrike" cap="none" dirty="0">
+                          <a:solidFill>
+                            <a:srgbClr val="FF79C6"/>
+                          </a:solidFill>
+                          <a:latin typeface="Consolas"/>
+                          <a:ea typeface="Consolas"/>
+                          <a:cs typeface="Consolas"/>
+                          <a:sym typeface="Consolas"/>
+                        </a:rPr>
+                        <a:t>:</a:t>
+                      </a:r>
+                      <a:r>
+                        <a:rPr lang="pt-BR" sz="2400" b="0" u="none" strike="noStrike" cap="none" dirty="0">
+                          <a:solidFill>
+                            <a:srgbClr val="F8F8F2"/>
+                          </a:solidFill>
+                          <a:latin typeface="Consolas"/>
+                          <a:ea typeface="Consolas"/>
+                          <a:cs typeface="Consolas"/>
+                          <a:sym typeface="Consolas"/>
+                        </a:rPr>
+                        <a:t> </a:t>
+                      </a:r>
+                      <a:r>
+                        <a:rPr lang="pt-BR" sz="2400" b="0" u="none" strike="noStrike" cap="none" dirty="0" err="1">
+                          <a:solidFill>
+                            <a:srgbClr val="BD93F9"/>
+                          </a:solidFill>
+                          <a:latin typeface="Consolas"/>
+                          <a:ea typeface="Consolas"/>
+                          <a:cs typeface="Consolas"/>
+                          <a:sym typeface="Consolas"/>
+                        </a:rPr>
+                        <a:t>red</a:t>
+                      </a:r>
+                      <a:r>
+                        <a:rPr lang="pt-BR" sz="2400" b="0" u="none" strike="noStrike" cap="none" dirty="0">
+                          <a:solidFill>
+                            <a:srgbClr val="F8F8F2"/>
+                          </a:solidFill>
+                          <a:latin typeface="Consolas"/>
+                          <a:ea typeface="Consolas"/>
+                          <a:cs typeface="Consolas"/>
+                          <a:sym typeface="Consolas"/>
+                        </a:rPr>
+                        <a:t>;</a:t>
+                      </a:r>
+                      <a:endParaRPr sz="2400" u="none" strike="noStrike" cap="none" dirty="0"/>
+                    </a:p>
+                    <a:p>
+                      <a:pPr marL="0" marR="0" lvl="0" indent="0" algn="l" rtl="0">
+                        <a:lnSpc>
+                          <a:spcPct val="100000"/>
+                        </a:lnSpc>
+                        <a:spcBef>
+                          <a:spcPts val="0"/>
+                        </a:spcBef>
+                        <a:spcAft>
+                          <a:spcPts val="0"/>
+                        </a:spcAft>
+                        <a:buClr>
+                          <a:srgbClr val="000000"/>
+                        </a:buClr>
+                        <a:buSzPts val="1600"/>
+                        <a:buFont typeface="Arial"/>
+                        <a:buNone/>
+                      </a:pPr>
+                      <a:r>
+                        <a:rPr lang="pt-BR" sz="2400" b="0" u="none" strike="noStrike" cap="none" dirty="0">
+                          <a:solidFill>
+                            <a:srgbClr val="F8F8F2"/>
+                          </a:solidFill>
+                          <a:latin typeface="Consolas"/>
+                          <a:ea typeface="Consolas"/>
+                          <a:cs typeface="Consolas"/>
+                          <a:sym typeface="Consolas"/>
+                        </a:rPr>
+                        <a:t>    </a:t>
+                      </a:r>
+                      <a:r>
+                        <a:rPr lang="pt-BR" sz="2400" b="0" u="none" strike="noStrike" cap="none" dirty="0" err="1">
+                          <a:solidFill>
+                            <a:srgbClr val="8BE9FD"/>
+                          </a:solidFill>
+                          <a:latin typeface="Consolas"/>
+                          <a:ea typeface="Consolas"/>
+                          <a:cs typeface="Consolas"/>
+                          <a:sym typeface="Consolas"/>
+                        </a:rPr>
+                        <a:t>text-transform</a:t>
+                      </a:r>
+                      <a:r>
+                        <a:rPr lang="pt-BR" sz="2400" b="0" u="none" strike="noStrike" cap="none" dirty="0">
+                          <a:solidFill>
+                            <a:srgbClr val="FF79C6"/>
+                          </a:solidFill>
+                          <a:latin typeface="Consolas"/>
+                          <a:ea typeface="Consolas"/>
+                          <a:cs typeface="Consolas"/>
+                          <a:sym typeface="Consolas"/>
+                        </a:rPr>
+                        <a:t>:</a:t>
+                      </a:r>
+                      <a:r>
+                        <a:rPr lang="pt-BR" sz="2400" b="0" u="none" strike="noStrike" cap="none" dirty="0">
+                          <a:solidFill>
+                            <a:srgbClr val="F8F8F2"/>
+                          </a:solidFill>
+                          <a:latin typeface="Consolas"/>
+                          <a:ea typeface="Consolas"/>
+                          <a:cs typeface="Consolas"/>
+                          <a:sym typeface="Consolas"/>
+                        </a:rPr>
+                        <a:t> </a:t>
+                      </a:r>
+                      <a:r>
+                        <a:rPr lang="pt-BR" sz="2400" b="0" u="none" strike="noStrike" cap="none" dirty="0" err="1">
+                          <a:solidFill>
+                            <a:srgbClr val="BD93F9"/>
+                          </a:solidFill>
+                          <a:latin typeface="Consolas"/>
+                          <a:ea typeface="Consolas"/>
+                          <a:cs typeface="Consolas"/>
+                          <a:sym typeface="Consolas"/>
+                        </a:rPr>
+                        <a:t>uppercase</a:t>
+                      </a:r>
+                      <a:r>
+                        <a:rPr lang="pt-BR" sz="2400" b="0" u="none" strike="noStrike" cap="none" dirty="0">
+                          <a:solidFill>
+                            <a:srgbClr val="F8F8F2"/>
+                          </a:solidFill>
+                          <a:latin typeface="Consolas"/>
+                          <a:ea typeface="Consolas"/>
+                          <a:cs typeface="Consolas"/>
+                          <a:sym typeface="Consolas"/>
+                        </a:rPr>
+                        <a:t>;</a:t>
+                      </a:r>
+                      <a:endParaRPr sz="2400" u="none" strike="noStrike" cap="none" dirty="0"/>
+                    </a:p>
+                    <a:p>
+                      <a:pPr marL="0" marR="0" lvl="0" indent="0" algn="l" rtl="0">
+                        <a:lnSpc>
+                          <a:spcPct val="100000"/>
+                        </a:lnSpc>
+                        <a:spcBef>
+                          <a:spcPts val="0"/>
+                        </a:spcBef>
+                        <a:spcAft>
+                          <a:spcPts val="0"/>
+                        </a:spcAft>
+                        <a:buClr>
+                          <a:srgbClr val="000000"/>
+                        </a:buClr>
+                        <a:buSzPts val="1600"/>
+                        <a:buFont typeface="Arial"/>
+                        <a:buNone/>
+                      </a:pPr>
+                      <a:r>
+                        <a:rPr lang="pt-BR" sz="2400" b="0" u="none" strike="noStrike" cap="none" dirty="0">
+                          <a:solidFill>
+                            <a:srgbClr val="F8F8F2"/>
+                          </a:solidFill>
+                          <a:latin typeface="Consolas"/>
+                          <a:ea typeface="Consolas"/>
+                          <a:cs typeface="Consolas"/>
+                          <a:sym typeface="Consolas"/>
+                        </a:rPr>
+                        <a:t>}</a:t>
+                      </a:r>
+                      <a:endParaRPr sz="2400" u="none" strike="noStrike" cap="none" dirty="0"/>
+                    </a:p>
+                  </a:txBody>
+                  <a:tcPr marL="63500" marR="63500" marT="63500" marB="63500">
+                    <a:lnL w="38100" cap="flat" cmpd="sng">
+                      <a:solidFill>
+                        <a:srgbClr val="EAFF6A"/>
+                      </a:solidFill>
+                      <a:prstDash val="solid"/>
+                      <a:round/>
+                      <a:headEnd type="none" w="sm" len="sm"/>
+                      <a:tailEnd type="none" w="sm" len="sm"/>
+                    </a:lnL>
+                    <a:lnR w="38100" cap="flat" cmpd="sng">
+                      <a:solidFill>
+                        <a:srgbClr val="EAFF6A"/>
+                      </a:solidFill>
+                      <a:prstDash val="solid"/>
+                      <a:round/>
+                      <a:headEnd type="none" w="sm" len="sm"/>
+                      <a:tailEnd type="none" w="sm" len="sm"/>
+                    </a:lnR>
+                    <a:lnT w="38100" cap="flat" cmpd="sng">
+                      <a:solidFill>
+                        <a:srgbClr val="EAFF6A"/>
+                      </a:solidFill>
+                      <a:prstDash val="solid"/>
+                      <a:round/>
+                      <a:headEnd type="none" w="sm" len="sm"/>
+                      <a:tailEnd type="none" w="sm" len="sm"/>
+                    </a:lnT>
+                    <a:lnB w="38100" cap="flat" cmpd="sng">
+                      <a:solidFill>
+                        <a:srgbClr val="EAFF6A"/>
+                      </a:solidFill>
+                      <a:prstDash val="solid"/>
+                      <a:round/>
+                      <a:headEnd type="none" w="sm" len="sm"/>
+                      <a:tailEnd type="none" w="sm" len="sm"/>
+                    </a:lnB>
+                    <a:solidFill>
+                      <a:srgbClr val="0C343D"/>
+                    </a:solidFill>
+                  </a:tcPr>
+                </a:tc>
+                <a:extLst>
+                  <a:ext uri="{0D108BD9-81ED-4DB2-BD59-A6C34878D82A}">
+                    <a16:rowId xmlns:a16="http://schemas.microsoft.com/office/drawing/2014/main" val="10000"/>
+                  </a:ext>
+                </a:extLst>
+              </a:tr>
+            </a:tbl>
+          </a:graphicData>
+        </a:graphic>
+      </p:graphicFrame>
     </p:spTree>
+    <p:extLst>
+      <p:ext uri="{BB962C8B-B14F-4D97-AF65-F5344CB8AC3E}">
+        <p14:creationId xmlns:p14="http://schemas.microsoft.com/office/powerpoint/2010/main" val="1270200379"/>
+      </p:ext>
+    </p:extLst>
   </p:cSld>
   <p:clrMapOvr>
     <a:masterClrMapping/>
@@ -20399,7 +18310,953 @@
 </p:sld>
 </file>
 
-<file path=ppt/slides/slide20.xml><?xml version="1.0" encoding="utf-8"?>
+<file path=ppt/slides/slide18.xml><?xml version="1.0" encoding="utf-8"?>
+<p:sld xmlns:a="http://schemas.openxmlformats.org/drawingml/2006/main" xmlns:r="http://schemas.openxmlformats.org/officeDocument/2006/relationships" xmlns:p="http://schemas.openxmlformats.org/presentationml/2006/main">
+  <p:cSld>
+    <p:spTree>
+      <p:nvGrpSpPr>
+        <p:cNvPr id="1" name="">
+          <a:extLst>
+            <a:ext uri="{FF2B5EF4-FFF2-40B4-BE49-F238E27FC236}">
+              <a16:creationId xmlns:a16="http://schemas.microsoft.com/office/drawing/2014/main" id="{0E7870B6-8C17-EDC8-1134-40AA5A56F946}"/>
+            </a:ext>
+          </a:extLst>
+        </p:cNvPr>
+        <p:cNvGrpSpPr/>
+        <p:nvPr/>
+      </p:nvGrpSpPr>
+      <p:grpSpPr>
+        <a:xfrm>
+          <a:off x="0" y="0"/>
+          <a:ext cx="0" cy="0"/>
+          <a:chOff x="0" y="0"/>
+          <a:chExt cx="0" cy="0"/>
+        </a:xfrm>
+      </p:grpSpPr>
+      <p:sp>
+        <p:nvSpPr>
+          <p:cNvPr id="8" name="Retângulo 7">
+            <a:extLst>
+              <a:ext uri="{FF2B5EF4-FFF2-40B4-BE49-F238E27FC236}">
+                <a16:creationId xmlns:a16="http://schemas.microsoft.com/office/drawing/2014/main" id="{4E0EC769-364B-2D5C-BD79-5A2DD7CAD1D8}"/>
+              </a:ext>
+            </a:extLst>
+          </p:cNvPr>
+          <p:cNvSpPr/>
+          <p:nvPr/>
+        </p:nvSpPr>
+        <p:spPr>
+          <a:xfrm>
+            <a:off x="0" y="0"/>
+            <a:ext cx="12192000" cy="6858000"/>
+          </a:xfrm>
+          <a:prstGeom prst="rect">
+            <a:avLst/>
+          </a:prstGeom>
+          <a:solidFill>
+            <a:schemeClr val="tx1">
+              <a:lumMod val="85000"/>
+              <a:lumOff val="15000"/>
+            </a:schemeClr>
+          </a:solidFill>
+        </p:spPr>
+        <p:style>
+          <a:lnRef idx="2">
+            <a:schemeClr val="dk1">
+              <a:shade val="15000"/>
+            </a:schemeClr>
+          </a:lnRef>
+          <a:fillRef idx="1">
+            <a:schemeClr val="dk1"/>
+          </a:fillRef>
+          <a:effectRef idx="0">
+            <a:schemeClr val="dk1"/>
+          </a:effectRef>
+          <a:fontRef idx="minor">
+            <a:schemeClr val="lt1"/>
+          </a:fontRef>
+        </p:style>
+        <p:txBody>
+          <a:bodyPr rtlCol="0" anchor="ctr"/>
+          <a:lstStyle/>
+          <a:p>
+            <a:pPr algn="ctr"/>
+            <a:endParaRPr lang="pt-BR" dirty="0"/>
+          </a:p>
+        </p:txBody>
+      </p:sp>
+      <p:sp>
+        <p:nvSpPr>
+          <p:cNvPr id="3" name="Espaço Reservado para Número de Slide 2">
+            <a:extLst>
+              <a:ext uri="{FF2B5EF4-FFF2-40B4-BE49-F238E27FC236}">
+                <a16:creationId xmlns:a16="http://schemas.microsoft.com/office/drawing/2014/main" id="{D3CFF7B8-25CD-2AD6-F07E-73F7744C3874}"/>
+              </a:ext>
+            </a:extLst>
+          </p:cNvPr>
+          <p:cNvSpPr>
+            <a:spLocks noGrp="1"/>
+          </p:cNvSpPr>
+          <p:nvPr>
+            <p:ph type="sldNum" idx="4294967295"/>
+          </p:nvPr>
+        </p:nvSpPr>
+        <p:spPr>
+          <a:xfrm>
+            <a:off x="11353800" y="5594350"/>
+            <a:ext cx="838200" cy="365125"/>
+          </a:xfrm>
+        </p:spPr>
+        <p:txBody>
+          <a:bodyPr/>
+          <a:lstStyle/>
+          <a:p>
+            <a:pPr lvl="0"/>
+            <a:fld id="{00000000-1234-1234-1234-123412341234}" type="slidenum">
+              <a:rPr lang="pt-BR" smtClean="0"/>
+              <a:pPr lvl="0"/>
+              <a:t>18</a:t>
+            </a:fld>
+            <a:endParaRPr lang="pt-BR"/>
+          </a:p>
+        </p:txBody>
+      </p:sp>
+      <p:pic>
+        <p:nvPicPr>
+          <p:cNvPr id="7" name="Imagem 6">
+            <a:extLst>
+              <a:ext uri="{FF2B5EF4-FFF2-40B4-BE49-F238E27FC236}">
+                <a16:creationId xmlns:a16="http://schemas.microsoft.com/office/drawing/2014/main" id="{BD3E4572-F233-8BD7-3D92-BCED64B565A5}"/>
+              </a:ext>
+            </a:extLst>
+          </p:cNvPr>
+          <p:cNvPicPr>
+            <a:picLocks noChangeAspect="1"/>
+          </p:cNvPicPr>
+          <p:nvPr/>
+        </p:nvPicPr>
+        <p:blipFill>
+          <a:blip r:embed="rId2"/>
+          <a:stretch>
+            <a:fillRect/>
+          </a:stretch>
+        </p:blipFill>
+        <p:spPr>
+          <a:xfrm>
+            <a:off x="-215900" y="-71438"/>
+            <a:ext cx="12522201" cy="7043738"/>
+          </a:xfrm>
+          <a:prstGeom prst="rect">
+            <a:avLst/>
+          </a:prstGeom>
+        </p:spPr>
+      </p:pic>
+      <p:cxnSp>
+        <p:nvCxnSpPr>
+          <p:cNvPr id="18" name="Conector reto 17">
+            <a:extLst>
+              <a:ext uri="{FF2B5EF4-FFF2-40B4-BE49-F238E27FC236}">
+                <a16:creationId xmlns:a16="http://schemas.microsoft.com/office/drawing/2014/main" id="{65BEB752-1312-D4FE-6CB8-A68F8FD75790}"/>
+              </a:ext>
+            </a:extLst>
+          </p:cNvPr>
+          <p:cNvCxnSpPr>
+            <a:cxnSpLocks/>
+          </p:cNvCxnSpPr>
+          <p:nvPr/>
+        </p:nvCxnSpPr>
+        <p:spPr>
+          <a:xfrm>
+            <a:off x="856932" y="743587"/>
+            <a:ext cx="0" cy="828040"/>
+          </a:xfrm>
+          <a:prstGeom prst="line">
+            <a:avLst/>
+          </a:prstGeom>
+          <a:ln>
+            <a:solidFill>
+              <a:srgbClr val="ED145B"/>
+            </a:solidFill>
+          </a:ln>
+        </p:spPr>
+        <p:style>
+          <a:lnRef idx="3">
+            <a:schemeClr val="dk1"/>
+          </a:lnRef>
+          <a:fillRef idx="0">
+            <a:schemeClr val="dk1"/>
+          </a:fillRef>
+          <a:effectRef idx="2">
+            <a:schemeClr val="dk1"/>
+          </a:effectRef>
+          <a:fontRef idx="minor">
+            <a:schemeClr val="tx1"/>
+          </a:fontRef>
+        </p:style>
+      </p:cxnSp>
+      <p:sp>
+        <p:nvSpPr>
+          <p:cNvPr id="22" name="Google Shape;85;p6">
+            <a:extLst>
+              <a:ext uri="{FF2B5EF4-FFF2-40B4-BE49-F238E27FC236}">
+                <a16:creationId xmlns:a16="http://schemas.microsoft.com/office/drawing/2014/main" id="{0F3A88EA-E1D2-7013-CE00-A6E53CEF8CE7}"/>
+              </a:ext>
+            </a:extLst>
+          </p:cNvPr>
+          <p:cNvSpPr txBox="1">
+            <a:spLocks/>
+          </p:cNvSpPr>
+          <p:nvPr/>
+        </p:nvSpPr>
+        <p:spPr>
+          <a:xfrm>
+            <a:off x="945515" y="664529"/>
+            <a:ext cx="10300970" cy="986155"/>
+          </a:xfrm>
+          <a:prstGeom prst="rect">
+            <a:avLst/>
+          </a:prstGeom>
+          <a:noFill/>
+          <a:ln>
+            <a:noFill/>
+          </a:ln>
+        </p:spPr>
+        <p:txBody>
+          <a:bodyPr spcFirstLastPara="1" wrap="square" lIns="91425" tIns="45700" rIns="91425" bIns="45700" anchor="ctr" anchorCtr="0">
+            <a:noAutofit/>
+          </a:bodyPr>
+          <a:lstStyle>
+            <a:defPPr marR="0" lvl="0" algn="l" rtl="0">
+              <a:lnSpc>
+                <a:spcPct val="100000"/>
+              </a:lnSpc>
+              <a:spcBef>
+                <a:spcPts val="0"/>
+              </a:spcBef>
+              <a:spcAft>
+                <a:spcPts val="0"/>
+              </a:spcAft>
+            </a:defPPr>
+            <a:lvl1pPr marR="0" lvl="0" algn="l" rtl="0">
+              <a:lnSpc>
+                <a:spcPct val="100000"/>
+              </a:lnSpc>
+              <a:spcBef>
+                <a:spcPts val="0"/>
+              </a:spcBef>
+              <a:spcAft>
+                <a:spcPts val="0"/>
+              </a:spcAft>
+              <a:buClr>
+                <a:srgbClr val="000000"/>
+              </a:buClr>
+              <a:buFont typeface="Arial"/>
+              <a:defRPr sz="1400" b="0" i="0" u="none" strike="noStrike" cap="none">
+                <a:solidFill>
+                  <a:srgbClr val="000000"/>
+                </a:solidFill>
+                <a:latin typeface="Arial"/>
+                <a:ea typeface="Arial"/>
+                <a:cs typeface="Arial"/>
+                <a:sym typeface="Arial"/>
+              </a:defRPr>
+            </a:lvl1pPr>
+            <a:lvl2pPr marR="0" lvl="1" algn="l" rtl="0">
+              <a:lnSpc>
+                <a:spcPct val="100000"/>
+              </a:lnSpc>
+              <a:spcBef>
+                <a:spcPts val="0"/>
+              </a:spcBef>
+              <a:spcAft>
+                <a:spcPts val="0"/>
+              </a:spcAft>
+              <a:buClr>
+                <a:srgbClr val="000000"/>
+              </a:buClr>
+              <a:buFont typeface="Arial"/>
+              <a:defRPr sz="1400" b="0" i="0" u="none" strike="noStrike" cap="none">
+                <a:solidFill>
+                  <a:srgbClr val="000000"/>
+                </a:solidFill>
+                <a:latin typeface="Arial"/>
+                <a:ea typeface="Arial"/>
+                <a:cs typeface="Arial"/>
+                <a:sym typeface="Arial"/>
+              </a:defRPr>
+            </a:lvl2pPr>
+            <a:lvl3pPr marR="0" lvl="2" algn="l" rtl="0">
+              <a:lnSpc>
+                <a:spcPct val="100000"/>
+              </a:lnSpc>
+              <a:spcBef>
+                <a:spcPts val="0"/>
+              </a:spcBef>
+              <a:spcAft>
+                <a:spcPts val="0"/>
+              </a:spcAft>
+              <a:buClr>
+                <a:srgbClr val="000000"/>
+              </a:buClr>
+              <a:buFont typeface="Arial"/>
+              <a:defRPr sz="1400" b="0" i="0" u="none" strike="noStrike" cap="none">
+                <a:solidFill>
+                  <a:srgbClr val="000000"/>
+                </a:solidFill>
+                <a:latin typeface="Arial"/>
+                <a:ea typeface="Arial"/>
+                <a:cs typeface="Arial"/>
+                <a:sym typeface="Arial"/>
+              </a:defRPr>
+            </a:lvl3pPr>
+            <a:lvl4pPr marR="0" lvl="3" algn="l" rtl="0">
+              <a:lnSpc>
+                <a:spcPct val="100000"/>
+              </a:lnSpc>
+              <a:spcBef>
+                <a:spcPts val="0"/>
+              </a:spcBef>
+              <a:spcAft>
+                <a:spcPts val="0"/>
+              </a:spcAft>
+              <a:buClr>
+                <a:srgbClr val="000000"/>
+              </a:buClr>
+              <a:buFont typeface="Arial"/>
+              <a:defRPr sz="1400" b="0" i="0" u="none" strike="noStrike" cap="none">
+                <a:solidFill>
+                  <a:srgbClr val="000000"/>
+                </a:solidFill>
+                <a:latin typeface="Arial"/>
+                <a:ea typeface="Arial"/>
+                <a:cs typeface="Arial"/>
+                <a:sym typeface="Arial"/>
+              </a:defRPr>
+            </a:lvl4pPr>
+            <a:lvl5pPr marR="0" lvl="4" algn="l" rtl="0">
+              <a:lnSpc>
+                <a:spcPct val="100000"/>
+              </a:lnSpc>
+              <a:spcBef>
+                <a:spcPts val="0"/>
+              </a:spcBef>
+              <a:spcAft>
+                <a:spcPts val="0"/>
+              </a:spcAft>
+              <a:buClr>
+                <a:srgbClr val="000000"/>
+              </a:buClr>
+              <a:buFont typeface="Arial"/>
+              <a:defRPr sz="1400" b="0" i="0" u="none" strike="noStrike" cap="none">
+                <a:solidFill>
+                  <a:srgbClr val="000000"/>
+                </a:solidFill>
+                <a:latin typeface="Arial"/>
+                <a:ea typeface="Arial"/>
+                <a:cs typeface="Arial"/>
+                <a:sym typeface="Arial"/>
+              </a:defRPr>
+            </a:lvl5pPr>
+            <a:lvl6pPr marR="0" lvl="5" algn="l" rtl="0">
+              <a:lnSpc>
+                <a:spcPct val="100000"/>
+              </a:lnSpc>
+              <a:spcBef>
+                <a:spcPts val="0"/>
+              </a:spcBef>
+              <a:spcAft>
+                <a:spcPts val="0"/>
+              </a:spcAft>
+              <a:buClr>
+                <a:srgbClr val="000000"/>
+              </a:buClr>
+              <a:buFont typeface="Arial"/>
+              <a:defRPr sz="1400" b="0" i="0" u="none" strike="noStrike" cap="none">
+                <a:solidFill>
+                  <a:srgbClr val="000000"/>
+                </a:solidFill>
+                <a:latin typeface="Arial"/>
+                <a:ea typeface="Arial"/>
+                <a:cs typeface="Arial"/>
+                <a:sym typeface="Arial"/>
+              </a:defRPr>
+            </a:lvl6pPr>
+            <a:lvl7pPr marR="0" lvl="6" algn="l" rtl="0">
+              <a:lnSpc>
+                <a:spcPct val="100000"/>
+              </a:lnSpc>
+              <a:spcBef>
+                <a:spcPts val="0"/>
+              </a:spcBef>
+              <a:spcAft>
+                <a:spcPts val="0"/>
+              </a:spcAft>
+              <a:buClr>
+                <a:srgbClr val="000000"/>
+              </a:buClr>
+              <a:buFont typeface="Arial"/>
+              <a:defRPr sz="1400" b="0" i="0" u="none" strike="noStrike" cap="none">
+                <a:solidFill>
+                  <a:srgbClr val="000000"/>
+                </a:solidFill>
+                <a:latin typeface="Arial"/>
+                <a:ea typeface="Arial"/>
+                <a:cs typeface="Arial"/>
+                <a:sym typeface="Arial"/>
+              </a:defRPr>
+            </a:lvl7pPr>
+            <a:lvl8pPr marR="0" lvl="7" algn="l" rtl="0">
+              <a:lnSpc>
+                <a:spcPct val="100000"/>
+              </a:lnSpc>
+              <a:spcBef>
+                <a:spcPts val="0"/>
+              </a:spcBef>
+              <a:spcAft>
+                <a:spcPts val="0"/>
+              </a:spcAft>
+              <a:buClr>
+                <a:srgbClr val="000000"/>
+              </a:buClr>
+              <a:buFont typeface="Arial"/>
+              <a:defRPr sz="1400" b="0" i="0" u="none" strike="noStrike" cap="none">
+                <a:solidFill>
+                  <a:srgbClr val="000000"/>
+                </a:solidFill>
+                <a:latin typeface="Arial"/>
+                <a:ea typeface="Arial"/>
+                <a:cs typeface="Arial"/>
+                <a:sym typeface="Arial"/>
+              </a:defRPr>
+            </a:lvl8pPr>
+            <a:lvl9pPr marR="0" lvl="8" algn="l" rtl="0">
+              <a:lnSpc>
+                <a:spcPct val="100000"/>
+              </a:lnSpc>
+              <a:spcBef>
+                <a:spcPts val="0"/>
+              </a:spcBef>
+              <a:spcAft>
+                <a:spcPts val="0"/>
+              </a:spcAft>
+              <a:buClr>
+                <a:srgbClr val="000000"/>
+              </a:buClr>
+              <a:buFont typeface="Arial"/>
+              <a:defRPr sz="1400" b="0" i="0" u="none" strike="noStrike" cap="none">
+                <a:solidFill>
+                  <a:srgbClr val="000000"/>
+                </a:solidFill>
+                <a:latin typeface="Arial"/>
+                <a:ea typeface="Arial"/>
+                <a:cs typeface="Arial"/>
+                <a:sym typeface="Arial"/>
+              </a:defRPr>
+            </a:lvl9pPr>
+          </a:lstStyle>
+          <a:p>
+            <a:pPr>
+              <a:lnSpc>
+                <a:spcPct val="120000"/>
+              </a:lnSpc>
+              <a:buClr>
+                <a:srgbClr val="595959"/>
+              </a:buClr>
+              <a:buSzPct val="222222"/>
+            </a:pPr>
+            <a:r>
+              <a:rPr lang="pt-BR" sz="4300" dirty="0" err="1">
+                <a:solidFill>
+                  <a:schemeClr val="bg1"/>
+                </a:solidFill>
+              </a:rPr>
+              <a:t>Pseudo-elemento</a:t>
+            </a:r>
+            <a:br>
+              <a:rPr lang="pt-BR" sz="4300" dirty="0">
+                <a:solidFill>
+                  <a:schemeClr val="tx2">
+                    <a:lumMod val="90000"/>
+                  </a:schemeClr>
+                </a:solidFill>
+              </a:rPr>
+            </a:br>
+            <a:r>
+              <a:rPr lang="pt-BR" sz="2000" dirty="0">
+                <a:solidFill>
+                  <a:schemeClr val="tx2">
+                    <a:lumMod val="90000"/>
+                  </a:schemeClr>
+                </a:solidFill>
+              </a:rPr>
+              <a:t>Servem para selecionar uma parte específica de um elemento.</a:t>
+            </a:r>
+          </a:p>
+        </p:txBody>
+      </p:sp>
+      <p:sp>
+        <p:nvSpPr>
+          <p:cNvPr id="23" name="Google Shape;87;p6">
+            <a:extLst>
+              <a:ext uri="{FF2B5EF4-FFF2-40B4-BE49-F238E27FC236}">
+                <a16:creationId xmlns:a16="http://schemas.microsoft.com/office/drawing/2014/main" id="{EEB16FE7-B351-59EE-F730-7FE109023723}"/>
+              </a:ext>
+            </a:extLst>
+          </p:cNvPr>
+          <p:cNvSpPr txBox="1"/>
+          <p:nvPr/>
+        </p:nvSpPr>
+        <p:spPr>
+          <a:xfrm>
+            <a:off x="856932" y="1831157"/>
+            <a:ext cx="6652200" cy="1597843"/>
+          </a:xfrm>
+          <a:prstGeom prst="rect">
+            <a:avLst/>
+          </a:prstGeom>
+          <a:noFill/>
+          <a:ln>
+            <a:noFill/>
+          </a:ln>
+        </p:spPr>
+        <p:txBody>
+          <a:bodyPr spcFirstLastPara="1" wrap="square" lIns="91425" tIns="91425" rIns="91425" bIns="91425" anchor="t" anchorCtr="0">
+            <a:spAutoFit/>
+          </a:bodyPr>
+          <a:lstStyle/>
+          <a:p>
+            <a:pPr marL="0" marR="0" lvl="0" indent="0" rtl="0">
+              <a:lnSpc>
+                <a:spcPct val="150000"/>
+              </a:lnSpc>
+              <a:spcBef>
+                <a:spcPts val="2000"/>
+              </a:spcBef>
+              <a:spcAft>
+                <a:spcPts val="1100"/>
+              </a:spcAft>
+              <a:buClr>
+                <a:schemeClr val="dk1"/>
+              </a:buClr>
+              <a:buSzPts val="3600"/>
+              <a:buFont typeface="Arial"/>
+              <a:buNone/>
+            </a:pPr>
+            <a:r>
+              <a:rPr lang="pt-BR" sz="4400" b="1" i="0" u="none" strike="noStrike" cap="none" dirty="0">
+                <a:solidFill>
+                  <a:schemeClr val="tx2">
+                    <a:lumMod val="90000"/>
+                  </a:schemeClr>
+                </a:solidFill>
+                <a:latin typeface="Arial"/>
+                <a:ea typeface="Arial"/>
+                <a:cs typeface="Arial"/>
+                <a:sym typeface="Arial"/>
+              </a:rPr>
+              <a:t>::</a:t>
+            </a:r>
+            <a:r>
+              <a:rPr lang="pt-BR" sz="4400" b="1" i="0" u="none" strike="noStrike" cap="none" dirty="0" err="1">
+                <a:solidFill>
+                  <a:schemeClr val="tx2">
+                    <a:lumMod val="90000"/>
+                  </a:schemeClr>
+                </a:solidFill>
+                <a:latin typeface="Arial"/>
+                <a:ea typeface="Arial"/>
+                <a:cs typeface="Arial"/>
+                <a:sym typeface="Arial"/>
+              </a:rPr>
+              <a:t>first-line</a:t>
+            </a:r>
+            <a:endParaRPr sz="4400" b="1" i="0" u="none" strike="noStrike" cap="none" dirty="0">
+              <a:solidFill>
+                <a:schemeClr val="tx2">
+                  <a:lumMod val="90000"/>
+                </a:schemeClr>
+              </a:solidFill>
+              <a:highlight>
+                <a:schemeClr val="accent6"/>
+              </a:highlight>
+              <a:latin typeface="Arial"/>
+              <a:ea typeface="Arial"/>
+              <a:cs typeface="Arial"/>
+              <a:sym typeface="Arial"/>
+            </a:endParaRPr>
+          </a:p>
+        </p:txBody>
+      </p:sp>
+      <p:sp>
+        <p:nvSpPr>
+          <p:cNvPr id="2" name="Google Shape;149;p13">
+            <a:extLst>
+              <a:ext uri="{FF2B5EF4-FFF2-40B4-BE49-F238E27FC236}">
+                <a16:creationId xmlns:a16="http://schemas.microsoft.com/office/drawing/2014/main" id="{8BF09E09-E7A2-6C3A-9B44-D3DDB67F380C}"/>
+              </a:ext>
+            </a:extLst>
+          </p:cNvPr>
+          <p:cNvSpPr txBox="1"/>
+          <p:nvPr/>
+        </p:nvSpPr>
+        <p:spPr>
+          <a:xfrm>
+            <a:off x="783272" y="3161030"/>
+            <a:ext cx="10625455" cy="752159"/>
+          </a:xfrm>
+          <a:prstGeom prst="rect">
+            <a:avLst/>
+          </a:prstGeom>
+          <a:noFill/>
+          <a:ln>
+            <a:noFill/>
+          </a:ln>
+        </p:spPr>
+        <p:txBody>
+          <a:bodyPr spcFirstLastPara="1" wrap="square" lIns="91425" tIns="91425" rIns="91425" bIns="91425" anchor="t" anchorCtr="0">
+            <a:noAutofit/>
+          </a:bodyPr>
+          <a:lstStyle/>
+          <a:p>
+            <a:pPr marL="114300" lvl="0">
+              <a:buClr>
+                <a:schemeClr val="dk1"/>
+              </a:buClr>
+              <a:buSzPts val="1800"/>
+            </a:pPr>
+            <a:r>
+              <a:rPr lang="pt-BR" sz="2400" dirty="0">
+                <a:solidFill>
+                  <a:schemeClr val="tx2">
+                    <a:lumMod val="90000"/>
+                  </a:schemeClr>
+                </a:solidFill>
+              </a:rPr>
+              <a:t>Usada para formatar a </a:t>
+            </a:r>
+            <a:r>
+              <a:rPr lang="pt-BR" sz="2400" b="1" dirty="0">
+                <a:solidFill>
+                  <a:srgbClr val="ED145B"/>
+                </a:solidFill>
+              </a:rPr>
+              <a:t>primeira linha</a:t>
+            </a:r>
+            <a:r>
+              <a:rPr lang="pt-BR" sz="2400" dirty="0">
+                <a:solidFill>
+                  <a:schemeClr val="tx2">
+                    <a:lumMod val="90000"/>
+                  </a:schemeClr>
+                </a:solidFill>
+              </a:rPr>
+              <a:t> de um elemento.</a:t>
+            </a:r>
+          </a:p>
+        </p:txBody>
+      </p:sp>
+      <p:graphicFrame>
+        <p:nvGraphicFramePr>
+          <p:cNvPr id="5" name="Google Shape;237;p23">
+            <a:extLst>
+              <a:ext uri="{FF2B5EF4-FFF2-40B4-BE49-F238E27FC236}">
+                <a16:creationId xmlns:a16="http://schemas.microsoft.com/office/drawing/2014/main" id="{115C664C-94FD-8ADE-25D2-840C200A874B}"/>
+              </a:ext>
+            </a:extLst>
+          </p:cNvPr>
+          <p:cNvGraphicFramePr/>
+          <p:nvPr>
+            <p:extLst>
+              <p:ext uri="{D42A27DB-BD31-4B8C-83A1-F6EECF244321}">
+                <p14:modId xmlns:p14="http://schemas.microsoft.com/office/powerpoint/2010/main" val="2206565184"/>
+              </p:ext>
+            </p:extLst>
+          </p:nvPr>
+        </p:nvGraphicFramePr>
+        <p:xfrm>
+          <a:off x="4183032" y="4289265"/>
+          <a:ext cx="3681300" cy="1224280"/>
+        </p:xfrm>
+        <a:graphic>
+          <a:graphicData uri="http://schemas.openxmlformats.org/drawingml/2006/table">
+            <a:tbl>
+              <a:tblPr>
+                <a:noFill/>
+                <a:tableStyleId>{63B152E9-AFB2-458E-BFAF-78D379E83702}</a:tableStyleId>
+              </a:tblPr>
+              <a:tblGrid>
+                <a:gridCol w="3681300">
+                  <a:extLst>
+                    <a:ext uri="{9D8B030D-6E8A-4147-A177-3AD203B41FA5}">
+                      <a16:colId xmlns:a16="http://schemas.microsoft.com/office/drawing/2014/main" val="20000"/>
+                    </a:ext>
+                  </a:extLst>
+                </a:gridCol>
+              </a:tblGrid>
+              <a:tr h="851325">
+                <a:tc>
+                  <a:txBody>
+                    <a:bodyPr/>
+                    <a:lstStyle/>
+                    <a:p>
+                      <a:pPr marL="0" marR="0" lvl="0" indent="0" algn="l" rtl="0">
+                        <a:lnSpc>
+                          <a:spcPct val="100000"/>
+                        </a:lnSpc>
+                        <a:spcBef>
+                          <a:spcPts val="0"/>
+                        </a:spcBef>
+                        <a:spcAft>
+                          <a:spcPts val="0"/>
+                        </a:spcAft>
+                        <a:buClr>
+                          <a:srgbClr val="000000"/>
+                        </a:buClr>
+                        <a:buSzPts val="1600"/>
+                        <a:buFont typeface="Arial"/>
+                        <a:buNone/>
+                      </a:pPr>
+                      <a:r>
+                        <a:rPr lang="pt-BR" sz="2400" b="0" u="none" strike="noStrike" cap="none" dirty="0">
+                          <a:solidFill>
+                            <a:srgbClr val="FF79C6"/>
+                          </a:solidFill>
+                          <a:latin typeface="Consolas"/>
+                          <a:ea typeface="Consolas"/>
+                          <a:cs typeface="Consolas"/>
+                          <a:sym typeface="Consolas"/>
+                        </a:rPr>
+                        <a:t>p</a:t>
+                      </a:r>
+                      <a:r>
+                        <a:rPr lang="pt-BR" sz="2400" b="0" i="1" u="none" strike="noStrike" cap="none" dirty="0">
+                          <a:solidFill>
+                            <a:srgbClr val="FF79C6"/>
+                          </a:solidFill>
+                          <a:latin typeface="Consolas"/>
+                          <a:ea typeface="Consolas"/>
+                          <a:cs typeface="Consolas"/>
+                          <a:sym typeface="Consolas"/>
+                        </a:rPr>
+                        <a:t>::</a:t>
+                      </a:r>
+                      <a:r>
+                        <a:rPr lang="pt-BR" sz="2400" b="0" i="1" u="none" strike="noStrike" cap="none" dirty="0">
+                          <a:solidFill>
+                            <a:srgbClr val="50FA7B"/>
+                          </a:solidFill>
+                          <a:latin typeface="Consolas"/>
+                          <a:ea typeface="Consolas"/>
+                          <a:cs typeface="Consolas"/>
+                          <a:sym typeface="Consolas"/>
+                        </a:rPr>
+                        <a:t>first-line</a:t>
+                      </a:r>
+                      <a:r>
+                        <a:rPr lang="pt-BR" sz="2400" b="0" u="none" strike="noStrike" cap="none" dirty="0">
+                          <a:solidFill>
+                            <a:srgbClr val="F8F8F2"/>
+                          </a:solidFill>
+                          <a:latin typeface="Consolas"/>
+                          <a:ea typeface="Consolas"/>
+                          <a:cs typeface="Consolas"/>
+                          <a:sym typeface="Consolas"/>
+                        </a:rPr>
+                        <a:t> {</a:t>
+                      </a:r>
+                      <a:endParaRPr sz="2400" u="none" strike="noStrike" cap="none" dirty="0"/>
+                    </a:p>
+                    <a:p>
+                      <a:pPr marL="0" marR="0" lvl="0" indent="0" algn="l" rtl="0">
+                        <a:lnSpc>
+                          <a:spcPct val="100000"/>
+                        </a:lnSpc>
+                        <a:spcBef>
+                          <a:spcPts val="0"/>
+                        </a:spcBef>
+                        <a:spcAft>
+                          <a:spcPts val="0"/>
+                        </a:spcAft>
+                        <a:buClr>
+                          <a:srgbClr val="000000"/>
+                        </a:buClr>
+                        <a:buSzPts val="1600"/>
+                        <a:buFont typeface="Arial"/>
+                        <a:buNone/>
+                      </a:pPr>
+                      <a:r>
+                        <a:rPr lang="pt-BR" sz="2400" b="0" u="none" strike="noStrike" cap="none" dirty="0">
+                          <a:solidFill>
+                            <a:srgbClr val="F8F8F2"/>
+                          </a:solidFill>
+                          <a:latin typeface="Consolas"/>
+                          <a:ea typeface="Consolas"/>
+                          <a:cs typeface="Consolas"/>
+                          <a:sym typeface="Consolas"/>
+                        </a:rPr>
+                        <a:t>    </a:t>
+                      </a:r>
+                      <a:r>
+                        <a:rPr lang="pt-BR" sz="2400" b="0" u="none" strike="noStrike" cap="none" dirty="0">
+                          <a:solidFill>
+                            <a:srgbClr val="8BE9FD"/>
+                          </a:solidFill>
+                          <a:latin typeface="Consolas"/>
+                          <a:ea typeface="Consolas"/>
+                          <a:cs typeface="Consolas"/>
+                          <a:sym typeface="Consolas"/>
+                        </a:rPr>
+                        <a:t>color</a:t>
+                      </a:r>
+                      <a:r>
+                        <a:rPr lang="pt-BR" sz="2400" b="0" u="none" strike="noStrike" cap="none" dirty="0">
+                          <a:solidFill>
+                            <a:srgbClr val="FF79C6"/>
+                          </a:solidFill>
+                          <a:latin typeface="Consolas"/>
+                          <a:ea typeface="Consolas"/>
+                          <a:cs typeface="Consolas"/>
+                          <a:sym typeface="Consolas"/>
+                        </a:rPr>
+                        <a:t>:</a:t>
+                      </a:r>
+                      <a:r>
+                        <a:rPr lang="pt-BR" sz="2400" b="0" u="none" strike="noStrike" cap="none" dirty="0">
+                          <a:solidFill>
+                            <a:srgbClr val="F8F8F2"/>
+                          </a:solidFill>
+                          <a:latin typeface="Consolas"/>
+                          <a:ea typeface="Consolas"/>
+                          <a:cs typeface="Consolas"/>
+                          <a:sym typeface="Consolas"/>
+                        </a:rPr>
+                        <a:t> </a:t>
+                      </a:r>
+                      <a:r>
+                        <a:rPr lang="pt-BR" sz="2400" b="0" u="none" strike="noStrike" cap="none" dirty="0">
+                          <a:solidFill>
+                            <a:srgbClr val="BD93F9"/>
+                          </a:solidFill>
+                          <a:latin typeface="Consolas"/>
+                          <a:ea typeface="Consolas"/>
+                          <a:cs typeface="Consolas"/>
+                          <a:sym typeface="Consolas"/>
+                        </a:rPr>
+                        <a:t>blue</a:t>
+                      </a:r>
+                      <a:r>
+                        <a:rPr lang="pt-BR" sz="2400" b="0" u="none" strike="noStrike" cap="none" dirty="0">
+                          <a:solidFill>
+                            <a:srgbClr val="F8F8F2"/>
+                          </a:solidFill>
+                          <a:latin typeface="Consolas"/>
+                          <a:ea typeface="Consolas"/>
+                          <a:cs typeface="Consolas"/>
+                          <a:sym typeface="Consolas"/>
+                        </a:rPr>
+                        <a:t>;</a:t>
+                      </a:r>
+                      <a:endParaRPr sz="2400" u="none" strike="noStrike" cap="none" dirty="0"/>
+                    </a:p>
+                    <a:p>
+                      <a:pPr marL="0" marR="0" lvl="0" indent="0" algn="l" rtl="0">
+                        <a:lnSpc>
+                          <a:spcPct val="100000"/>
+                        </a:lnSpc>
+                        <a:spcBef>
+                          <a:spcPts val="0"/>
+                        </a:spcBef>
+                        <a:spcAft>
+                          <a:spcPts val="0"/>
+                        </a:spcAft>
+                        <a:buClr>
+                          <a:srgbClr val="000000"/>
+                        </a:buClr>
+                        <a:buSzPts val="1600"/>
+                        <a:buFont typeface="Arial"/>
+                        <a:buNone/>
+                      </a:pPr>
+                      <a:r>
+                        <a:rPr lang="pt-BR" sz="2400" b="0" u="none" strike="noStrike" cap="none" dirty="0">
+                          <a:solidFill>
+                            <a:srgbClr val="F8F8F2"/>
+                          </a:solidFill>
+                          <a:latin typeface="Consolas"/>
+                          <a:ea typeface="Consolas"/>
+                          <a:cs typeface="Consolas"/>
+                          <a:sym typeface="Consolas"/>
+                        </a:rPr>
+                        <a:t>}</a:t>
+                      </a:r>
+                      <a:endParaRPr sz="2400" u="none" strike="noStrike" cap="none" dirty="0"/>
+                    </a:p>
+                  </a:txBody>
+                  <a:tcPr marL="63500" marR="63500" marT="63500" marB="63500">
+                    <a:lnL w="38100" cap="flat" cmpd="sng">
+                      <a:solidFill>
+                        <a:srgbClr val="EAFF6A"/>
+                      </a:solidFill>
+                      <a:prstDash val="solid"/>
+                      <a:round/>
+                      <a:headEnd type="none" w="sm" len="sm"/>
+                      <a:tailEnd type="none" w="sm" len="sm"/>
+                    </a:lnL>
+                    <a:lnR w="38100" cap="flat" cmpd="sng">
+                      <a:solidFill>
+                        <a:srgbClr val="EAFF6A"/>
+                      </a:solidFill>
+                      <a:prstDash val="solid"/>
+                      <a:round/>
+                      <a:headEnd type="none" w="sm" len="sm"/>
+                      <a:tailEnd type="none" w="sm" len="sm"/>
+                    </a:lnR>
+                    <a:lnT w="38100" cap="flat" cmpd="sng">
+                      <a:solidFill>
+                        <a:srgbClr val="EAFF6A"/>
+                      </a:solidFill>
+                      <a:prstDash val="solid"/>
+                      <a:round/>
+                      <a:headEnd type="none" w="sm" len="sm"/>
+                      <a:tailEnd type="none" w="sm" len="sm"/>
+                    </a:lnT>
+                    <a:lnB w="38100" cap="flat" cmpd="sng">
+                      <a:solidFill>
+                        <a:srgbClr val="EAFF6A"/>
+                      </a:solidFill>
+                      <a:prstDash val="solid"/>
+                      <a:round/>
+                      <a:headEnd type="none" w="sm" len="sm"/>
+                      <a:tailEnd type="none" w="sm" len="sm"/>
+                    </a:lnB>
+                    <a:solidFill>
+                      <a:srgbClr val="0C343D"/>
+                    </a:solidFill>
+                  </a:tcPr>
+                </a:tc>
+                <a:extLst>
+                  <a:ext uri="{0D108BD9-81ED-4DB2-BD59-A6C34878D82A}">
+                    <a16:rowId xmlns:a16="http://schemas.microsoft.com/office/drawing/2014/main" val="10000"/>
+                  </a:ext>
+                </a:extLst>
+              </a:tr>
+            </a:tbl>
+          </a:graphicData>
+        </a:graphic>
+      </p:graphicFrame>
+    </p:spTree>
+    <p:extLst>
+      <p:ext uri="{BB962C8B-B14F-4D97-AF65-F5344CB8AC3E}">
+        <p14:creationId xmlns:p14="http://schemas.microsoft.com/office/powerpoint/2010/main" val="1701302587"/>
+      </p:ext>
+    </p:extLst>
+  </p:cSld>
+  <p:clrMapOvr>
+    <a:masterClrMapping/>
+  </p:clrMapOvr>
+</p:sld>
+</file>
+
+<file path=ppt/slides/slide19.xml><?xml version="1.0" encoding="utf-8"?>
 <p:sld xmlns:a="http://schemas.openxmlformats.org/drawingml/2006/main" xmlns:r="http://schemas.openxmlformats.org/officeDocument/2006/relationships" xmlns:p="http://schemas.openxmlformats.org/presentationml/2006/main">
   <p:cSld>
     <p:spTree>
@@ -20504,7 +19361,7 @@
             <a:fld id="{00000000-1234-1234-1234-123412341234}" type="slidenum">
               <a:rPr lang="pt-BR" smtClean="0"/>
               <a:pPr lvl="0"/>
-              <a:t>20</a:t>
+              <a:t>19</a:t>
             </a:fld>
             <a:endParaRPr lang="pt-BR"/>
           </a:p>
@@ -21395,18 +20252,12 @@
 </p:sld>
 </file>
 
-<file path=ppt/slides/slide21.xml><?xml version="1.0" encoding="utf-8"?>
+<file path=ppt/slides/slide2.xml><?xml version="1.0" encoding="utf-8"?>
 <p:sld xmlns:a="http://schemas.openxmlformats.org/drawingml/2006/main" xmlns:r="http://schemas.openxmlformats.org/officeDocument/2006/relationships" xmlns:p="http://schemas.openxmlformats.org/presentationml/2006/main">
   <p:cSld>
     <p:spTree>
       <p:nvGrpSpPr>
-        <p:cNvPr id="1" name="">
-          <a:extLst>
-            <a:ext uri="{FF2B5EF4-FFF2-40B4-BE49-F238E27FC236}">
-              <a16:creationId xmlns:a16="http://schemas.microsoft.com/office/drawing/2014/main" id="{E39B55FB-CF7F-261C-8F6F-AC64C7574CEC}"/>
-            </a:ext>
-          </a:extLst>
-        </p:cNvPr>
+        <p:cNvPr id="1" name="Shape 64"/>
         <p:cNvGrpSpPr/>
         <p:nvPr/>
       </p:nvGrpSpPr>
@@ -21418,100 +20269,12 @@
           <a:chExt cx="0" cy="0"/>
         </a:xfrm>
       </p:grpSpPr>
-      <p:sp>
-        <p:nvSpPr>
-          <p:cNvPr id="8" name="Retângulo 7">
+      <p:pic>
+        <p:nvPicPr>
+          <p:cNvPr id="10" name="Imagem 9">
             <a:extLst>
               <a:ext uri="{FF2B5EF4-FFF2-40B4-BE49-F238E27FC236}">
-                <a16:creationId xmlns:a16="http://schemas.microsoft.com/office/drawing/2014/main" id="{DDE713B7-A93D-4E8E-9C92-CB37C4DDA960}"/>
-              </a:ext>
-            </a:extLst>
-          </p:cNvPr>
-          <p:cNvSpPr/>
-          <p:nvPr/>
-        </p:nvSpPr>
-        <p:spPr>
-          <a:xfrm>
-            <a:off x="0" y="0"/>
-            <a:ext cx="12192000" cy="6858000"/>
-          </a:xfrm>
-          <a:prstGeom prst="rect">
-            <a:avLst/>
-          </a:prstGeom>
-          <a:solidFill>
-            <a:schemeClr val="tx1">
-              <a:lumMod val="85000"/>
-              <a:lumOff val="15000"/>
-            </a:schemeClr>
-          </a:solidFill>
-        </p:spPr>
-        <p:style>
-          <a:lnRef idx="2">
-            <a:schemeClr val="dk1">
-              <a:shade val="15000"/>
-            </a:schemeClr>
-          </a:lnRef>
-          <a:fillRef idx="1">
-            <a:schemeClr val="dk1"/>
-          </a:fillRef>
-          <a:effectRef idx="0">
-            <a:schemeClr val="dk1"/>
-          </a:effectRef>
-          <a:fontRef idx="minor">
-            <a:schemeClr val="lt1"/>
-          </a:fontRef>
-        </p:style>
-        <p:txBody>
-          <a:bodyPr rtlCol="0" anchor="ctr"/>
-          <a:lstStyle/>
-          <a:p>
-            <a:pPr algn="ctr"/>
-            <a:endParaRPr lang="pt-BR" dirty="0"/>
-          </a:p>
-        </p:txBody>
-      </p:sp>
-      <p:sp>
-        <p:nvSpPr>
-          <p:cNvPr id="3" name="Espaço Reservado para Número de Slide 2">
-            <a:extLst>
-              <a:ext uri="{FF2B5EF4-FFF2-40B4-BE49-F238E27FC236}">
-                <a16:creationId xmlns:a16="http://schemas.microsoft.com/office/drawing/2014/main" id="{58733BB9-3C59-B9BD-913A-4D42D5D7B2D7}"/>
-              </a:ext>
-            </a:extLst>
-          </p:cNvPr>
-          <p:cNvSpPr>
-            <a:spLocks noGrp="1"/>
-          </p:cNvSpPr>
-          <p:nvPr>
-            <p:ph type="sldNum" idx="4294967295"/>
-          </p:nvPr>
-        </p:nvSpPr>
-        <p:spPr>
-          <a:xfrm>
-            <a:off x="11353800" y="5594350"/>
-            <a:ext cx="838200" cy="365125"/>
-          </a:xfrm>
-        </p:spPr>
-        <p:txBody>
-          <a:bodyPr/>
-          <a:lstStyle/>
-          <a:p>
-            <a:pPr lvl="0"/>
-            <a:fld id="{00000000-1234-1234-1234-123412341234}" type="slidenum">
-              <a:rPr lang="pt-BR" smtClean="0"/>
-              <a:pPr lvl="0"/>
-              <a:t>21</a:t>
-            </a:fld>
-            <a:endParaRPr lang="pt-BR"/>
-          </a:p>
-        </p:txBody>
-      </p:sp>
-      <p:pic>
-        <p:nvPicPr>
-          <p:cNvPr id="7" name="Imagem 6">
-            <a:extLst>
-              <a:ext uri="{FF2B5EF4-FFF2-40B4-BE49-F238E27FC236}">
-                <a16:creationId xmlns:a16="http://schemas.microsoft.com/office/drawing/2014/main" id="{00DF8A01-0860-23D2-DEF1-5CF341BFF5FB}"/>
+                <a16:creationId xmlns:a16="http://schemas.microsoft.com/office/drawing/2014/main" id="{A7199026-5003-32A9-5A4F-BF02DE3DF027}"/>
               </a:ext>
             </a:extLst>
           </p:cNvPr>
@@ -21521,82 +20284,41 @@
           <p:nvPr/>
         </p:nvPicPr>
         <p:blipFill>
-          <a:blip r:embed="rId2"/>
+          <a:blip r:embed="rId3"/>
           <a:stretch>
             <a:fillRect/>
           </a:stretch>
         </p:blipFill>
         <p:spPr>
-          <a:xfrm>
-            <a:off x="-215900" y="-71438"/>
-            <a:ext cx="12522201" cy="7043738"/>
+          <a:xfrm flipH="1">
+            <a:off x="-128588" y="0"/>
+            <a:ext cx="11901487" cy="6858000"/>
           </a:xfrm>
           <a:prstGeom prst="rect">
             <a:avLst/>
           </a:prstGeom>
+          <a:scene3d>
+            <a:camera prst="orthographicFront">
+              <a:rot lat="0" lon="0" rev="0"/>
+            </a:camera>
+            <a:lightRig rig="threePt" dir="t"/>
+          </a:scene3d>
         </p:spPr>
       </p:pic>
-      <p:cxnSp>
-        <p:nvCxnSpPr>
-          <p:cNvPr id="18" name="Conector reto 17">
-            <a:extLst>
-              <a:ext uri="{FF2B5EF4-FFF2-40B4-BE49-F238E27FC236}">
-                <a16:creationId xmlns:a16="http://schemas.microsoft.com/office/drawing/2014/main" id="{ADEC6381-2EEA-A45B-77E2-7BE0D45DEC1C}"/>
-              </a:ext>
-            </a:extLst>
-          </p:cNvPr>
-          <p:cNvCxnSpPr>
-            <a:cxnSpLocks/>
-          </p:cNvCxnSpPr>
-          <p:nvPr/>
-        </p:nvCxnSpPr>
-        <p:spPr>
-          <a:xfrm>
-            <a:off x="856932" y="743587"/>
-            <a:ext cx="0" cy="828040"/>
-          </a:xfrm>
-          <a:prstGeom prst="line">
-            <a:avLst/>
-          </a:prstGeom>
-          <a:ln>
-            <a:solidFill>
-              <a:srgbClr val="ED145B"/>
-            </a:solidFill>
-          </a:ln>
-        </p:spPr>
-        <p:style>
-          <a:lnRef idx="3">
-            <a:schemeClr val="dk1"/>
-          </a:lnRef>
-          <a:fillRef idx="0">
-            <a:schemeClr val="dk1"/>
-          </a:fillRef>
-          <a:effectRef idx="2">
-            <a:schemeClr val="dk1"/>
-          </a:effectRef>
-          <a:fontRef idx="minor">
-            <a:schemeClr val="tx1"/>
-          </a:fontRef>
-        </p:style>
-      </p:cxnSp>
       <p:sp>
         <p:nvSpPr>
-          <p:cNvPr id="22" name="Google Shape;85;p6">
-            <a:extLst>
-              <a:ext uri="{FF2B5EF4-FFF2-40B4-BE49-F238E27FC236}">
-                <a16:creationId xmlns:a16="http://schemas.microsoft.com/office/drawing/2014/main" id="{92C6C37A-4602-F79E-44D0-02C07B35B4CB}"/>
-              </a:ext>
-            </a:extLst>
-          </p:cNvPr>
+          <p:cNvPr id="65" name="Google Shape;65;p3"/>
           <p:cNvSpPr txBox="1">
-            <a:spLocks/>
+            <a:spLocks noGrp="1"/>
           </p:cNvSpPr>
-          <p:nvPr/>
+          <p:nvPr>
+            <p:ph type="title"/>
+          </p:nvPr>
         </p:nvSpPr>
         <p:spPr>
           <a:xfrm>
-            <a:off x="945515" y="664529"/>
-            <a:ext cx="10300970" cy="986155"/>
+            <a:off x="838198" y="3017044"/>
+            <a:ext cx="10515600" cy="823912"/>
           </a:xfrm>
           <a:prstGeom prst="rect">
             <a:avLst/>
@@ -21608,824 +20330,68 @@
         </p:spPr>
         <p:txBody>
           <a:bodyPr spcFirstLastPara="1" wrap="square" lIns="91425" tIns="45700" rIns="91425" bIns="45700" anchor="ctr" anchorCtr="0">
-            <a:noAutofit/>
+            <a:normAutofit fontScale="90000"/>
           </a:bodyPr>
-          <a:lstStyle>
-            <a:defPPr marR="0" lvl="0" algn="l" rtl="0">
-              <a:lnSpc>
-                <a:spcPct val="100000"/>
-              </a:lnSpc>
-              <a:spcBef>
-                <a:spcPts val="0"/>
-              </a:spcBef>
-              <a:spcAft>
-                <a:spcPts val="0"/>
-              </a:spcAft>
-            </a:defPPr>
-            <a:lvl1pPr marR="0" lvl="0" algn="l" rtl="0">
-              <a:lnSpc>
-                <a:spcPct val="100000"/>
-              </a:lnSpc>
-              <a:spcBef>
-                <a:spcPts val="0"/>
-              </a:spcBef>
-              <a:spcAft>
-                <a:spcPts val="0"/>
-              </a:spcAft>
-              <a:buClr>
-                <a:srgbClr val="000000"/>
-              </a:buClr>
-              <a:buFont typeface="Arial"/>
-              <a:defRPr sz="1400" b="0" i="0" u="none" strike="noStrike" cap="none">
-                <a:solidFill>
-                  <a:srgbClr val="000000"/>
-                </a:solidFill>
-                <a:latin typeface="Arial"/>
-                <a:ea typeface="Arial"/>
-                <a:cs typeface="Arial"/>
-                <a:sym typeface="Arial"/>
-              </a:defRPr>
-            </a:lvl1pPr>
-            <a:lvl2pPr marR="0" lvl="1" algn="l" rtl="0">
-              <a:lnSpc>
-                <a:spcPct val="100000"/>
-              </a:lnSpc>
-              <a:spcBef>
-                <a:spcPts val="0"/>
-              </a:spcBef>
-              <a:spcAft>
-                <a:spcPts val="0"/>
-              </a:spcAft>
-              <a:buClr>
-                <a:srgbClr val="000000"/>
-              </a:buClr>
-              <a:buFont typeface="Arial"/>
-              <a:defRPr sz="1400" b="0" i="0" u="none" strike="noStrike" cap="none">
-                <a:solidFill>
-                  <a:srgbClr val="000000"/>
-                </a:solidFill>
-                <a:latin typeface="Arial"/>
-                <a:ea typeface="Arial"/>
-                <a:cs typeface="Arial"/>
-                <a:sym typeface="Arial"/>
-              </a:defRPr>
-            </a:lvl2pPr>
-            <a:lvl3pPr marR="0" lvl="2" algn="l" rtl="0">
-              <a:lnSpc>
-                <a:spcPct val="100000"/>
-              </a:lnSpc>
-              <a:spcBef>
-                <a:spcPts val="0"/>
-              </a:spcBef>
-              <a:spcAft>
-                <a:spcPts val="0"/>
-              </a:spcAft>
-              <a:buClr>
-                <a:srgbClr val="000000"/>
-              </a:buClr>
-              <a:buFont typeface="Arial"/>
-              <a:defRPr sz="1400" b="0" i="0" u="none" strike="noStrike" cap="none">
-                <a:solidFill>
-                  <a:srgbClr val="000000"/>
-                </a:solidFill>
-                <a:latin typeface="Arial"/>
-                <a:ea typeface="Arial"/>
-                <a:cs typeface="Arial"/>
-                <a:sym typeface="Arial"/>
-              </a:defRPr>
-            </a:lvl3pPr>
-            <a:lvl4pPr marR="0" lvl="3" algn="l" rtl="0">
-              <a:lnSpc>
-                <a:spcPct val="100000"/>
-              </a:lnSpc>
-              <a:spcBef>
-                <a:spcPts val="0"/>
-              </a:spcBef>
-              <a:spcAft>
-                <a:spcPts val="0"/>
-              </a:spcAft>
-              <a:buClr>
-                <a:srgbClr val="000000"/>
-              </a:buClr>
-              <a:buFont typeface="Arial"/>
-              <a:defRPr sz="1400" b="0" i="0" u="none" strike="noStrike" cap="none">
-                <a:solidFill>
-                  <a:srgbClr val="000000"/>
-                </a:solidFill>
-                <a:latin typeface="Arial"/>
-                <a:ea typeface="Arial"/>
-                <a:cs typeface="Arial"/>
-                <a:sym typeface="Arial"/>
-              </a:defRPr>
-            </a:lvl4pPr>
-            <a:lvl5pPr marR="0" lvl="4" algn="l" rtl="0">
-              <a:lnSpc>
-                <a:spcPct val="100000"/>
-              </a:lnSpc>
-              <a:spcBef>
-                <a:spcPts val="0"/>
-              </a:spcBef>
-              <a:spcAft>
-                <a:spcPts val="0"/>
-              </a:spcAft>
-              <a:buClr>
-                <a:srgbClr val="000000"/>
-              </a:buClr>
-              <a:buFont typeface="Arial"/>
-              <a:defRPr sz="1400" b="0" i="0" u="none" strike="noStrike" cap="none">
-                <a:solidFill>
-                  <a:srgbClr val="000000"/>
-                </a:solidFill>
-                <a:latin typeface="Arial"/>
-                <a:ea typeface="Arial"/>
-                <a:cs typeface="Arial"/>
-                <a:sym typeface="Arial"/>
-              </a:defRPr>
-            </a:lvl5pPr>
-            <a:lvl6pPr marR="0" lvl="5" algn="l" rtl="0">
-              <a:lnSpc>
-                <a:spcPct val="100000"/>
-              </a:lnSpc>
-              <a:spcBef>
-                <a:spcPts val="0"/>
-              </a:spcBef>
-              <a:spcAft>
-                <a:spcPts val="0"/>
-              </a:spcAft>
-              <a:buClr>
-                <a:srgbClr val="000000"/>
-              </a:buClr>
-              <a:buFont typeface="Arial"/>
-              <a:defRPr sz="1400" b="0" i="0" u="none" strike="noStrike" cap="none">
-                <a:solidFill>
-                  <a:srgbClr val="000000"/>
-                </a:solidFill>
-                <a:latin typeface="Arial"/>
-                <a:ea typeface="Arial"/>
-                <a:cs typeface="Arial"/>
-                <a:sym typeface="Arial"/>
-              </a:defRPr>
-            </a:lvl6pPr>
-            <a:lvl7pPr marR="0" lvl="6" algn="l" rtl="0">
-              <a:lnSpc>
-                <a:spcPct val="100000"/>
-              </a:lnSpc>
-              <a:spcBef>
-                <a:spcPts val="0"/>
-              </a:spcBef>
-              <a:spcAft>
-                <a:spcPts val="0"/>
-              </a:spcAft>
-              <a:buClr>
-                <a:srgbClr val="000000"/>
-              </a:buClr>
-              <a:buFont typeface="Arial"/>
-              <a:defRPr sz="1400" b="0" i="0" u="none" strike="noStrike" cap="none">
-                <a:solidFill>
-                  <a:srgbClr val="000000"/>
-                </a:solidFill>
-                <a:latin typeface="Arial"/>
-                <a:ea typeface="Arial"/>
-                <a:cs typeface="Arial"/>
-                <a:sym typeface="Arial"/>
-              </a:defRPr>
-            </a:lvl7pPr>
-            <a:lvl8pPr marR="0" lvl="7" algn="l" rtl="0">
-              <a:lnSpc>
-                <a:spcPct val="100000"/>
-              </a:lnSpc>
-              <a:spcBef>
-                <a:spcPts val="0"/>
-              </a:spcBef>
-              <a:spcAft>
-                <a:spcPts val="0"/>
-              </a:spcAft>
-              <a:buClr>
-                <a:srgbClr val="000000"/>
-              </a:buClr>
-              <a:buFont typeface="Arial"/>
-              <a:defRPr sz="1400" b="0" i="0" u="none" strike="noStrike" cap="none">
-                <a:solidFill>
-                  <a:srgbClr val="000000"/>
-                </a:solidFill>
-                <a:latin typeface="Arial"/>
-                <a:ea typeface="Arial"/>
-                <a:cs typeface="Arial"/>
-                <a:sym typeface="Arial"/>
-              </a:defRPr>
-            </a:lvl8pPr>
-            <a:lvl9pPr marR="0" lvl="8" algn="l" rtl="0">
-              <a:lnSpc>
-                <a:spcPct val="100000"/>
-              </a:lnSpc>
-              <a:spcBef>
-                <a:spcPts val="0"/>
-              </a:spcBef>
-              <a:spcAft>
-                <a:spcPts val="0"/>
-              </a:spcAft>
-              <a:buClr>
-                <a:srgbClr val="000000"/>
-              </a:buClr>
-              <a:buFont typeface="Arial"/>
-              <a:defRPr sz="1400" b="0" i="0" u="none" strike="noStrike" cap="none">
-                <a:solidFill>
-                  <a:srgbClr val="000000"/>
-                </a:solidFill>
-                <a:latin typeface="Arial"/>
-                <a:ea typeface="Arial"/>
-                <a:cs typeface="Arial"/>
-                <a:sym typeface="Arial"/>
-              </a:defRPr>
-            </a:lvl9pPr>
-          </a:lstStyle>
+          <a:lstStyle/>
           <a:p>
-            <a:pPr>
-              <a:lnSpc>
-                <a:spcPct val="120000"/>
-              </a:lnSpc>
-              <a:buClr>
-                <a:srgbClr val="595959"/>
-              </a:buClr>
-              <a:buSzPct val="222222"/>
+            <a:pPr marL="0" lvl="0" indent="0" algn="ctr" rtl="0">
+              <a:lnSpc>
+                <a:spcPct val="90000"/>
+              </a:lnSpc>
+              <a:spcBef>
+                <a:spcPts val="0"/>
+              </a:spcBef>
+              <a:spcAft>
+                <a:spcPts val="0"/>
+              </a:spcAft>
+              <a:buClr>
+                <a:srgbClr val="D8D8D8"/>
+              </a:buClr>
+              <a:buSzPct val="100000"/>
+              <a:buFont typeface="Arial"/>
+              <a:buNone/>
             </a:pPr>
             <a:r>
-              <a:rPr lang="pt-BR" sz="4300" dirty="0" err="1">
-                <a:solidFill>
-                  <a:schemeClr val="bg1"/>
-                </a:solidFill>
-              </a:rPr>
-              <a:t>Pseudo-elemento</a:t>
-            </a:r>
-            <a:br>
-              <a:rPr lang="pt-BR" sz="4300" dirty="0">
+              <a:rPr lang="pt-BR" dirty="0" err="1">
                 <a:solidFill>
                   <a:schemeClr val="tx2">
                     <a:lumMod val="90000"/>
                   </a:schemeClr>
                 </a:solidFill>
               </a:rPr>
-            </a:br>
+              <a:t>Pseudo-classes</a:t>
+            </a:r>
             <a:r>
-              <a:rPr lang="pt-BR" sz="2000" dirty="0">
+              <a:rPr lang="pt-BR" dirty="0">
                 <a:solidFill>
                   <a:schemeClr val="tx2">
                     <a:lumMod val="90000"/>
                   </a:schemeClr>
                 </a:solidFill>
               </a:rPr>
-              <a:t>Servem para selecionar uma parte específica de um elemento.</a:t>
+              <a:t> e </a:t>
             </a:r>
-          </a:p>
-        </p:txBody>
-      </p:sp>
-      <p:sp>
-        <p:nvSpPr>
-          <p:cNvPr id="23" name="Google Shape;87;p6">
-            <a:extLst>
-              <a:ext uri="{FF2B5EF4-FFF2-40B4-BE49-F238E27FC236}">
-                <a16:creationId xmlns:a16="http://schemas.microsoft.com/office/drawing/2014/main" id="{F963F7C5-612D-1778-4203-718B42A24BB6}"/>
-              </a:ext>
-            </a:extLst>
-          </p:cNvPr>
-          <p:cNvSpPr txBox="1"/>
-          <p:nvPr/>
-        </p:nvSpPr>
-        <p:spPr>
-          <a:xfrm>
-            <a:off x="856932" y="1831157"/>
-            <a:ext cx="6652200" cy="1597843"/>
-          </a:xfrm>
-          <a:prstGeom prst="rect">
-            <a:avLst/>
-          </a:prstGeom>
-          <a:noFill/>
-          <a:ln>
-            <a:noFill/>
-          </a:ln>
-        </p:spPr>
-        <p:txBody>
-          <a:bodyPr spcFirstLastPara="1" wrap="square" lIns="91425" tIns="91425" rIns="91425" bIns="91425" anchor="t" anchorCtr="0">
-            <a:spAutoFit/>
-          </a:bodyPr>
-          <a:lstStyle/>
-          <a:p>
-            <a:pPr marL="0" marR="0" lvl="0" indent="0" rtl="0">
-              <a:lnSpc>
-                <a:spcPct val="150000"/>
-              </a:lnSpc>
-              <a:spcBef>
-                <a:spcPts val="2000"/>
-              </a:spcBef>
-              <a:spcAft>
-                <a:spcPts val="1100"/>
-              </a:spcAft>
-              <a:buClr>
-                <a:schemeClr val="dk1"/>
-              </a:buClr>
-              <a:buSzPts val="3600"/>
-              <a:buFont typeface="Arial"/>
-              <a:buNone/>
-            </a:pPr>
             <a:r>
-              <a:rPr lang="pt-BR" sz="4400" b="1" i="0" u="none" strike="noStrike" cap="none" dirty="0">
+              <a:rPr lang="pt-BR" dirty="0" err="1">
                 <a:solidFill>
                   <a:schemeClr val="tx2">
                     <a:lumMod val="90000"/>
                   </a:schemeClr>
                 </a:solidFill>
-                <a:latin typeface="Arial"/>
-                <a:ea typeface="Arial"/>
-                <a:cs typeface="Arial"/>
-                <a:sym typeface="Arial"/>
               </a:rPr>
-              <a:t>::</a:t>
+              <a:t>Pseudo-elementos</a:t>
             </a:r>
-            <a:r>
-              <a:rPr lang="pt-BR" sz="4400" b="1" i="0" u="none" strike="noStrike" cap="none" dirty="0" err="1">
-                <a:solidFill>
-                  <a:schemeClr val="tx2">
-                    <a:lumMod val="90000"/>
-                  </a:schemeClr>
-                </a:solidFill>
-                <a:latin typeface="Arial"/>
-                <a:ea typeface="Arial"/>
-                <a:cs typeface="Arial"/>
-                <a:sym typeface="Arial"/>
-              </a:rPr>
-              <a:t>first-letter</a:t>
-            </a:r>
-            <a:endParaRPr sz="4400" b="1" i="0" u="none" strike="noStrike" cap="none" dirty="0">
+            <a:endParaRPr dirty="0">
               <a:solidFill>
                 <a:schemeClr val="tx2">
                   <a:lumMod val="90000"/>
                 </a:schemeClr>
               </a:solidFill>
-              <a:highlight>
-                <a:schemeClr val="accent6"/>
-              </a:highlight>
-              <a:latin typeface="Arial"/>
-              <a:ea typeface="Arial"/>
-              <a:cs typeface="Arial"/>
-              <a:sym typeface="Arial"/>
             </a:endParaRPr>
           </a:p>
         </p:txBody>
       </p:sp>
-      <p:sp>
-        <p:nvSpPr>
-          <p:cNvPr id="2" name="Google Shape;149;p13">
-            <a:extLst>
-              <a:ext uri="{FF2B5EF4-FFF2-40B4-BE49-F238E27FC236}">
-                <a16:creationId xmlns:a16="http://schemas.microsoft.com/office/drawing/2014/main" id="{A51297D0-1AA8-332A-9759-733B8528C423}"/>
-              </a:ext>
-            </a:extLst>
-          </p:cNvPr>
-          <p:cNvSpPr txBox="1"/>
-          <p:nvPr/>
-        </p:nvSpPr>
-        <p:spPr>
-          <a:xfrm>
-            <a:off x="783272" y="3161030"/>
-            <a:ext cx="10625455" cy="752159"/>
-          </a:xfrm>
-          <a:prstGeom prst="rect">
-            <a:avLst/>
-          </a:prstGeom>
-          <a:noFill/>
-          <a:ln>
-            <a:noFill/>
-          </a:ln>
-        </p:spPr>
-        <p:txBody>
-          <a:bodyPr spcFirstLastPara="1" wrap="square" lIns="91425" tIns="91425" rIns="91425" bIns="91425" anchor="t" anchorCtr="0">
-            <a:noAutofit/>
-          </a:bodyPr>
-          <a:lstStyle/>
-          <a:p>
-            <a:pPr marL="114300" lvl="0">
-              <a:buClr>
-                <a:schemeClr val="dk1"/>
-              </a:buClr>
-              <a:buSzPts val="1800"/>
-            </a:pPr>
-            <a:r>
-              <a:rPr lang="pt-BR" sz="2400" dirty="0">
-                <a:solidFill>
-                  <a:schemeClr val="tx2">
-                    <a:lumMod val="90000"/>
-                  </a:schemeClr>
-                </a:solidFill>
-              </a:rPr>
-              <a:t>Usada para formatar a </a:t>
-            </a:r>
-            <a:r>
-              <a:rPr lang="pt-BR" sz="2400" b="1" dirty="0">
-                <a:solidFill>
-                  <a:srgbClr val="ED145B"/>
-                </a:solidFill>
-              </a:rPr>
-              <a:t>primeira letra</a:t>
-            </a:r>
-            <a:r>
-              <a:rPr lang="pt-BR" sz="2400" dirty="0">
-                <a:solidFill>
-                  <a:schemeClr val="tx2">
-                    <a:lumMod val="90000"/>
-                  </a:schemeClr>
-                </a:solidFill>
-              </a:rPr>
-              <a:t> da primeira linha de um elemento.</a:t>
-            </a:r>
-          </a:p>
-        </p:txBody>
-      </p:sp>
-      <p:graphicFrame>
-        <p:nvGraphicFramePr>
-          <p:cNvPr id="4" name="Google Shape;228;p22">
-            <a:extLst>
-              <a:ext uri="{FF2B5EF4-FFF2-40B4-BE49-F238E27FC236}">
-                <a16:creationId xmlns:a16="http://schemas.microsoft.com/office/drawing/2014/main" id="{FE944FF8-BFC5-3FF2-0889-3568B9497B81}"/>
-              </a:ext>
-            </a:extLst>
-          </p:cNvPr>
-          <p:cNvGraphicFramePr/>
-          <p:nvPr>
-            <p:extLst>
-              <p:ext uri="{D42A27DB-BD31-4B8C-83A1-F6EECF244321}">
-                <p14:modId xmlns:p14="http://schemas.microsoft.com/office/powerpoint/2010/main" val="3883275631"/>
-              </p:ext>
-            </p:extLst>
-          </p:nvPr>
-        </p:nvGraphicFramePr>
-        <p:xfrm>
-          <a:off x="3367725" y="4257675"/>
-          <a:ext cx="5354950" cy="1701800"/>
-        </p:xfrm>
-        <a:graphic>
-          <a:graphicData uri="http://schemas.openxmlformats.org/drawingml/2006/table">
-            <a:tbl>
-              <a:tblPr>
-                <a:noFill/>
-                <a:tableStyleId>{63B152E9-AFB2-458E-BFAF-78D379E83702}</a:tableStyleId>
-              </a:tblPr>
-              <a:tblGrid>
-                <a:gridCol w="5354950">
-                  <a:extLst>
-                    <a:ext uri="{9D8B030D-6E8A-4147-A177-3AD203B41FA5}">
-                      <a16:colId xmlns:a16="http://schemas.microsoft.com/office/drawing/2014/main" val="20000"/>
-                    </a:ext>
-                  </a:extLst>
-                </a:gridCol>
-              </a:tblGrid>
-              <a:tr h="1701800">
-                <a:tc>
-                  <a:txBody>
-                    <a:bodyPr/>
-                    <a:lstStyle/>
-                    <a:p>
-                      <a:pPr marL="0" marR="0" lvl="0" indent="0" algn="l" rtl="0">
-                        <a:lnSpc>
-                          <a:spcPct val="100000"/>
-                        </a:lnSpc>
-                        <a:spcBef>
-                          <a:spcPts val="0"/>
-                        </a:spcBef>
-                        <a:spcAft>
-                          <a:spcPts val="0"/>
-                        </a:spcAft>
-                        <a:buClr>
-                          <a:srgbClr val="000000"/>
-                        </a:buClr>
-                        <a:buSzPts val="1600"/>
-                        <a:buFont typeface="Arial"/>
-                        <a:buNone/>
-                      </a:pPr>
-                      <a:r>
-                        <a:rPr lang="pt-BR" sz="2400" b="0" u="none" strike="noStrike" cap="none" dirty="0">
-                          <a:solidFill>
-                            <a:srgbClr val="FF79C6"/>
-                          </a:solidFill>
-                          <a:latin typeface="Consolas"/>
-                          <a:ea typeface="Consolas"/>
-                          <a:cs typeface="Consolas"/>
-                          <a:sym typeface="Consolas"/>
-                        </a:rPr>
-                        <a:t>p</a:t>
-                      </a:r>
-                      <a:r>
-                        <a:rPr lang="pt-BR" sz="2400" b="0" i="1" u="none" strike="noStrike" cap="none" dirty="0">
-                          <a:solidFill>
-                            <a:srgbClr val="FF79C6"/>
-                          </a:solidFill>
-                          <a:latin typeface="Consolas"/>
-                          <a:ea typeface="Consolas"/>
-                          <a:cs typeface="Consolas"/>
-                          <a:sym typeface="Consolas"/>
-                        </a:rPr>
-                        <a:t>::</a:t>
-                      </a:r>
-                      <a:r>
-                        <a:rPr lang="pt-BR" sz="2400" b="0" i="1" u="none" strike="noStrike" cap="none" dirty="0">
-                          <a:solidFill>
-                            <a:srgbClr val="50FA7B"/>
-                          </a:solidFill>
-                          <a:latin typeface="Consolas"/>
-                          <a:ea typeface="Consolas"/>
-                          <a:cs typeface="Consolas"/>
-                          <a:sym typeface="Consolas"/>
-                        </a:rPr>
-                        <a:t>first-letter</a:t>
-                      </a:r>
-                      <a:r>
-                        <a:rPr lang="pt-BR" sz="2400" b="0" u="none" strike="noStrike" cap="none" dirty="0">
-                          <a:solidFill>
-                            <a:srgbClr val="F8F8F2"/>
-                          </a:solidFill>
-                          <a:latin typeface="Consolas"/>
-                          <a:ea typeface="Consolas"/>
-                          <a:cs typeface="Consolas"/>
-                          <a:sym typeface="Consolas"/>
-                        </a:rPr>
-                        <a:t> {</a:t>
-                      </a:r>
-                      <a:endParaRPr sz="2400" u="none" strike="noStrike" cap="none" dirty="0"/>
-                    </a:p>
-                    <a:p>
-                      <a:pPr marL="0" marR="0" lvl="0" indent="0" algn="l" rtl="0">
-                        <a:lnSpc>
-                          <a:spcPct val="100000"/>
-                        </a:lnSpc>
-                        <a:spcBef>
-                          <a:spcPts val="0"/>
-                        </a:spcBef>
-                        <a:spcAft>
-                          <a:spcPts val="0"/>
-                        </a:spcAft>
-                        <a:buClr>
-                          <a:srgbClr val="000000"/>
-                        </a:buClr>
-                        <a:buSzPts val="1600"/>
-                        <a:buFont typeface="Arial"/>
-                        <a:buNone/>
-                      </a:pPr>
-                      <a:r>
-                        <a:rPr lang="pt-BR" sz="2400" b="0" u="none" strike="noStrike" cap="none" dirty="0">
-                          <a:solidFill>
-                            <a:srgbClr val="F8F8F2"/>
-                          </a:solidFill>
-                          <a:latin typeface="Consolas"/>
-                          <a:ea typeface="Consolas"/>
-                          <a:cs typeface="Consolas"/>
-                          <a:sym typeface="Consolas"/>
-                        </a:rPr>
-                        <a:t>    </a:t>
-                      </a:r>
-                      <a:r>
-                        <a:rPr lang="pt-BR" sz="2400" b="0" u="none" strike="noStrike" cap="none" dirty="0">
-                          <a:solidFill>
-                            <a:srgbClr val="8BE9FD"/>
-                          </a:solidFill>
-                          <a:latin typeface="Consolas"/>
-                          <a:ea typeface="Consolas"/>
-                          <a:cs typeface="Consolas"/>
-                          <a:sym typeface="Consolas"/>
-                        </a:rPr>
-                        <a:t>color</a:t>
-                      </a:r>
-                      <a:r>
-                        <a:rPr lang="pt-BR" sz="2400" b="0" u="none" strike="noStrike" cap="none" dirty="0">
-                          <a:solidFill>
-                            <a:srgbClr val="FF79C6"/>
-                          </a:solidFill>
-                          <a:latin typeface="Consolas"/>
-                          <a:ea typeface="Consolas"/>
-                          <a:cs typeface="Consolas"/>
-                          <a:sym typeface="Consolas"/>
-                        </a:rPr>
-                        <a:t>:</a:t>
-                      </a:r>
-                      <a:r>
-                        <a:rPr lang="pt-BR" sz="2400" b="0" u="none" strike="noStrike" cap="none" dirty="0">
-                          <a:solidFill>
-                            <a:srgbClr val="F8F8F2"/>
-                          </a:solidFill>
-                          <a:latin typeface="Consolas"/>
-                          <a:ea typeface="Consolas"/>
-                          <a:cs typeface="Consolas"/>
-                          <a:sym typeface="Consolas"/>
-                        </a:rPr>
-                        <a:t> </a:t>
-                      </a:r>
-                      <a:r>
-                        <a:rPr lang="pt-BR" sz="2400" b="0" u="none" strike="noStrike" cap="none" dirty="0" err="1">
-                          <a:solidFill>
-                            <a:srgbClr val="BD93F9"/>
-                          </a:solidFill>
-                          <a:latin typeface="Consolas"/>
-                          <a:ea typeface="Consolas"/>
-                          <a:cs typeface="Consolas"/>
-                          <a:sym typeface="Consolas"/>
-                        </a:rPr>
-                        <a:t>red</a:t>
-                      </a:r>
-                      <a:r>
-                        <a:rPr lang="pt-BR" sz="2400" b="0" u="none" strike="noStrike" cap="none" dirty="0">
-                          <a:solidFill>
-                            <a:srgbClr val="F8F8F2"/>
-                          </a:solidFill>
-                          <a:latin typeface="Consolas"/>
-                          <a:ea typeface="Consolas"/>
-                          <a:cs typeface="Consolas"/>
-                          <a:sym typeface="Consolas"/>
-                        </a:rPr>
-                        <a:t>;</a:t>
-                      </a:r>
-                      <a:endParaRPr sz="2400" u="none" strike="noStrike" cap="none" dirty="0"/>
-                    </a:p>
-                    <a:p>
-                      <a:pPr marL="0" marR="0" lvl="0" indent="0" algn="l" rtl="0">
-                        <a:lnSpc>
-                          <a:spcPct val="100000"/>
-                        </a:lnSpc>
-                        <a:spcBef>
-                          <a:spcPts val="0"/>
-                        </a:spcBef>
-                        <a:spcAft>
-                          <a:spcPts val="0"/>
-                        </a:spcAft>
-                        <a:buClr>
-                          <a:srgbClr val="000000"/>
-                        </a:buClr>
-                        <a:buSzPts val="1600"/>
-                        <a:buFont typeface="Arial"/>
-                        <a:buNone/>
-                      </a:pPr>
-                      <a:r>
-                        <a:rPr lang="pt-BR" sz="2400" b="0" u="none" strike="noStrike" cap="none" dirty="0">
-                          <a:solidFill>
-                            <a:srgbClr val="F8F8F2"/>
-                          </a:solidFill>
-                          <a:latin typeface="Consolas"/>
-                          <a:ea typeface="Consolas"/>
-                          <a:cs typeface="Consolas"/>
-                          <a:sym typeface="Consolas"/>
-                        </a:rPr>
-                        <a:t>    </a:t>
-                      </a:r>
-                      <a:r>
-                        <a:rPr lang="pt-BR" sz="2400" b="0" u="none" strike="noStrike" cap="none" dirty="0" err="1">
-                          <a:solidFill>
-                            <a:srgbClr val="8BE9FD"/>
-                          </a:solidFill>
-                          <a:latin typeface="Consolas"/>
-                          <a:ea typeface="Consolas"/>
-                          <a:cs typeface="Consolas"/>
-                          <a:sym typeface="Consolas"/>
-                        </a:rPr>
-                        <a:t>text-transform</a:t>
-                      </a:r>
-                      <a:r>
-                        <a:rPr lang="pt-BR" sz="2400" b="0" u="none" strike="noStrike" cap="none" dirty="0">
-                          <a:solidFill>
-                            <a:srgbClr val="FF79C6"/>
-                          </a:solidFill>
-                          <a:latin typeface="Consolas"/>
-                          <a:ea typeface="Consolas"/>
-                          <a:cs typeface="Consolas"/>
-                          <a:sym typeface="Consolas"/>
-                        </a:rPr>
-                        <a:t>:</a:t>
-                      </a:r>
-                      <a:r>
-                        <a:rPr lang="pt-BR" sz="2400" b="0" u="none" strike="noStrike" cap="none" dirty="0">
-                          <a:solidFill>
-                            <a:srgbClr val="F8F8F2"/>
-                          </a:solidFill>
-                          <a:latin typeface="Consolas"/>
-                          <a:ea typeface="Consolas"/>
-                          <a:cs typeface="Consolas"/>
-                          <a:sym typeface="Consolas"/>
-                        </a:rPr>
-                        <a:t> </a:t>
-                      </a:r>
-                      <a:r>
-                        <a:rPr lang="pt-BR" sz="2400" b="0" u="none" strike="noStrike" cap="none" dirty="0" err="1">
-                          <a:solidFill>
-                            <a:srgbClr val="BD93F9"/>
-                          </a:solidFill>
-                          <a:latin typeface="Consolas"/>
-                          <a:ea typeface="Consolas"/>
-                          <a:cs typeface="Consolas"/>
-                          <a:sym typeface="Consolas"/>
-                        </a:rPr>
-                        <a:t>uppercase</a:t>
-                      </a:r>
-                      <a:r>
-                        <a:rPr lang="pt-BR" sz="2400" b="0" u="none" strike="noStrike" cap="none" dirty="0">
-                          <a:solidFill>
-                            <a:srgbClr val="F8F8F2"/>
-                          </a:solidFill>
-                          <a:latin typeface="Consolas"/>
-                          <a:ea typeface="Consolas"/>
-                          <a:cs typeface="Consolas"/>
-                          <a:sym typeface="Consolas"/>
-                        </a:rPr>
-                        <a:t>;</a:t>
-                      </a:r>
-                      <a:endParaRPr sz="2400" u="none" strike="noStrike" cap="none" dirty="0"/>
-                    </a:p>
-                    <a:p>
-                      <a:pPr marL="0" marR="0" lvl="0" indent="0" algn="l" rtl="0">
-                        <a:lnSpc>
-                          <a:spcPct val="100000"/>
-                        </a:lnSpc>
-                        <a:spcBef>
-                          <a:spcPts val="0"/>
-                        </a:spcBef>
-                        <a:spcAft>
-                          <a:spcPts val="0"/>
-                        </a:spcAft>
-                        <a:buClr>
-                          <a:srgbClr val="000000"/>
-                        </a:buClr>
-                        <a:buSzPts val="1600"/>
-                        <a:buFont typeface="Arial"/>
-                        <a:buNone/>
-                      </a:pPr>
-                      <a:r>
-                        <a:rPr lang="pt-BR" sz="2400" b="0" u="none" strike="noStrike" cap="none" dirty="0">
-                          <a:solidFill>
-                            <a:srgbClr val="F8F8F2"/>
-                          </a:solidFill>
-                          <a:latin typeface="Consolas"/>
-                          <a:ea typeface="Consolas"/>
-                          <a:cs typeface="Consolas"/>
-                          <a:sym typeface="Consolas"/>
-                        </a:rPr>
-                        <a:t>}</a:t>
-                      </a:r>
-                      <a:endParaRPr sz="2400" u="none" strike="noStrike" cap="none" dirty="0"/>
-                    </a:p>
-                  </a:txBody>
-                  <a:tcPr marL="63500" marR="63500" marT="63500" marB="63500">
-                    <a:lnL w="38100" cap="flat" cmpd="sng">
-                      <a:solidFill>
-                        <a:srgbClr val="EAFF6A"/>
-                      </a:solidFill>
-                      <a:prstDash val="solid"/>
-                      <a:round/>
-                      <a:headEnd type="none" w="sm" len="sm"/>
-                      <a:tailEnd type="none" w="sm" len="sm"/>
-                    </a:lnL>
-                    <a:lnR w="38100" cap="flat" cmpd="sng">
-                      <a:solidFill>
-                        <a:srgbClr val="EAFF6A"/>
-                      </a:solidFill>
-                      <a:prstDash val="solid"/>
-                      <a:round/>
-                      <a:headEnd type="none" w="sm" len="sm"/>
-                      <a:tailEnd type="none" w="sm" len="sm"/>
-                    </a:lnR>
-                    <a:lnT w="38100" cap="flat" cmpd="sng">
-                      <a:solidFill>
-                        <a:srgbClr val="EAFF6A"/>
-                      </a:solidFill>
-                      <a:prstDash val="solid"/>
-                      <a:round/>
-                      <a:headEnd type="none" w="sm" len="sm"/>
-                      <a:tailEnd type="none" w="sm" len="sm"/>
-                    </a:lnT>
-                    <a:lnB w="38100" cap="flat" cmpd="sng">
-                      <a:solidFill>
-                        <a:srgbClr val="EAFF6A"/>
-                      </a:solidFill>
-                      <a:prstDash val="solid"/>
-                      <a:round/>
-                      <a:headEnd type="none" w="sm" len="sm"/>
-                      <a:tailEnd type="none" w="sm" len="sm"/>
-                    </a:lnB>
-                    <a:solidFill>
-                      <a:srgbClr val="0C343D"/>
-                    </a:solidFill>
-                  </a:tcPr>
-                </a:tc>
-                <a:extLst>
-                  <a:ext uri="{0D108BD9-81ED-4DB2-BD59-A6C34878D82A}">
-                    <a16:rowId xmlns:a16="http://schemas.microsoft.com/office/drawing/2014/main" val="10000"/>
-                  </a:ext>
-                </a:extLst>
-              </a:tr>
-            </a:tbl>
-          </a:graphicData>
-        </a:graphic>
-      </p:graphicFrame>
     </p:spTree>
-    <p:extLst>
-      <p:ext uri="{BB962C8B-B14F-4D97-AF65-F5344CB8AC3E}">
-        <p14:creationId xmlns:p14="http://schemas.microsoft.com/office/powerpoint/2010/main" val="1270200379"/>
-      </p:ext>
-    </p:extLst>
   </p:cSld>
   <p:clrMapOvr>
     <a:masterClrMapping/>
@@ -22433,953 +20399,7 @@
 </p:sld>
 </file>
 
-<file path=ppt/slides/slide22.xml><?xml version="1.0" encoding="utf-8"?>
-<p:sld xmlns:a="http://schemas.openxmlformats.org/drawingml/2006/main" xmlns:r="http://schemas.openxmlformats.org/officeDocument/2006/relationships" xmlns:p="http://schemas.openxmlformats.org/presentationml/2006/main">
-  <p:cSld>
-    <p:spTree>
-      <p:nvGrpSpPr>
-        <p:cNvPr id="1" name="">
-          <a:extLst>
-            <a:ext uri="{FF2B5EF4-FFF2-40B4-BE49-F238E27FC236}">
-              <a16:creationId xmlns:a16="http://schemas.microsoft.com/office/drawing/2014/main" id="{0E7870B6-8C17-EDC8-1134-40AA5A56F946}"/>
-            </a:ext>
-          </a:extLst>
-        </p:cNvPr>
-        <p:cNvGrpSpPr/>
-        <p:nvPr/>
-      </p:nvGrpSpPr>
-      <p:grpSpPr>
-        <a:xfrm>
-          <a:off x="0" y="0"/>
-          <a:ext cx="0" cy="0"/>
-          <a:chOff x="0" y="0"/>
-          <a:chExt cx="0" cy="0"/>
-        </a:xfrm>
-      </p:grpSpPr>
-      <p:sp>
-        <p:nvSpPr>
-          <p:cNvPr id="8" name="Retângulo 7">
-            <a:extLst>
-              <a:ext uri="{FF2B5EF4-FFF2-40B4-BE49-F238E27FC236}">
-                <a16:creationId xmlns:a16="http://schemas.microsoft.com/office/drawing/2014/main" id="{4E0EC769-364B-2D5C-BD79-5A2DD7CAD1D8}"/>
-              </a:ext>
-            </a:extLst>
-          </p:cNvPr>
-          <p:cNvSpPr/>
-          <p:nvPr/>
-        </p:nvSpPr>
-        <p:spPr>
-          <a:xfrm>
-            <a:off x="0" y="0"/>
-            <a:ext cx="12192000" cy="6858000"/>
-          </a:xfrm>
-          <a:prstGeom prst="rect">
-            <a:avLst/>
-          </a:prstGeom>
-          <a:solidFill>
-            <a:schemeClr val="tx1">
-              <a:lumMod val="85000"/>
-              <a:lumOff val="15000"/>
-            </a:schemeClr>
-          </a:solidFill>
-        </p:spPr>
-        <p:style>
-          <a:lnRef idx="2">
-            <a:schemeClr val="dk1">
-              <a:shade val="15000"/>
-            </a:schemeClr>
-          </a:lnRef>
-          <a:fillRef idx="1">
-            <a:schemeClr val="dk1"/>
-          </a:fillRef>
-          <a:effectRef idx="0">
-            <a:schemeClr val="dk1"/>
-          </a:effectRef>
-          <a:fontRef idx="minor">
-            <a:schemeClr val="lt1"/>
-          </a:fontRef>
-        </p:style>
-        <p:txBody>
-          <a:bodyPr rtlCol="0" anchor="ctr"/>
-          <a:lstStyle/>
-          <a:p>
-            <a:pPr algn="ctr"/>
-            <a:endParaRPr lang="pt-BR" dirty="0"/>
-          </a:p>
-        </p:txBody>
-      </p:sp>
-      <p:sp>
-        <p:nvSpPr>
-          <p:cNvPr id="3" name="Espaço Reservado para Número de Slide 2">
-            <a:extLst>
-              <a:ext uri="{FF2B5EF4-FFF2-40B4-BE49-F238E27FC236}">
-                <a16:creationId xmlns:a16="http://schemas.microsoft.com/office/drawing/2014/main" id="{D3CFF7B8-25CD-2AD6-F07E-73F7744C3874}"/>
-              </a:ext>
-            </a:extLst>
-          </p:cNvPr>
-          <p:cNvSpPr>
-            <a:spLocks noGrp="1"/>
-          </p:cNvSpPr>
-          <p:nvPr>
-            <p:ph type="sldNum" idx="4294967295"/>
-          </p:nvPr>
-        </p:nvSpPr>
-        <p:spPr>
-          <a:xfrm>
-            <a:off x="11353800" y="5594350"/>
-            <a:ext cx="838200" cy="365125"/>
-          </a:xfrm>
-        </p:spPr>
-        <p:txBody>
-          <a:bodyPr/>
-          <a:lstStyle/>
-          <a:p>
-            <a:pPr lvl="0"/>
-            <a:fld id="{00000000-1234-1234-1234-123412341234}" type="slidenum">
-              <a:rPr lang="pt-BR" smtClean="0"/>
-              <a:pPr lvl="0"/>
-              <a:t>22</a:t>
-            </a:fld>
-            <a:endParaRPr lang="pt-BR"/>
-          </a:p>
-        </p:txBody>
-      </p:sp>
-      <p:pic>
-        <p:nvPicPr>
-          <p:cNvPr id="7" name="Imagem 6">
-            <a:extLst>
-              <a:ext uri="{FF2B5EF4-FFF2-40B4-BE49-F238E27FC236}">
-                <a16:creationId xmlns:a16="http://schemas.microsoft.com/office/drawing/2014/main" id="{BD3E4572-F233-8BD7-3D92-BCED64B565A5}"/>
-              </a:ext>
-            </a:extLst>
-          </p:cNvPr>
-          <p:cNvPicPr>
-            <a:picLocks noChangeAspect="1"/>
-          </p:cNvPicPr>
-          <p:nvPr/>
-        </p:nvPicPr>
-        <p:blipFill>
-          <a:blip r:embed="rId2"/>
-          <a:stretch>
-            <a:fillRect/>
-          </a:stretch>
-        </p:blipFill>
-        <p:spPr>
-          <a:xfrm>
-            <a:off x="-215900" y="-71438"/>
-            <a:ext cx="12522201" cy="7043738"/>
-          </a:xfrm>
-          <a:prstGeom prst="rect">
-            <a:avLst/>
-          </a:prstGeom>
-        </p:spPr>
-      </p:pic>
-      <p:cxnSp>
-        <p:nvCxnSpPr>
-          <p:cNvPr id="18" name="Conector reto 17">
-            <a:extLst>
-              <a:ext uri="{FF2B5EF4-FFF2-40B4-BE49-F238E27FC236}">
-                <a16:creationId xmlns:a16="http://schemas.microsoft.com/office/drawing/2014/main" id="{65BEB752-1312-D4FE-6CB8-A68F8FD75790}"/>
-              </a:ext>
-            </a:extLst>
-          </p:cNvPr>
-          <p:cNvCxnSpPr>
-            <a:cxnSpLocks/>
-          </p:cNvCxnSpPr>
-          <p:nvPr/>
-        </p:nvCxnSpPr>
-        <p:spPr>
-          <a:xfrm>
-            <a:off x="856932" y="743587"/>
-            <a:ext cx="0" cy="828040"/>
-          </a:xfrm>
-          <a:prstGeom prst="line">
-            <a:avLst/>
-          </a:prstGeom>
-          <a:ln>
-            <a:solidFill>
-              <a:srgbClr val="ED145B"/>
-            </a:solidFill>
-          </a:ln>
-        </p:spPr>
-        <p:style>
-          <a:lnRef idx="3">
-            <a:schemeClr val="dk1"/>
-          </a:lnRef>
-          <a:fillRef idx="0">
-            <a:schemeClr val="dk1"/>
-          </a:fillRef>
-          <a:effectRef idx="2">
-            <a:schemeClr val="dk1"/>
-          </a:effectRef>
-          <a:fontRef idx="minor">
-            <a:schemeClr val="tx1"/>
-          </a:fontRef>
-        </p:style>
-      </p:cxnSp>
-      <p:sp>
-        <p:nvSpPr>
-          <p:cNvPr id="22" name="Google Shape;85;p6">
-            <a:extLst>
-              <a:ext uri="{FF2B5EF4-FFF2-40B4-BE49-F238E27FC236}">
-                <a16:creationId xmlns:a16="http://schemas.microsoft.com/office/drawing/2014/main" id="{0F3A88EA-E1D2-7013-CE00-A6E53CEF8CE7}"/>
-              </a:ext>
-            </a:extLst>
-          </p:cNvPr>
-          <p:cNvSpPr txBox="1">
-            <a:spLocks/>
-          </p:cNvSpPr>
-          <p:nvPr/>
-        </p:nvSpPr>
-        <p:spPr>
-          <a:xfrm>
-            <a:off x="945515" y="664529"/>
-            <a:ext cx="10300970" cy="986155"/>
-          </a:xfrm>
-          <a:prstGeom prst="rect">
-            <a:avLst/>
-          </a:prstGeom>
-          <a:noFill/>
-          <a:ln>
-            <a:noFill/>
-          </a:ln>
-        </p:spPr>
-        <p:txBody>
-          <a:bodyPr spcFirstLastPara="1" wrap="square" lIns="91425" tIns="45700" rIns="91425" bIns="45700" anchor="ctr" anchorCtr="0">
-            <a:noAutofit/>
-          </a:bodyPr>
-          <a:lstStyle>
-            <a:defPPr marR="0" lvl="0" algn="l" rtl="0">
-              <a:lnSpc>
-                <a:spcPct val="100000"/>
-              </a:lnSpc>
-              <a:spcBef>
-                <a:spcPts val="0"/>
-              </a:spcBef>
-              <a:spcAft>
-                <a:spcPts val="0"/>
-              </a:spcAft>
-            </a:defPPr>
-            <a:lvl1pPr marR="0" lvl="0" algn="l" rtl="0">
-              <a:lnSpc>
-                <a:spcPct val="100000"/>
-              </a:lnSpc>
-              <a:spcBef>
-                <a:spcPts val="0"/>
-              </a:spcBef>
-              <a:spcAft>
-                <a:spcPts val="0"/>
-              </a:spcAft>
-              <a:buClr>
-                <a:srgbClr val="000000"/>
-              </a:buClr>
-              <a:buFont typeface="Arial"/>
-              <a:defRPr sz="1400" b="0" i="0" u="none" strike="noStrike" cap="none">
-                <a:solidFill>
-                  <a:srgbClr val="000000"/>
-                </a:solidFill>
-                <a:latin typeface="Arial"/>
-                <a:ea typeface="Arial"/>
-                <a:cs typeface="Arial"/>
-                <a:sym typeface="Arial"/>
-              </a:defRPr>
-            </a:lvl1pPr>
-            <a:lvl2pPr marR="0" lvl="1" algn="l" rtl="0">
-              <a:lnSpc>
-                <a:spcPct val="100000"/>
-              </a:lnSpc>
-              <a:spcBef>
-                <a:spcPts val="0"/>
-              </a:spcBef>
-              <a:spcAft>
-                <a:spcPts val="0"/>
-              </a:spcAft>
-              <a:buClr>
-                <a:srgbClr val="000000"/>
-              </a:buClr>
-              <a:buFont typeface="Arial"/>
-              <a:defRPr sz="1400" b="0" i="0" u="none" strike="noStrike" cap="none">
-                <a:solidFill>
-                  <a:srgbClr val="000000"/>
-                </a:solidFill>
-                <a:latin typeface="Arial"/>
-                <a:ea typeface="Arial"/>
-                <a:cs typeface="Arial"/>
-                <a:sym typeface="Arial"/>
-              </a:defRPr>
-            </a:lvl2pPr>
-            <a:lvl3pPr marR="0" lvl="2" algn="l" rtl="0">
-              <a:lnSpc>
-                <a:spcPct val="100000"/>
-              </a:lnSpc>
-              <a:spcBef>
-                <a:spcPts val="0"/>
-              </a:spcBef>
-              <a:spcAft>
-                <a:spcPts val="0"/>
-              </a:spcAft>
-              <a:buClr>
-                <a:srgbClr val="000000"/>
-              </a:buClr>
-              <a:buFont typeface="Arial"/>
-              <a:defRPr sz="1400" b="0" i="0" u="none" strike="noStrike" cap="none">
-                <a:solidFill>
-                  <a:srgbClr val="000000"/>
-                </a:solidFill>
-                <a:latin typeface="Arial"/>
-                <a:ea typeface="Arial"/>
-                <a:cs typeface="Arial"/>
-                <a:sym typeface="Arial"/>
-              </a:defRPr>
-            </a:lvl3pPr>
-            <a:lvl4pPr marR="0" lvl="3" algn="l" rtl="0">
-              <a:lnSpc>
-                <a:spcPct val="100000"/>
-              </a:lnSpc>
-              <a:spcBef>
-                <a:spcPts val="0"/>
-              </a:spcBef>
-              <a:spcAft>
-                <a:spcPts val="0"/>
-              </a:spcAft>
-              <a:buClr>
-                <a:srgbClr val="000000"/>
-              </a:buClr>
-              <a:buFont typeface="Arial"/>
-              <a:defRPr sz="1400" b="0" i="0" u="none" strike="noStrike" cap="none">
-                <a:solidFill>
-                  <a:srgbClr val="000000"/>
-                </a:solidFill>
-                <a:latin typeface="Arial"/>
-                <a:ea typeface="Arial"/>
-                <a:cs typeface="Arial"/>
-                <a:sym typeface="Arial"/>
-              </a:defRPr>
-            </a:lvl4pPr>
-            <a:lvl5pPr marR="0" lvl="4" algn="l" rtl="0">
-              <a:lnSpc>
-                <a:spcPct val="100000"/>
-              </a:lnSpc>
-              <a:spcBef>
-                <a:spcPts val="0"/>
-              </a:spcBef>
-              <a:spcAft>
-                <a:spcPts val="0"/>
-              </a:spcAft>
-              <a:buClr>
-                <a:srgbClr val="000000"/>
-              </a:buClr>
-              <a:buFont typeface="Arial"/>
-              <a:defRPr sz="1400" b="0" i="0" u="none" strike="noStrike" cap="none">
-                <a:solidFill>
-                  <a:srgbClr val="000000"/>
-                </a:solidFill>
-                <a:latin typeface="Arial"/>
-                <a:ea typeface="Arial"/>
-                <a:cs typeface="Arial"/>
-                <a:sym typeface="Arial"/>
-              </a:defRPr>
-            </a:lvl5pPr>
-            <a:lvl6pPr marR="0" lvl="5" algn="l" rtl="0">
-              <a:lnSpc>
-                <a:spcPct val="100000"/>
-              </a:lnSpc>
-              <a:spcBef>
-                <a:spcPts val="0"/>
-              </a:spcBef>
-              <a:spcAft>
-                <a:spcPts val="0"/>
-              </a:spcAft>
-              <a:buClr>
-                <a:srgbClr val="000000"/>
-              </a:buClr>
-              <a:buFont typeface="Arial"/>
-              <a:defRPr sz="1400" b="0" i="0" u="none" strike="noStrike" cap="none">
-                <a:solidFill>
-                  <a:srgbClr val="000000"/>
-                </a:solidFill>
-                <a:latin typeface="Arial"/>
-                <a:ea typeface="Arial"/>
-                <a:cs typeface="Arial"/>
-                <a:sym typeface="Arial"/>
-              </a:defRPr>
-            </a:lvl6pPr>
-            <a:lvl7pPr marR="0" lvl="6" algn="l" rtl="0">
-              <a:lnSpc>
-                <a:spcPct val="100000"/>
-              </a:lnSpc>
-              <a:spcBef>
-                <a:spcPts val="0"/>
-              </a:spcBef>
-              <a:spcAft>
-                <a:spcPts val="0"/>
-              </a:spcAft>
-              <a:buClr>
-                <a:srgbClr val="000000"/>
-              </a:buClr>
-              <a:buFont typeface="Arial"/>
-              <a:defRPr sz="1400" b="0" i="0" u="none" strike="noStrike" cap="none">
-                <a:solidFill>
-                  <a:srgbClr val="000000"/>
-                </a:solidFill>
-                <a:latin typeface="Arial"/>
-                <a:ea typeface="Arial"/>
-                <a:cs typeface="Arial"/>
-                <a:sym typeface="Arial"/>
-              </a:defRPr>
-            </a:lvl7pPr>
-            <a:lvl8pPr marR="0" lvl="7" algn="l" rtl="0">
-              <a:lnSpc>
-                <a:spcPct val="100000"/>
-              </a:lnSpc>
-              <a:spcBef>
-                <a:spcPts val="0"/>
-              </a:spcBef>
-              <a:spcAft>
-                <a:spcPts val="0"/>
-              </a:spcAft>
-              <a:buClr>
-                <a:srgbClr val="000000"/>
-              </a:buClr>
-              <a:buFont typeface="Arial"/>
-              <a:defRPr sz="1400" b="0" i="0" u="none" strike="noStrike" cap="none">
-                <a:solidFill>
-                  <a:srgbClr val="000000"/>
-                </a:solidFill>
-                <a:latin typeface="Arial"/>
-                <a:ea typeface="Arial"/>
-                <a:cs typeface="Arial"/>
-                <a:sym typeface="Arial"/>
-              </a:defRPr>
-            </a:lvl8pPr>
-            <a:lvl9pPr marR="0" lvl="8" algn="l" rtl="0">
-              <a:lnSpc>
-                <a:spcPct val="100000"/>
-              </a:lnSpc>
-              <a:spcBef>
-                <a:spcPts val="0"/>
-              </a:spcBef>
-              <a:spcAft>
-                <a:spcPts val="0"/>
-              </a:spcAft>
-              <a:buClr>
-                <a:srgbClr val="000000"/>
-              </a:buClr>
-              <a:buFont typeface="Arial"/>
-              <a:defRPr sz="1400" b="0" i="0" u="none" strike="noStrike" cap="none">
-                <a:solidFill>
-                  <a:srgbClr val="000000"/>
-                </a:solidFill>
-                <a:latin typeface="Arial"/>
-                <a:ea typeface="Arial"/>
-                <a:cs typeface="Arial"/>
-                <a:sym typeface="Arial"/>
-              </a:defRPr>
-            </a:lvl9pPr>
-          </a:lstStyle>
-          <a:p>
-            <a:pPr>
-              <a:lnSpc>
-                <a:spcPct val="120000"/>
-              </a:lnSpc>
-              <a:buClr>
-                <a:srgbClr val="595959"/>
-              </a:buClr>
-              <a:buSzPct val="222222"/>
-            </a:pPr>
-            <a:r>
-              <a:rPr lang="pt-BR" sz="4300" dirty="0" err="1">
-                <a:solidFill>
-                  <a:schemeClr val="bg1"/>
-                </a:solidFill>
-              </a:rPr>
-              <a:t>Pseudo-elemento</a:t>
-            </a:r>
-            <a:br>
-              <a:rPr lang="pt-BR" sz="4300" dirty="0">
-                <a:solidFill>
-                  <a:schemeClr val="tx2">
-                    <a:lumMod val="90000"/>
-                  </a:schemeClr>
-                </a:solidFill>
-              </a:rPr>
-            </a:br>
-            <a:r>
-              <a:rPr lang="pt-BR" sz="2000" dirty="0">
-                <a:solidFill>
-                  <a:schemeClr val="tx2">
-                    <a:lumMod val="90000"/>
-                  </a:schemeClr>
-                </a:solidFill>
-              </a:rPr>
-              <a:t>Servem para selecionar uma parte específica de um elemento.</a:t>
-            </a:r>
-          </a:p>
-        </p:txBody>
-      </p:sp>
-      <p:sp>
-        <p:nvSpPr>
-          <p:cNvPr id="23" name="Google Shape;87;p6">
-            <a:extLst>
-              <a:ext uri="{FF2B5EF4-FFF2-40B4-BE49-F238E27FC236}">
-                <a16:creationId xmlns:a16="http://schemas.microsoft.com/office/drawing/2014/main" id="{EEB16FE7-B351-59EE-F730-7FE109023723}"/>
-              </a:ext>
-            </a:extLst>
-          </p:cNvPr>
-          <p:cNvSpPr txBox="1"/>
-          <p:nvPr/>
-        </p:nvSpPr>
-        <p:spPr>
-          <a:xfrm>
-            <a:off x="856932" y="1831157"/>
-            <a:ext cx="6652200" cy="1597843"/>
-          </a:xfrm>
-          <a:prstGeom prst="rect">
-            <a:avLst/>
-          </a:prstGeom>
-          <a:noFill/>
-          <a:ln>
-            <a:noFill/>
-          </a:ln>
-        </p:spPr>
-        <p:txBody>
-          <a:bodyPr spcFirstLastPara="1" wrap="square" lIns="91425" tIns="91425" rIns="91425" bIns="91425" anchor="t" anchorCtr="0">
-            <a:spAutoFit/>
-          </a:bodyPr>
-          <a:lstStyle/>
-          <a:p>
-            <a:pPr marL="0" marR="0" lvl="0" indent="0" rtl="0">
-              <a:lnSpc>
-                <a:spcPct val="150000"/>
-              </a:lnSpc>
-              <a:spcBef>
-                <a:spcPts val="2000"/>
-              </a:spcBef>
-              <a:spcAft>
-                <a:spcPts val="1100"/>
-              </a:spcAft>
-              <a:buClr>
-                <a:schemeClr val="dk1"/>
-              </a:buClr>
-              <a:buSzPts val="3600"/>
-              <a:buFont typeface="Arial"/>
-              <a:buNone/>
-            </a:pPr>
-            <a:r>
-              <a:rPr lang="pt-BR" sz="4400" b="1" i="0" u="none" strike="noStrike" cap="none" dirty="0">
-                <a:solidFill>
-                  <a:schemeClr val="tx2">
-                    <a:lumMod val="90000"/>
-                  </a:schemeClr>
-                </a:solidFill>
-                <a:latin typeface="Arial"/>
-                <a:ea typeface="Arial"/>
-                <a:cs typeface="Arial"/>
-                <a:sym typeface="Arial"/>
-              </a:rPr>
-              <a:t>::</a:t>
-            </a:r>
-            <a:r>
-              <a:rPr lang="pt-BR" sz="4400" b="1" i="0" u="none" strike="noStrike" cap="none" dirty="0" err="1">
-                <a:solidFill>
-                  <a:schemeClr val="tx2">
-                    <a:lumMod val="90000"/>
-                  </a:schemeClr>
-                </a:solidFill>
-                <a:latin typeface="Arial"/>
-                <a:ea typeface="Arial"/>
-                <a:cs typeface="Arial"/>
-                <a:sym typeface="Arial"/>
-              </a:rPr>
-              <a:t>first-line</a:t>
-            </a:r>
-            <a:endParaRPr sz="4400" b="1" i="0" u="none" strike="noStrike" cap="none" dirty="0">
-              <a:solidFill>
-                <a:schemeClr val="tx2">
-                  <a:lumMod val="90000"/>
-                </a:schemeClr>
-              </a:solidFill>
-              <a:highlight>
-                <a:schemeClr val="accent6"/>
-              </a:highlight>
-              <a:latin typeface="Arial"/>
-              <a:ea typeface="Arial"/>
-              <a:cs typeface="Arial"/>
-              <a:sym typeface="Arial"/>
-            </a:endParaRPr>
-          </a:p>
-        </p:txBody>
-      </p:sp>
-      <p:sp>
-        <p:nvSpPr>
-          <p:cNvPr id="2" name="Google Shape;149;p13">
-            <a:extLst>
-              <a:ext uri="{FF2B5EF4-FFF2-40B4-BE49-F238E27FC236}">
-                <a16:creationId xmlns:a16="http://schemas.microsoft.com/office/drawing/2014/main" id="{8BF09E09-E7A2-6C3A-9B44-D3DDB67F380C}"/>
-              </a:ext>
-            </a:extLst>
-          </p:cNvPr>
-          <p:cNvSpPr txBox="1"/>
-          <p:nvPr/>
-        </p:nvSpPr>
-        <p:spPr>
-          <a:xfrm>
-            <a:off x="783272" y="3161030"/>
-            <a:ext cx="10625455" cy="752159"/>
-          </a:xfrm>
-          <a:prstGeom prst="rect">
-            <a:avLst/>
-          </a:prstGeom>
-          <a:noFill/>
-          <a:ln>
-            <a:noFill/>
-          </a:ln>
-        </p:spPr>
-        <p:txBody>
-          <a:bodyPr spcFirstLastPara="1" wrap="square" lIns="91425" tIns="91425" rIns="91425" bIns="91425" anchor="t" anchorCtr="0">
-            <a:noAutofit/>
-          </a:bodyPr>
-          <a:lstStyle/>
-          <a:p>
-            <a:pPr marL="114300" lvl="0">
-              <a:buClr>
-                <a:schemeClr val="dk1"/>
-              </a:buClr>
-              <a:buSzPts val="1800"/>
-            </a:pPr>
-            <a:r>
-              <a:rPr lang="pt-BR" sz="2400" dirty="0">
-                <a:solidFill>
-                  <a:schemeClr val="tx2">
-                    <a:lumMod val="90000"/>
-                  </a:schemeClr>
-                </a:solidFill>
-              </a:rPr>
-              <a:t>Usada para formatar a </a:t>
-            </a:r>
-            <a:r>
-              <a:rPr lang="pt-BR" sz="2400" b="1" dirty="0">
-                <a:solidFill>
-                  <a:srgbClr val="ED145B"/>
-                </a:solidFill>
-              </a:rPr>
-              <a:t>primeira linha</a:t>
-            </a:r>
-            <a:r>
-              <a:rPr lang="pt-BR" sz="2400" dirty="0">
-                <a:solidFill>
-                  <a:schemeClr val="tx2">
-                    <a:lumMod val="90000"/>
-                  </a:schemeClr>
-                </a:solidFill>
-              </a:rPr>
-              <a:t> de um elemento.</a:t>
-            </a:r>
-          </a:p>
-        </p:txBody>
-      </p:sp>
-      <p:graphicFrame>
-        <p:nvGraphicFramePr>
-          <p:cNvPr id="5" name="Google Shape;237;p23">
-            <a:extLst>
-              <a:ext uri="{FF2B5EF4-FFF2-40B4-BE49-F238E27FC236}">
-                <a16:creationId xmlns:a16="http://schemas.microsoft.com/office/drawing/2014/main" id="{115C664C-94FD-8ADE-25D2-840C200A874B}"/>
-              </a:ext>
-            </a:extLst>
-          </p:cNvPr>
-          <p:cNvGraphicFramePr/>
-          <p:nvPr>
-            <p:extLst>
-              <p:ext uri="{D42A27DB-BD31-4B8C-83A1-F6EECF244321}">
-                <p14:modId xmlns:p14="http://schemas.microsoft.com/office/powerpoint/2010/main" val="2206565184"/>
-              </p:ext>
-            </p:extLst>
-          </p:nvPr>
-        </p:nvGraphicFramePr>
-        <p:xfrm>
-          <a:off x="4183032" y="4289265"/>
-          <a:ext cx="3681300" cy="1224280"/>
-        </p:xfrm>
-        <a:graphic>
-          <a:graphicData uri="http://schemas.openxmlformats.org/drawingml/2006/table">
-            <a:tbl>
-              <a:tblPr>
-                <a:noFill/>
-                <a:tableStyleId>{63B152E9-AFB2-458E-BFAF-78D379E83702}</a:tableStyleId>
-              </a:tblPr>
-              <a:tblGrid>
-                <a:gridCol w="3681300">
-                  <a:extLst>
-                    <a:ext uri="{9D8B030D-6E8A-4147-A177-3AD203B41FA5}">
-                      <a16:colId xmlns:a16="http://schemas.microsoft.com/office/drawing/2014/main" val="20000"/>
-                    </a:ext>
-                  </a:extLst>
-                </a:gridCol>
-              </a:tblGrid>
-              <a:tr h="851325">
-                <a:tc>
-                  <a:txBody>
-                    <a:bodyPr/>
-                    <a:lstStyle/>
-                    <a:p>
-                      <a:pPr marL="0" marR="0" lvl="0" indent="0" algn="l" rtl="0">
-                        <a:lnSpc>
-                          <a:spcPct val="100000"/>
-                        </a:lnSpc>
-                        <a:spcBef>
-                          <a:spcPts val="0"/>
-                        </a:spcBef>
-                        <a:spcAft>
-                          <a:spcPts val="0"/>
-                        </a:spcAft>
-                        <a:buClr>
-                          <a:srgbClr val="000000"/>
-                        </a:buClr>
-                        <a:buSzPts val="1600"/>
-                        <a:buFont typeface="Arial"/>
-                        <a:buNone/>
-                      </a:pPr>
-                      <a:r>
-                        <a:rPr lang="pt-BR" sz="2400" b="0" u="none" strike="noStrike" cap="none" dirty="0">
-                          <a:solidFill>
-                            <a:srgbClr val="FF79C6"/>
-                          </a:solidFill>
-                          <a:latin typeface="Consolas"/>
-                          <a:ea typeface="Consolas"/>
-                          <a:cs typeface="Consolas"/>
-                          <a:sym typeface="Consolas"/>
-                        </a:rPr>
-                        <a:t>p</a:t>
-                      </a:r>
-                      <a:r>
-                        <a:rPr lang="pt-BR" sz="2400" b="0" i="1" u="none" strike="noStrike" cap="none" dirty="0">
-                          <a:solidFill>
-                            <a:srgbClr val="FF79C6"/>
-                          </a:solidFill>
-                          <a:latin typeface="Consolas"/>
-                          <a:ea typeface="Consolas"/>
-                          <a:cs typeface="Consolas"/>
-                          <a:sym typeface="Consolas"/>
-                        </a:rPr>
-                        <a:t>::</a:t>
-                      </a:r>
-                      <a:r>
-                        <a:rPr lang="pt-BR" sz="2400" b="0" i="1" u="none" strike="noStrike" cap="none" dirty="0">
-                          <a:solidFill>
-                            <a:srgbClr val="50FA7B"/>
-                          </a:solidFill>
-                          <a:latin typeface="Consolas"/>
-                          <a:ea typeface="Consolas"/>
-                          <a:cs typeface="Consolas"/>
-                          <a:sym typeface="Consolas"/>
-                        </a:rPr>
-                        <a:t>first-line</a:t>
-                      </a:r>
-                      <a:r>
-                        <a:rPr lang="pt-BR" sz="2400" b="0" u="none" strike="noStrike" cap="none" dirty="0">
-                          <a:solidFill>
-                            <a:srgbClr val="F8F8F2"/>
-                          </a:solidFill>
-                          <a:latin typeface="Consolas"/>
-                          <a:ea typeface="Consolas"/>
-                          <a:cs typeface="Consolas"/>
-                          <a:sym typeface="Consolas"/>
-                        </a:rPr>
-                        <a:t> {</a:t>
-                      </a:r>
-                      <a:endParaRPr sz="2400" u="none" strike="noStrike" cap="none" dirty="0"/>
-                    </a:p>
-                    <a:p>
-                      <a:pPr marL="0" marR="0" lvl="0" indent="0" algn="l" rtl="0">
-                        <a:lnSpc>
-                          <a:spcPct val="100000"/>
-                        </a:lnSpc>
-                        <a:spcBef>
-                          <a:spcPts val="0"/>
-                        </a:spcBef>
-                        <a:spcAft>
-                          <a:spcPts val="0"/>
-                        </a:spcAft>
-                        <a:buClr>
-                          <a:srgbClr val="000000"/>
-                        </a:buClr>
-                        <a:buSzPts val="1600"/>
-                        <a:buFont typeface="Arial"/>
-                        <a:buNone/>
-                      </a:pPr>
-                      <a:r>
-                        <a:rPr lang="pt-BR" sz="2400" b="0" u="none" strike="noStrike" cap="none" dirty="0">
-                          <a:solidFill>
-                            <a:srgbClr val="F8F8F2"/>
-                          </a:solidFill>
-                          <a:latin typeface="Consolas"/>
-                          <a:ea typeface="Consolas"/>
-                          <a:cs typeface="Consolas"/>
-                          <a:sym typeface="Consolas"/>
-                        </a:rPr>
-                        <a:t>    </a:t>
-                      </a:r>
-                      <a:r>
-                        <a:rPr lang="pt-BR" sz="2400" b="0" u="none" strike="noStrike" cap="none" dirty="0">
-                          <a:solidFill>
-                            <a:srgbClr val="8BE9FD"/>
-                          </a:solidFill>
-                          <a:latin typeface="Consolas"/>
-                          <a:ea typeface="Consolas"/>
-                          <a:cs typeface="Consolas"/>
-                          <a:sym typeface="Consolas"/>
-                        </a:rPr>
-                        <a:t>color</a:t>
-                      </a:r>
-                      <a:r>
-                        <a:rPr lang="pt-BR" sz="2400" b="0" u="none" strike="noStrike" cap="none" dirty="0">
-                          <a:solidFill>
-                            <a:srgbClr val="FF79C6"/>
-                          </a:solidFill>
-                          <a:latin typeface="Consolas"/>
-                          <a:ea typeface="Consolas"/>
-                          <a:cs typeface="Consolas"/>
-                          <a:sym typeface="Consolas"/>
-                        </a:rPr>
-                        <a:t>:</a:t>
-                      </a:r>
-                      <a:r>
-                        <a:rPr lang="pt-BR" sz="2400" b="0" u="none" strike="noStrike" cap="none" dirty="0">
-                          <a:solidFill>
-                            <a:srgbClr val="F8F8F2"/>
-                          </a:solidFill>
-                          <a:latin typeface="Consolas"/>
-                          <a:ea typeface="Consolas"/>
-                          <a:cs typeface="Consolas"/>
-                          <a:sym typeface="Consolas"/>
-                        </a:rPr>
-                        <a:t> </a:t>
-                      </a:r>
-                      <a:r>
-                        <a:rPr lang="pt-BR" sz="2400" b="0" u="none" strike="noStrike" cap="none" dirty="0">
-                          <a:solidFill>
-                            <a:srgbClr val="BD93F9"/>
-                          </a:solidFill>
-                          <a:latin typeface="Consolas"/>
-                          <a:ea typeface="Consolas"/>
-                          <a:cs typeface="Consolas"/>
-                          <a:sym typeface="Consolas"/>
-                        </a:rPr>
-                        <a:t>blue</a:t>
-                      </a:r>
-                      <a:r>
-                        <a:rPr lang="pt-BR" sz="2400" b="0" u="none" strike="noStrike" cap="none" dirty="0">
-                          <a:solidFill>
-                            <a:srgbClr val="F8F8F2"/>
-                          </a:solidFill>
-                          <a:latin typeface="Consolas"/>
-                          <a:ea typeface="Consolas"/>
-                          <a:cs typeface="Consolas"/>
-                          <a:sym typeface="Consolas"/>
-                        </a:rPr>
-                        <a:t>;</a:t>
-                      </a:r>
-                      <a:endParaRPr sz="2400" u="none" strike="noStrike" cap="none" dirty="0"/>
-                    </a:p>
-                    <a:p>
-                      <a:pPr marL="0" marR="0" lvl="0" indent="0" algn="l" rtl="0">
-                        <a:lnSpc>
-                          <a:spcPct val="100000"/>
-                        </a:lnSpc>
-                        <a:spcBef>
-                          <a:spcPts val="0"/>
-                        </a:spcBef>
-                        <a:spcAft>
-                          <a:spcPts val="0"/>
-                        </a:spcAft>
-                        <a:buClr>
-                          <a:srgbClr val="000000"/>
-                        </a:buClr>
-                        <a:buSzPts val="1600"/>
-                        <a:buFont typeface="Arial"/>
-                        <a:buNone/>
-                      </a:pPr>
-                      <a:r>
-                        <a:rPr lang="pt-BR" sz="2400" b="0" u="none" strike="noStrike" cap="none" dirty="0">
-                          <a:solidFill>
-                            <a:srgbClr val="F8F8F2"/>
-                          </a:solidFill>
-                          <a:latin typeface="Consolas"/>
-                          <a:ea typeface="Consolas"/>
-                          <a:cs typeface="Consolas"/>
-                          <a:sym typeface="Consolas"/>
-                        </a:rPr>
-                        <a:t>}</a:t>
-                      </a:r>
-                      <a:endParaRPr sz="2400" u="none" strike="noStrike" cap="none" dirty="0"/>
-                    </a:p>
-                  </a:txBody>
-                  <a:tcPr marL="63500" marR="63500" marT="63500" marB="63500">
-                    <a:lnL w="38100" cap="flat" cmpd="sng">
-                      <a:solidFill>
-                        <a:srgbClr val="EAFF6A"/>
-                      </a:solidFill>
-                      <a:prstDash val="solid"/>
-                      <a:round/>
-                      <a:headEnd type="none" w="sm" len="sm"/>
-                      <a:tailEnd type="none" w="sm" len="sm"/>
-                    </a:lnL>
-                    <a:lnR w="38100" cap="flat" cmpd="sng">
-                      <a:solidFill>
-                        <a:srgbClr val="EAFF6A"/>
-                      </a:solidFill>
-                      <a:prstDash val="solid"/>
-                      <a:round/>
-                      <a:headEnd type="none" w="sm" len="sm"/>
-                      <a:tailEnd type="none" w="sm" len="sm"/>
-                    </a:lnR>
-                    <a:lnT w="38100" cap="flat" cmpd="sng">
-                      <a:solidFill>
-                        <a:srgbClr val="EAFF6A"/>
-                      </a:solidFill>
-                      <a:prstDash val="solid"/>
-                      <a:round/>
-                      <a:headEnd type="none" w="sm" len="sm"/>
-                      <a:tailEnd type="none" w="sm" len="sm"/>
-                    </a:lnT>
-                    <a:lnB w="38100" cap="flat" cmpd="sng">
-                      <a:solidFill>
-                        <a:srgbClr val="EAFF6A"/>
-                      </a:solidFill>
-                      <a:prstDash val="solid"/>
-                      <a:round/>
-                      <a:headEnd type="none" w="sm" len="sm"/>
-                      <a:tailEnd type="none" w="sm" len="sm"/>
-                    </a:lnB>
-                    <a:solidFill>
-                      <a:srgbClr val="0C343D"/>
-                    </a:solidFill>
-                  </a:tcPr>
-                </a:tc>
-                <a:extLst>
-                  <a:ext uri="{0D108BD9-81ED-4DB2-BD59-A6C34878D82A}">
-                    <a16:rowId xmlns:a16="http://schemas.microsoft.com/office/drawing/2014/main" val="10000"/>
-                  </a:ext>
-                </a:extLst>
-              </a:tr>
-            </a:tbl>
-          </a:graphicData>
-        </a:graphic>
-      </p:graphicFrame>
-    </p:spTree>
-    <p:extLst>
-      <p:ext uri="{BB962C8B-B14F-4D97-AF65-F5344CB8AC3E}">
-        <p14:creationId xmlns:p14="http://schemas.microsoft.com/office/powerpoint/2010/main" val="1701302587"/>
-      </p:ext>
-    </p:extLst>
-  </p:cSld>
-  <p:clrMapOvr>
-    <a:masterClrMapping/>
-  </p:clrMapOvr>
-</p:sld>
-</file>
-
-<file path=ppt/slides/slide23.xml><?xml version="1.0" encoding="utf-8"?>
+<file path=ppt/slides/slide20.xml><?xml version="1.0" encoding="utf-8"?>
 <p:sld xmlns:a="http://schemas.openxmlformats.org/drawingml/2006/main" xmlns:r="http://schemas.openxmlformats.org/officeDocument/2006/relationships" xmlns:p="http://schemas.openxmlformats.org/presentationml/2006/main">
   <p:cSld>
     <p:spTree>
@@ -23484,7 +20504,7 @@
             <a:fld id="{00000000-1234-1234-1234-123412341234}" type="slidenum">
               <a:rPr lang="pt-BR" smtClean="0"/>
               <a:pPr lvl="0"/>
-              <a:t>23</a:t>
+              <a:t>20</a:t>
             </a:fld>
             <a:endParaRPr lang="pt-BR"/>
           </a:p>
@@ -24425,7 +21445,7 @@
 </p:sld>
 </file>
 
-<file path=ppt/slides/slide24.xml><?xml version="1.0" encoding="utf-8"?>
+<file path=ppt/slides/slide21.xml><?xml version="1.0" encoding="utf-8"?>
 <p:sld xmlns:a="http://schemas.openxmlformats.org/drawingml/2006/main" xmlns:r="http://schemas.openxmlformats.org/officeDocument/2006/relationships" xmlns:p="http://schemas.openxmlformats.org/presentationml/2006/main">
   <p:cSld>
     <p:spTree>
@@ -24530,7 +21550,7 @@
             <a:fld id="{00000000-1234-1234-1234-123412341234}" type="slidenum">
               <a:rPr lang="pt-BR" smtClean="0"/>
               <a:pPr lvl="0"/>
-              <a:t>24</a:t>
+              <a:t>21</a:t>
             </a:fld>
             <a:endParaRPr lang="pt-BR"/>
           </a:p>
@@ -25511,498 +22531,7 @@
 </p:sld>
 </file>
 
-<file path=ppt/slides/slide25.xml><?xml version="1.0" encoding="utf-8"?>
-<p:sld xmlns:a="http://schemas.openxmlformats.org/drawingml/2006/main" xmlns:r="http://schemas.openxmlformats.org/officeDocument/2006/relationships" xmlns:p="http://schemas.openxmlformats.org/presentationml/2006/main" show="0">
-  <p:cSld>
-    <p:spTree>
-      <p:nvGrpSpPr>
-        <p:cNvPr id="1" name="Shape 259"/>
-        <p:cNvGrpSpPr/>
-        <p:nvPr/>
-      </p:nvGrpSpPr>
-      <p:grpSpPr>
-        <a:xfrm>
-          <a:off x="0" y="0"/>
-          <a:ext cx="0" cy="0"/>
-          <a:chOff x="0" y="0"/>
-          <a:chExt cx="0" cy="0"/>
-        </a:xfrm>
-      </p:grpSpPr>
-      <p:sp>
-        <p:nvSpPr>
-          <p:cNvPr id="260" name="Google Shape;260;p26"/>
-          <p:cNvSpPr txBox="1">
-            <a:spLocks noGrp="1"/>
-          </p:cNvSpPr>
-          <p:nvPr>
-            <p:ph type="title"/>
-          </p:nvPr>
-        </p:nvSpPr>
-        <p:spPr>
-          <a:xfrm>
-            <a:off x="838200" y="387985"/>
-            <a:ext cx="10300970" cy="986155"/>
-          </a:xfrm>
-          <a:prstGeom prst="rect">
-            <a:avLst/>
-          </a:prstGeom>
-          <a:noFill/>
-          <a:ln>
-            <a:noFill/>
-          </a:ln>
-        </p:spPr>
-        <p:txBody>
-          <a:bodyPr spcFirstLastPara="1" wrap="square" lIns="91425" tIns="45700" rIns="91425" bIns="45700" anchor="ctr" anchorCtr="0">
-            <a:normAutofit/>
-          </a:bodyPr>
-          <a:lstStyle/>
-          <a:p>
-            <a:pPr marL="0" lvl="0" indent="0" algn="l" rtl="0">
-              <a:lnSpc>
-                <a:spcPct val="90000"/>
-              </a:lnSpc>
-              <a:spcBef>
-                <a:spcPts val="0"/>
-              </a:spcBef>
-              <a:spcAft>
-                <a:spcPts val="0"/>
-              </a:spcAft>
-              <a:buClr>
-                <a:srgbClr val="595959"/>
-              </a:buClr>
-              <a:buSzPts val="4400"/>
-              <a:buFont typeface="Arial"/>
-              <a:buNone/>
-            </a:pPr>
-            <a:r>
-              <a:rPr lang="pt-BR"/>
-              <a:t>Para Praticar!</a:t>
-            </a:r>
-            <a:endParaRPr/>
-          </a:p>
-        </p:txBody>
-      </p:sp>
-      <p:sp>
-        <p:nvSpPr>
-          <p:cNvPr id="261" name="Google Shape;261;p26"/>
-          <p:cNvSpPr txBox="1">
-            <a:spLocks noGrp="1"/>
-          </p:cNvSpPr>
-          <p:nvPr>
-            <p:ph type="sldNum" idx="12"/>
-          </p:nvPr>
-        </p:nvSpPr>
-        <p:spPr>
-          <a:xfrm>
-            <a:off x="11353798" y="5594349"/>
-            <a:ext cx="838201" cy="365125"/>
-          </a:xfrm>
-          <a:prstGeom prst="rect">
-            <a:avLst/>
-          </a:prstGeom>
-          <a:noFill/>
-          <a:ln>
-            <a:noFill/>
-          </a:ln>
-        </p:spPr>
-        <p:txBody>
-          <a:bodyPr spcFirstLastPara="1" wrap="square" lIns="91425" tIns="45700" rIns="91425" bIns="45700" anchor="ctr" anchorCtr="0">
-            <a:noAutofit/>
-          </a:bodyPr>
-          <a:lstStyle/>
-          <a:p>
-            <a:pPr marL="0" lvl="0" indent="0" algn="ctr" rtl="0">
-              <a:lnSpc>
-                <a:spcPct val="100000"/>
-              </a:lnSpc>
-              <a:spcBef>
-                <a:spcPts val="0"/>
-              </a:spcBef>
-              <a:spcAft>
-                <a:spcPts val="0"/>
-              </a:spcAft>
-              <a:buSzPts val="2000"/>
-              <a:buNone/>
-            </a:pPr>
-            <a:fld id="{00000000-1234-1234-1234-123412341234}" type="slidenum">
-              <a:rPr lang="pt-BR"/>
-              <a:t>25</a:t>
-            </a:fld>
-            <a:endParaRPr/>
-          </a:p>
-        </p:txBody>
-      </p:sp>
-      <p:sp>
-        <p:nvSpPr>
-          <p:cNvPr id="262" name="Google Shape;262;p26"/>
-          <p:cNvSpPr txBox="1"/>
-          <p:nvPr/>
-        </p:nvSpPr>
-        <p:spPr>
-          <a:xfrm>
-            <a:off x="911860" y="1628775"/>
-            <a:ext cx="10227310" cy="4490085"/>
-          </a:xfrm>
-          <a:prstGeom prst="rect">
-            <a:avLst/>
-          </a:prstGeom>
-          <a:noFill/>
-          <a:ln>
-            <a:noFill/>
-          </a:ln>
-        </p:spPr>
-        <p:txBody>
-          <a:bodyPr spcFirstLastPara="1" wrap="square" lIns="91425" tIns="91425" rIns="91425" bIns="91425" anchor="t" anchorCtr="0">
-            <a:spAutoFit/>
-          </a:bodyPr>
-          <a:lstStyle/>
-          <a:p>
-            <a:pPr marL="0" marR="0" lvl="0" indent="0" algn="l" rtl="0">
-              <a:lnSpc>
-                <a:spcPct val="100000"/>
-              </a:lnSpc>
-              <a:spcBef>
-                <a:spcPts val="0"/>
-              </a:spcBef>
-              <a:spcAft>
-                <a:spcPts val="0"/>
-              </a:spcAft>
-              <a:buClr>
-                <a:srgbClr val="000000"/>
-              </a:buClr>
-              <a:buSzPts val="2800"/>
-              <a:buFont typeface="Arial"/>
-              <a:buNone/>
-            </a:pPr>
-            <a:r>
-              <a:rPr lang="pt-BR" sz="2800" b="1" i="0" u="none" strike="noStrike" cap="none">
-                <a:solidFill>
-                  <a:srgbClr val="000000"/>
-                </a:solidFill>
-                <a:latin typeface="Arial"/>
-                <a:ea typeface="Arial"/>
-                <a:cs typeface="Arial"/>
-                <a:sym typeface="Arial"/>
-              </a:rPr>
-              <a:t>Descrição da atividade. </a:t>
-            </a:r>
-            <a:endParaRPr sz="2800" b="1" i="0" u="none" strike="noStrike" cap="none">
-              <a:solidFill>
-                <a:srgbClr val="000000"/>
-              </a:solidFill>
-              <a:latin typeface="Arial"/>
-              <a:ea typeface="Arial"/>
-              <a:cs typeface="Arial"/>
-              <a:sym typeface="Arial"/>
-            </a:endParaRPr>
-          </a:p>
-          <a:p>
-            <a:pPr marL="0" marR="0" lvl="0" indent="0" algn="l" rtl="0">
-              <a:lnSpc>
-                <a:spcPct val="100000"/>
-              </a:lnSpc>
-              <a:spcBef>
-                <a:spcPts val="0"/>
-              </a:spcBef>
-              <a:spcAft>
-                <a:spcPts val="0"/>
-              </a:spcAft>
-              <a:buClr>
-                <a:srgbClr val="000000"/>
-              </a:buClr>
-              <a:buSzPts val="2800"/>
-              <a:buFont typeface="Arial"/>
-              <a:buNone/>
-            </a:pPr>
-            <a:endParaRPr sz="2800" b="0" i="0" u="none" strike="noStrike" cap="none">
-              <a:solidFill>
-                <a:srgbClr val="000000"/>
-              </a:solidFill>
-              <a:latin typeface="Arial"/>
-              <a:ea typeface="Arial"/>
-              <a:cs typeface="Arial"/>
-              <a:sym typeface="Arial"/>
-            </a:endParaRPr>
-          </a:p>
-          <a:p>
-            <a:pPr marL="0" marR="0" lvl="0" indent="0" algn="l" rtl="0">
-              <a:lnSpc>
-                <a:spcPct val="100000"/>
-              </a:lnSpc>
-              <a:spcBef>
-                <a:spcPts val="0"/>
-              </a:spcBef>
-              <a:spcAft>
-                <a:spcPts val="0"/>
-              </a:spcAft>
-              <a:buClr>
-                <a:schemeClr val="dk1"/>
-              </a:buClr>
-              <a:buSzPts val="1100"/>
-              <a:buFont typeface="Arial"/>
-              <a:buNone/>
-            </a:pPr>
-            <a:r>
-              <a:rPr lang="pt-BR" sz="2800" b="0" i="0" u="none" strike="noStrike" cap="none">
-                <a:solidFill>
-                  <a:srgbClr val="000000"/>
-                </a:solidFill>
-                <a:latin typeface="Arial"/>
-                <a:ea typeface="Arial"/>
-                <a:cs typeface="Arial"/>
-                <a:sym typeface="Arial"/>
-              </a:rPr>
-              <a:t>Instruções: Crie alguns elementos usando as tags HTML e insira nesses elementos as pseudo-classes que aprendemos:</a:t>
-            </a:r>
-            <a:endParaRPr sz="2800" b="0" i="0" u="none" strike="noStrike" cap="none">
-              <a:solidFill>
-                <a:srgbClr val="000000"/>
-              </a:solidFill>
-              <a:latin typeface="Arial"/>
-              <a:ea typeface="Arial"/>
-              <a:cs typeface="Arial"/>
-              <a:sym typeface="Arial"/>
-            </a:endParaRPr>
-          </a:p>
-          <a:p>
-            <a:pPr marL="0" marR="0" lvl="0" indent="0" algn="l" rtl="0">
-              <a:lnSpc>
-                <a:spcPct val="100000"/>
-              </a:lnSpc>
-              <a:spcBef>
-                <a:spcPts val="0"/>
-              </a:spcBef>
-              <a:spcAft>
-                <a:spcPts val="0"/>
-              </a:spcAft>
-              <a:buClr>
-                <a:srgbClr val="000000"/>
-              </a:buClr>
-              <a:buSzPts val="2800"/>
-              <a:buFont typeface="Arial"/>
-              <a:buNone/>
-            </a:pPr>
-            <a:endParaRPr sz="2800" b="0" i="0" u="none" strike="noStrike" cap="none">
-              <a:solidFill>
-                <a:schemeClr val="dk1"/>
-              </a:solidFill>
-              <a:latin typeface="Arial"/>
-              <a:ea typeface="Arial"/>
-              <a:cs typeface="Arial"/>
-              <a:sym typeface="Arial"/>
-            </a:endParaRPr>
-          </a:p>
-          <a:p>
-            <a:pPr marL="457200" marR="0" lvl="0" indent="-314325" algn="l" rtl="0">
-              <a:lnSpc>
-                <a:spcPct val="100000"/>
-              </a:lnSpc>
-              <a:spcBef>
-                <a:spcPts val="0"/>
-              </a:spcBef>
-              <a:spcAft>
-                <a:spcPts val="0"/>
-              </a:spcAft>
-              <a:buClr>
-                <a:srgbClr val="000000"/>
-              </a:buClr>
-              <a:buSzPts val="1350"/>
-              <a:buFont typeface="DM Sans"/>
-              <a:buChar char="✓"/>
-            </a:pPr>
-            <a:r>
-              <a:rPr lang="pt-BR" sz="2800" b="0" i="0" u="none" strike="noStrike" cap="none">
-                <a:solidFill>
-                  <a:schemeClr val="dk1"/>
-                </a:solidFill>
-                <a:latin typeface="Arial"/>
-                <a:ea typeface="Arial"/>
-                <a:cs typeface="Arial"/>
-                <a:sym typeface="Arial"/>
-              </a:rPr>
-              <a:t>placeholder</a:t>
-            </a:r>
-            <a:endParaRPr sz="2800" b="0" i="0" u="none" strike="noStrike" cap="none">
-              <a:solidFill>
-                <a:schemeClr val="dk1"/>
-              </a:solidFill>
-              <a:latin typeface="Arial"/>
-              <a:ea typeface="Arial"/>
-              <a:cs typeface="Arial"/>
-              <a:sym typeface="Arial"/>
-            </a:endParaRPr>
-          </a:p>
-          <a:p>
-            <a:pPr marL="457200" marR="0" lvl="0" indent="-314325" algn="l" rtl="0">
-              <a:lnSpc>
-                <a:spcPct val="100000"/>
-              </a:lnSpc>
-              <a:spcBef>
-                <a:spcPts val="0"/>
-              </a:spcBef>
-              <a:spcAft>
-                <a:spcPts val="0"/>
-              </a:spcAft>
-              <a:buClr>
-                <a:srgbClr val="000000"/>
-              </a:buClr>
-              <a:buSzPts val="1350"/>
-              <a:buFont typeface="DM Sans"/>
-              <a:buChar char="✓"/>
-            </a:pPr>
-            <a:r>
-              <a:rPr lang="pt-BR" sz="2800" b="0" i="0" u="none" strike="noStrike" cap="none">
-                <a:solidFill>
-                  <a:srgbClr val="000000"/>
-                </a:solidFill>
-                <a:latin typeface="Arial"/>
-                <a:ea typeface="Arial"/>
-                <a:cs typeface="Arial"/>
-                <a:sym typeface="Arial"/>
-              </a:rPr>
-              <a:t>first-letter</a:t>
-            </a:r>
-            <a:endParaRPr sz="2800" b="0" i="0" u="none" strike="noStrike" cap="none">
-              <a:solidFill>
-                <a:srgbClr val="000000"/>
-              </a:solidFill>
-              <a:latin typeface="Arial"/>
-              <a:ea typeface="Arial"/>
-              <a:cs typeface="Arial"/>
-              <a:sym typeface="Arial"/>
-            </a:endParaRPr>
-          </a:p>
-          <a:p>
-            <a:pPr marL="457200" marR="0" lvl="0" indent="-314325" algn="l" rtl="0">
-              <a:lnSpc>
-                <a:spcPct val="100000"/>
-              </a:lnSpc>
-              <a:spcBef>
-                <a:spcPts val="0"/>
-              </a:spcBef>
-              <a:spcAft>
-                <a:spcPts val="0"/>
-              </a:spcAft>
-              <a:buClr>
-                <a:srgbClr val="000000"/>
-              </a:buClr>
-              <a:buSzPts val="1350"/>
-              <a:buFont typeface="DM Sans"/>
-              <a:buChar char="✓"/>
-            </a:pPr>
-            <a:r>
-              <a:rPr lang="pt-BR" sz="2800" b="0" i="0" u="none" strike="noStrike" cap="none">
-                <a:solidFill>
-                  <a:srgbClr val="000000"/>
-                </a:solidFill>
-                <a:latin typeface="Arial"/>
-                <a:ea typeface="Arial"/>
-                <a:cs typeface="Arial"/>
-                <a:sym typeface="Arial"/>
-              </a:rPr>
-              <a:t>first-line</a:t>
-            </a:r>
-            <a:endParaRPr sz="2800" b="0" i="0" u="none" strike="noStrike" cap="none">
-              <a:solidFill>
-                <a:srgbClr val="000000"/>
-              </a:solidFill>
-              <a:latin typeface="Arial"/>
-              <a:ea typeface="Arial"/>
-              <a:cs typeface="Arial"/>
-              <a:sym typeface="Arial"/>
-            </a:endParaRPr>
-          </a:p>
-          <a:p>
-            <a:pPr marL="457200" marR="0" lvl="0" indent="-314325" algn="l" rtl="0">
-              <a:lnSpc>
-                <a:spcPct val="100000"/>
-              </a:lnSpc>
-              <a:spcBef>
-                <a:spcPts val="0"/>
-              </a:spcBef>
-              <a:spcAft>
-                <a:spcPts val="0"/>
-              </a:spcAft>
-              <a:buClr>
-                <a:srgbClr val="000000"/>
-              </a:buClr>
-              <a:buSzPts val="1350"/>
-              <a:buFont typeface="DM Sans"/>
-              <a:buChar char="✓"/>
-            </a:pPr>
-            <a:r>
-              <a:rPr lang="pt-BR" sz="2800" b="0" i="0" u="none" strike="noStrike" cap="none">
-                <a:solidFill>
-                  <a:srgbClr val="000000"/>
-                </a:solidFill>
-                <a:latin typeface="Arial"/>
-                <a:ea typeface="Arial"/>
-                <a:cs typeface="Arial"/>
-                <a:sym typeface="Arial"/>
-              </a:rPr>
-              <a:t>selection</a:t>
-            </a:r>
-            <a:endParaRPr sz="2800" b="0" i="0" u="none" strike="noStrike" cap="none">
-              <a:solidFill>
-                <a:srgbClr val="000000"/>
-              </a:solidFill>
-              <a:latin typeface="Arial"/>
-              <a:ea typeface="Arial"/>
-              <a:cs typeface="Arial"/>
-              <a:sym typeface="Arial"/>
-            </a:endParaRPr>
-          </a:p>
-          <a:p>
-            <a:pPr marL="457200" marR="0" lvl="0" indent="-314325" algn="l" rtl="0">
-              <a:lnSpc>
-                <a:spcPct val="100000"/>
-              </a:lnSpc>
-              <a:spcBef>
-                <a:spcPts val="0"/>
-              </a:spcBef>
-              <a:spcAft>
-                <a:spcPts val="0"/>
-              </a:spcAft>
-              <a:buClr>
-                <a:srgbClr val="000000"/>
-              </a:buClr>
-              <a:buSzPts val="1350"/>
-              <a:buFont typeface="DM Sans"/>
-              <a:buChar char="✓"/>
-            </a:pPr>
-            <a:r>
-              <a:rPr lang="pt-BR" sz="2800" b="0" i="0" u="none" strike="noStrike" cap="none">
-                <a:solidFill>
-                  <a:srgbClr val="000000"/>
-                </a:solidFill>
-                <a:latin typeface="Arial"/>
-                <a:ea typeface="Arial"/>
-                <a:cs typeface="Arial"/>
-                <a:sym typeface="Arial"/>
-              </a:rPr>
-              <a:t>marker</a:t>
-            </a:r>
-            <a:endParaRPr sz="2800" b="0" i="0" u="none" strike="noStrike" cap="none">
-              <a:solidFill>
-                <a:srgbClr val="000000"/>
-              </a:solidFill>
-              <a:latin typeface="Arial"/>
-              <a:ea typeface="Arial"/>
-              <a:cs typeface="Arial"/>
-              <a:sym typeface="Arial"/>
-            </a:endParaRPr>
-          </a:p>
-        </p:txBody>
-      </p:sp>
-    </p:spTree>
-  </p:cSld>
-  <p:clrMapOvr>
-    <a:masterClrMapping/>
-  </p:clrMapOvr>
-</p:sld>
-</file>
-
-<file path=ppt/slides/slide26.xml><?xml version="1.0" encoding="utf-8"?>
+<file path=ppt/slides/slide22.xml><?xml version="1.0" encoding="utf-8"?>
 <p:sld xmlns:a="http://schemas.openxmlformats.org/drawingml/2006/main" xmlns:r="http://schemas.openxmlformats.org/officeDocument/2006/relationships" xmlns:p="http://schemas.openxmlformats.org/presentationml/2006/main">
   <p:cSld>
     <p:spTree>
@@ -26117,7 +22646,7 @@
             </a:pPr>
             <a:fld id="{00000000-1234-1234-1234-123412341234}" type="slidenum">
               <a:rPr lang="pt-BR"/>
-              <a:t>26</a:t>
+              <a:t>22</a:t>
             </a:fld>
             <a:endParaRPr/>
           </a:p>
@@ -26508,7 +23037,7 @@
 </p:sld>
 </file>
 
-<file path=ppt/slides/slide27.xml><?xml version="1.0" encoding="utf-8"?>
+<file path=ppt/slides/slide23.xml><?xml version="1.0" encoding="utf-8"?>
 <p:sld xmlns:a="http://schemas.openxmlformats.org/drawingml/2006/main" xmlns:r="http://schemas.openxmlformats.org/officeDocument/2006/relationships" xmlns:p="http://schemas.openxmlformats.org/presentationml/2006/main">
   <p:cSld>
     <p:spTree>
@@ -26649,7 +23178,7 @@
             </a:pPr>
             <a:fld id="{00000000-1234-1234-1234-123412341234}" type="slidenum">
               <a:rPr lang="pt-BR"/>
-              <a:t>27</a:t>
+              <a:t>23</a:t>
             </a:fld>
             <a:endParaRPr/>
           </a:p>
@@ -32600,11 +29129,17 @@
 </file>
 
 <file path=ppt/slides/slide9.xml><?xml version="1.0" encoding="utf-8"?>
-<p:sld xmlns:a="http://schemas.openxmlformats.org/drawingml/2006/main" xmlns:r="http://schemas.openxmlformats.org/officeDocument/2006/relationships" xmlns:p="http://schemas.openxmlformats.org/presentationml/2006/main" show="0">
+<p:sld xmlns:a="http://schemas.openxmlformats.org/drawingml/2006/main" xmlns:r="http://schemas.openxmlformats.org/officeDocument/2006/relationships" xmlns:p="http://schemas.openxmlformats.org/presentationml/2006/main">
   <p:cSld>
     <p:spTree>
       <p:nvGrpSpPr>
-        <p:cNvPr id="1" name="Shape 120"/>
+        <p:cNvPr id="1" name="">
+          <a:extLst>
+            <a:ext uri="{FF2B5EF4-FFF2-40B4-BE49-F238E27FC236}">
+              <a16:creationId xmlns:a16="http://schemas.microsoft.com/office/drawing/2014/main" id="{BB1CF933-984F-C354-820A-2395D7409B79}"/>
+            </a:ext>
+          </a:extLst>
+        </p:cNvPr>
         <p:cNvGrpSpPr/>
         <p:nvPr/>
       </p:nvGrpSpPr>
@@ -32618,17 +29153,182 @@
       </p:grpSpPr>
       <p:sp>
         <p:nvSpPr>
-          <p:cNvPr id="121" name="Google Shape;121;p10"/>
-          <p:cNvSpPr txBox="1">
+          <p:cNvPr id="8" name="Retângulo 7">
+            <a:extLst>
+              <a:ext uri="{FF2B5EF4-FFF2-40B4-BE49-F238E27FC236}">
+                <a16:creationId xmlns:a16="http://schemas.microsoft.com/office/drawing/2014/main" id="{D48A15A2-90B8-0D3A-6AA1-F15BEDFC55C0}"/>
+              </a:ext>
+            </a:extLst>
+          </p:cNvPr>
+          <p:cNvSpPr/>
+          <p:nvPr/>
+        </p:nvSpPr>
+        <p:spPr>
+          <a:xfrm>
+            <a:off x="0" y="0"/>
+            <a:ext cx="12192000" cy="6858000"/>
+          </a:xfrm>
+          <a:prstGeom prst="rect">
+            <a:avLst/>
+          </a:prstGeom>
+          <a:solidFill>
+            <a:schemeClr val="tx1">
+              <a:lumMod val="85000"/>
+              <a:lumOff val="15000"/>
+            </a:schemeClr>
+          </a:solidFill>
+        </p:spPr>
+        <p:style>
+          <a:lnRef idx="2">
+            <a:schemeClr val="dk1">
+              <a:shade val="15000"/>
+            </a:schemeClr>
+          </a:lnRef>
+          <a:fillRef idx="1">
+            <a:schemeClr val="dk1"/>
+          </a:fillRef>
+          <a:effectRef idx="0">
+            <a:schemeClr val="dk1"/>
+          </a:effectRef>
+          <a:fontRef idx="minor">
+            <a:schemeClr val="lt1"/>
+          </a:fontRef>
+        </p:style>
+        <p:txBody>
+          <a:bodyPr rtlCol="0" anchor="ctr"/>
+          <a:lstStyle/>
+          <a:p>
+            <a:pPr algn="ctr"/>
+            <a:endParaRPr lang="pt-BR" dirty="0"/>
+          </a:p>
+        </p:txBody>
+      </p:sp>
+      <p:sp>
+        <p:nvSpPr>
+          <p:cNvPr id="3" name="Espaço Reservado para Número de Slide 2">
+            <a:extLst>
+              <a:ext uri="{FF2B5EF4-FFF2-40B4-BE49-F238E27FC236}">
+                <a16:creationId xmlns:a16="http://schemas.microsoft.com/office/drawing/2014/main" id="{5E2738F2-39B9-F4B6-BB37-7A6005386937}"/>
+              </a:ext>
+            </a:extLst>
+          </p:cNvPr>
+          <p:cNvSpPr>
             <a:spLocks noGrp="1"/>
           </p:cNvSpPr>
           <p:nvPr>
-            <p:ph type="title"/>
+            <p:ph type="sldNum" idx="4294967295"/>
           </p:nvPr>
         </p:nvSpPr>
         <p:spPr>
           <a:xfrm>
-            <a:off x="838200" y="387985"/>
+            <a:off x="11353800" y="5594350"/>
+            <a:ext cx="838200" cy="365125"/>
+          </a:xfrm>
+        </p:spPr>
+        <p:txBody>
+          <a:bodyPr/>
+          <a:lstStyle/>
+          <a:p>
+            <a:pPr lvl="0"/>
+            <a:fld id="{00000000-1234-1234-1234-123412341234}" type="slidenum">
+              <a:rPr lang="pt-BR" smtClean="0"/>
+              <a:pPr lvl="0"/>
+              <a:t>9</a:t>
+            </a:fld>
+            <a:endParaRPr lang="pt-BR"/>
+          </a:p>
+        </p:txBody>
+      </p:sp>
+      <p:pic>
+        <p:nvPicPr>
+          <p:cNvPr id="7" name="Imagem 6">
+            <a:extLst>
+              <a:ext uri="{FF2B5EF4-FFF2-40B4-BE49-F238E27FC236}">
+                <a16:creationId xmlns:a16="http://schemas.microsoft.com/office/drawing/2014/main" id="{14D34A8C-1606-8DAB-EC13-C5C5D779A9C3}"/>
+              </a:ext>
+            </a:extLst>
+          </p:cNvPr>
+          <p:cNvPicPr>
+            <a:picLocks noChangeAspect="1"/>
+          </p:cNvPicPr>
+          <p:nvPr/>
+        </p:nvPicPr>
+        <p:blipFill>
+          <a:blip r:embed="rId2"/>
+          <a:stretch>
+            <a:fillRect/>
+          </a:stretch>
+        </p:blipFill>
+        <p:spPr>
+          <a:xfrm>
+            <a:off x="-215900" y="-71438"/>
+            <a:ext cx="12522201" cy="7043738"/>
+          </a:xfrm>
+          <a:prstGeom prst="rect">
+            <a:avLst/>
+          </a:prstGeom>
+        </p:spPr>
+      </p:pic>
+      <p:cxnSp>
+        <p:nvCxnSpPr>
+          <p:cNvPr id="18" name="Conector reto 17">
+            <a:extLst>
+              <a:ext uri="{FF2B5EF4-FFF2-40B4-BE49-F238E27FC236}">
+                <a16:creationId xmlns:a16="http://schemas.microsoft.com/office/drawing/2014/main" id="{C6EEA2D4-21E2-6C37-80B9-ED79C003DF4E}"/>
+              </a:ext>
+            </a:extLst>
+          </p:cNvPr>
+          <p:cNvCxnSpPr>
+            <a:cxnSpLocks/>
+          </p:cNvCxnSpPr>
+          <p:nvPr/>
+        </p:nvCxnSpPr>
+        <p:spPr>
+          <a:xfrm>
+            <a:off x="856932" y="743587"/>
+            <a:ext cx="0" cy="828040"/>
+          </a:xfrm>
+          <a:prstGeom prst="line">
+            <a:avLst/>
+          </a:prstGeom>
+          <a:ln>
+            <a:solidFill>
+              <a:srgbClr val="ED145B"/>
+            </a:solidFill>
+          </a:ln>
+        </p:spPr>
+        <p:style>
+          <a:lnRef idx="3">
+            <a:schemeClr val="dk1"/>
+          </a:lnRef>
+          <a:fillRef idx="0">
+            <a:schemeClr val="dk1"/>
+          </a:fillRef>
+          <a:effectRef idx="2">
+            <a:schemeClr val="dk1"/>
+          </a:effectRef>
+          <a:fontRef idx="minor">
+            <a:schemeClr val="tx1"/>
+          </a:fontRef>
+        </p:style>
+      </p:cxnSp>
+      <p:sp>
+        <p:nvSpPr>
+          <p:cNvPr id="22" name="Google Shape;85;p6">
+            <a:extLst>
+              <a:ext uri="{FF2B5EF4-FFF2-40B4-BE49-F238E27FC236}">
+                <a16:creationId xmlns:a16="http://schemas.microsoft.com/office/drawing/2014/main" id="{3E2C7A9D-27FD-5960-C404-8C320F368F8E}"/>
+              </a:ext>
+            </a:extLst>
+          </p:cNvPr>
+          <p:cNvSpPr txBox="1">
+            <a:spLocks/>
+          </p:cNvSpPr>
+          <p:nvPr/>
+        </p:nvSpPr>
+        <p:spPr>
+          <a:xfrm>
+            <a:off x="945515" y="664529"/>
             <a:ext cx="10300970" cy="986155"/>
           </a:xfrm>
           <a:prstGeom prst="rect">
@@ -32641,45 +29341,410 @@
         </p:spPr>
         <p:txBody>
           <a:bodyPr spcFirstLastPara="1" wrap="square" lIns="91425" tIns="45700" rIns="91425" bIns="45700" anchor="ctr" anchorCtr="0">
-            <a:normAutofit/>
+            <a:noAutofit/>
           </a:bodyPr>
-          <a:lstStyle/>
+          <a:lstStyle>
+            <a:defPPr marR="0" lvl="0" algn="l" rtl="0">
+              <a:lnSpc>
+                <a:spcPct val="100000"/>
+              </a:lnSpc>
+              <a:spcBef>
+                <a:spcPts val="0"/>
+              </a:spcBef>
+              <a:spcAft>
+                <a:spcPts val="0"/>
+              </a:spcAft>
+            </a:defPPr>
+            <a:lvl1pPr marR="0" lvl="0" algn="l" rtl="0">
+              <a:lnSpc>
+                <a:spcPct val="100000"/>
+              </a:lnSpc>
+              <a:spcBef>
+                <a:spcPts val="0"/>
+              </a:spcBef>
+              <a:spcAft>
+                <a:spcPts val="0"/>
+              </a:spcAft>
+              <a:buClr>
+                <a:srgbClr val="000000"/>
+              </a:buClr>
+              <a:buFont typeface="Arial"/>
+              <a:defRPr sz="1400" b="0" i="0" u="none" strike="noStrike" cap="none">
+                <a:solidFill>
+                  <a:srgbClr val="000000"/>
+                </a:solidFill>
+                <a:latin typeface="Arial"/>
+                <a:ea typeface="Arial"/>
+                <a:cs typeface="Arial"/>
+                <a:sym typeface="Arial"/>
+              </a:defRPr>
+            </a:lvl1pPr>
+            <a:lvl2pPr marR="0" lvl="1" algn="l" rtl="0">
+              <a:lnSpc>
+                <a:spcPct val="100000"/>
+              </a:lnSpc>
+              <a:spcBef>
+                <a:spcPts val="0"/>
+              </a:spcBef>
+              <a:spcAft>
+                <a:spcPts val="0"/>
+              </a:spcAft>
+              <a:buClr>
+                <a:srgbClr val="000000"/>
+              </a:buClr>
+              <a:buFont typeface="Arial"/>
+              <a:defRPr sz="1400" b="0" i="0" u="none" strike="noStrike" cap="none">
+                <a:solidFill>
+                  <a:srgbClr val="000000"/>
+                </a:solidFill>
+                <a:latin typeface="Arial"/>
+                <a:ea typeface="Arial"/>
+                <a:cs typeface="Arial"/>
+                <a:sym typeface="Arial"/>
+              </a:defRPr>
+            </a:lvl2pPr>
+            <a:lvl3pPr marR="0" lvl="2" algn="l" rtl="0">
+              <a:lnSpc>
+                <a:spcPct val="100000"/>
+              </a:lnSpc>
+              <a:spcBef>
+                <a:spcPts val="0"/>
+              </a:spcBef>
+              <a:spcAft>
+                <a:spcPts val="0"/>
+              </a:spcAft>
+              <a:buClr>
+                <a:srgbClr val="000000"/>
+              </a:buClr>
+              <a:buFont typeface="Arial"/>
+              <a:defRPr sz="1400" b="0" i="0" u="none" strike="noStrike" cap="none">
+                <a:solidFill>
+                  <a:srgbClr val="000000"/>
+                </a:solidFill>
+                <a:latin typeface="Arial"/>
+                <a:ea typeface="Arial"/>
+                <a:cs typeface="Arial"/>
+                <a:sym typeface="Arial"/>
+              </a:defRPr>
+            </a:lvl3pPr>
+            <a:lvl4pPr marR="0" lvl="3" algn="l" rtl="0">
+              <a:lnSpc>
+                <a:spcPct val="100000"/>
+              </a:lnSpc>
+              <a:spcBef>
+                <a:spcPts val="0"/>
+              </a:spcBef>
+              <a:spcAft>
+                <a:spcPts val="0"/>
+              </a:spcAft>
+              <a:buClr>
+                <a:srgbClr val="000000"/>
+              </a:buClr>
+              <a:buFont typeface="Arial"/>
+              <a:defRPr sz="1400" b="0" i="0" u="none" strike="noStrike" cap="none">
+                <a:solidFill>
+                  <a:srgbClr val="000000"/>
+                </a:solidFill>
+                <a:latin typeface="Arial"/>
+                <a:ea typeface="Arial"/>
+                <a:cs typeface="Arial"/>
+                <a:sym typeface="Arial"/>
+              </a:defRPr>
+            </a:lvl4pPr>
+            <a:lvl5pPr marR="0" lvl="4" algn="l" rtl="0">
+              <a:lnSpc>
+                <a:spcPct val="100000"/>
+              </a:lnSpc>
+              <a:spcBef>
+                <a:spcPts val="0"/>
+              </a:spcBef>
+              <a:spcAft>
+                <a:spcPts val="0"/>
+              </a:spcAft>
+              <a:buClr>
+                <a:srgbClr val="000000"/>
+              </a:buClr>
+              <a:buFont typeface="Arial"/>
+              <a:defRPr sz="1400" b="0" i="0" u="none" strike="noStrike" cap="none">
+                <a:solidFill>
+                  <a:srgbClr val="000000"/>
+                </a:solidFill>
+                <a:latin typeface="Arial"/>
+                <a:ea typeface="Arial"/>
+                <a:cs typeface="Arial"/>
+                <a:sym typeface="Arial"/>
+              </a:defRPr>
+            </a:lvl5pPr>
+            <a:lvl6pPr marR="0" lvl="5" algn="l" rtl="0">
+              <a:lnSpc>
+                <a:spcPct val="100000"/>
+              </a:lnSpc>
+              <a:spcBef>
+                <a:spcPts val="0"/>
+              </a:spcBef>
+              <a:spcAft>
+                <a:spcPts val="0"/>
+              </a:spcAft>
+              <a:buClr>
+                <a:srgbClr val="000000"/>
+              </a:buClr>
+              <a:buFont typeface="Arial"/>
+              <a:defRPr sz="1400" b="0" i="0" u="none" strike="noStrike" cap="none">
+                <a:solidFill>
+                  <a:srgbClr val="000000"/>
+                </a:solidFill>
+                <a:latin typeface="Arial"/>
+                <a:ea typeface="Arial"/>
+                <a:cs typeface="Arial"/>
+                <a:sym typeface="Arial"/>
+              </a:defRPr>
+            </a:lvl6pPr>
+            <a:lvl7pPr marR="0" lvl="6" algn="l" rtl="0">
+              <a:lnSpc>
+                <a:spcPct val="100000"/>
+              </a:lnSpc>
+              <a:spcBef>
+                <a:spcPts val="0"/>
+              </a:spcBef>
+              <a:spcAft>
+                <a:spcPts val="0"/>
+              </a:spcAft>
+              <a:buClr>
+                <a:srgbClr val="000000"/>
+              </a:buClr>
+              <a:buFont typeface="Arial"/>
+              <a:defRPr sz="1400" b="0" i="0" u="none" strike="noStrike" cap="none">
+                <a:solidFill>
+                  <a:srgbClr val="000000"/>
+                </a:solidFill>
+                <a:latin typeface="Arial"/>
+                <a:ea typeface="Arial"/>
+                <a:cs typeface="Arial"/>
+                <a:sym typeface="Arial"/>
+              </a:defRPr>
+            </a:lvl7pPr>
+            <a:lvl8pPr marR="0" lvl="7" algn="l" rtl="0">
+              <a:lnSpc>
+                <a:spcPct val="100000"/>
+              </a:lnSpc>
+              <a:spcBef>
+                <a:spcPts val="0"/>
+              </a:spcBef>
+              <a:spcAft>
+                <a:spcPts val="0"/>
+              </a:spcAft>
+              <a:buClr>
+                <a:srgbClr val="000000"/>
+              </a:buClr>
+              <a:buFont typeface="Arial"/>
+              <a:defRPr sz="1400" b="0" i="0" u="none" strike="noStrike" cap="none">
+                <a:solidFill>
+                  <a:srgbClr val="000000"/>
+                </a:solidFill>
+                <a:latin typeface="Arial"/>
+                <a:ea typeface="Arial"/>
+                <a:cs typeface="Arial"/>
+                <a:sym typeface="Arial"/>
+              </a:defRPr>
+            </a:lvl8pPr>
+            <a:lvl9pPr marR="0" lvl="8" algn="l" rtl="0">
+              <a:lnSpc>
+                <a:spcPct val="100000"/>
+              </a:lnSpc>
+              <a:spcBef>
+                <a:spcPts val="0"/>
+              </a:spcBef>
+              <a:spcAft>
+                <a:spcPts val="0"/>
+              </a:spcAft>
+              <a:buClr>
+                <a:srgbClr val="000000"/>
+              </a:buClr>
+              <a:buFont typeface="Arial"/>
+              <a:defRPr sz="1400" b="0" i="0" u="none" strike="noStrike" cap="none">
+                <a:solidFill>
+                  <a:srgbClr val="000000"/>
+                </a:solidFill>
+                <a:latin typeface="Arial"/>
+                <a:ea typeface="Arial"/>
+                <a:cs typeface="Arial"/>
+                <a:sym typeface="Arial"/>
+              </a:defRPr>
+            </a:lvl9pPr>
+          </a:lstStyle>
           <a:p>
-            <a:pPr marL="0" lvl="0" indent="0" algn="l" rtl="0">
-              <a:lnSpc>
-                <a:spcPct val="90000"/>
-              </a:lnSpc>
-              <a:spcBef>
-                <a:spcPts val="0"/>
-              </a:spcBef>
-              <a:spcAft>
-                <a:spcPts val="0"/>
-              </a:spcAft>
+            <a:pPr>
+              <a:lnSpc>
+                <a:spcPct val="120000"/>
+              </a:lnSpc>
               <a:buClr>
                 <a:srgbClr val="595959"/>
               </a:buClr>
-              <a:buSzPts val="4400"/>
-              <a:buFont typeface="Arial"/>
-              <a:buNone/>
+              <a:buSzPct val="222222"/>
             </a:pPr>
             <a:r>
-              <a:rPr lang="pt-BR"/>
-              <a:t>Para Praticar!</a:t>
+              <a:rPr lang="pt-BR" sz="4300" dirty="0" err="1">
+                <a:solidFill>
+                  <a:schemeClr val="bg1"/>
+                </a:solidFill>
+              </a:rPr>
+              <a:t>Pseudo-classes</a:t>
             </a:r>
-            <a:endParaRPr/>
+            <a:r>
+              <a:rPr lang="pt-BR" sz="4300" dirty="0">
+                <a:solidFill>
+                  <a:schemeClr val="bg1"/>
+                </a:solidFill>
+              </a:rPr>
+              <a:t> estruturais</a:t>
+            </a:r>
+            <a:br>
+              <a:rPr lang="pt-BR" sz="4300" dirty="0">
+                <a:solidFill>
+                  <a:schemeClr val="tx2">
+                    <a:lumMod val="90000"/>
+                  </a:schemeClr>
+                </a:solidFill>
+              </a:rPr>
+            </a:br>
+            <a:r>
+              <a:rPr lang="pt-BR" sz="2000" dirty="0">
+                <a:solidFill>
+                  <a:schemeClr val="tx2">
+                    <a:lumMod val="90000"/>
+                  </a:schemeClr>
+                </a:solidFill>
+              </a:rPr>
+              <a:t>Servem para selecionar um elemento da estrutura do código.</a:t>
+            </a:r>
           </a:p>
         </p:txBody>
       </p:sp>
       <p:sp>
         <p:nvSpPr>
-          <p:cNvPr id="123" name="Google Shape;123;p10"/>
+          <p:cNvPr id="23" name="Google Shape;87;p6">
+            <a:extLst>
+              <a:ext uri="{FF2B5EF4-FFF2-40B4-BE49-F238E27FC236}">
+                <a16:creationId xmlns:a16="http://schemas.microsoft.com/office/drawing/2014/main" id="{3A771CCF-00B2-73C2-4249-212936ED856D}"/>
+              </a:ext>
+            </a:extLst>
+          </p:cNvPr>
           <p:cNvSpPr txBox="1"/>
           <p:nvPr/>
         </p:nvSpPr>
         <p:spPr>
           <a:xfrm>
-            <a:off x="911860" y="1628775"/>
-            <a:ext cx="9499600" cy="4549140"/>
+            <a:off x="856932" y="1901055"/>
+            <a:ext cx="6652200" cy="1597843"/>
+          </a:xfrm>
+          <a:prstGeom prst="rect">
+            <a:avLst/>
+          </a:prstGeom>
+          <a:noFill/>
+          <a:ln>
+            <a:noFill/>
+          </a:ln>
+        </p:spPr>
+        <p:txBody>
+          <a:bodyPr spcFirstLastPara="1" wrap="square" lIns="91425" tIns="91425" rIns="91425" bIns="91425" anchor="t" anchorCtr="0">
+            <a:spAutoFit/>
+          </a:bodyPr>
+          <a:lstStyle/>
+          <a:p>
+            <a:pPr marL="0" marR="0" lvl="0" indent="0" rtl="0">
+              <a:lnSpc>
+                <a:spcPct val="150000"/>
+              </a:lnSpc>
+              <a:spcBef>
+                <a:spcPts val="2000"/>
+              </a:spcBef>
+              <a:spcAft>
+                <a:spcPts val="1100"/>
+              </a:spcAft>
+              <a:buClr>
+                <a:schemeClr val="dk1"/>
+              </a:buClr>
+              <a:buSzPts val="3600"/>
+              <a:buFont typeface="Arial"/>
+              <a:buNone/>
+            </a:pPr>
+            <a:r>
+              <a:rPr lang="pt-BR" sz="4400" b="1" i="0" u="none" strike="noStrike" cap="none" dirty="0">
+                <a:solidFill>
+                  <a:schemeClr val="tx2">
+                    <a:lumMod val="90000"/>
+                  </a:schemeClr>
+                </a:solidFill>
+                <a:latin typeface="Arial"/>
+                <a:ea typeface="Arial"/>
+                <a:cs typeface="Arial"/>
+                <a:sym typeface="Arial"/>
+              </a:rPr>
+              <a:t>:</a:t>
+            </a:r>
+            <a:r>
+              <a:rPr lang="pt-BR" sz="4400" b="1" dirty="0" err="1">
+                <a:solidFill>
+                  <a:schemeClr val="tx2">
+                    <a:lumMod val="90000"/>
+                  </a:schemeClr>
+                </a:solidFill>
+              </a:rPr>
+              <a:t>first-child</a:t>
+            </a:r>
+            <a:r>
+              <a:rPr lang="pt-BR" sz="4400" b="1" dirty="0">
+                <a:solidFill>
+                  <a:schemeClr val="tx2">
+                    <a:lumMod val="90000"/>
+                  </a:schemeClr>
+                </a:solidFill>
+              </a:rPr>
+              <a:t> e :</a:t>
+            </a:r>
+            <a:r>
+              <a:rPr lang="pt-BR" sz="4400" b="1" dirty="0" err="1">
+                <a:solidFill>
+                  <a:schemeClr val="tx2">
+                    <a:lumMod val="90000"/>
+                  </a:schemeClr>
+                </a:solidFill>
+              </a:rPr>
+              <a:t>last-child</a:t>
+            </a:r>
+            <a:endParaRPr sz="4400" b="1" i="0" u="none" strike="noStrike" cap="none" dirty="0">
+              <a:solidFill>
+                <a:schemeClr val="tx2">
+                  <a:lumMod val="90000"/>
+                </a:schemeClr>
+              </a:solidFill>
+              <a:highlight>
+                <a:schemeClr val="accent6"/>
+              </a:highlight>
+              <a:latin typeface="Arial"/>
+              <a:ea typeface="Arial"/>
+              <a:cs typeface="Arial"/>
+              <a:sym typeface="Arial"/>
+            </a:endParaRPr>
+          </a:p>
+        </p:txBody>
+      </p:sp>
+      <p:sp>
+        <p:nvSpPr>
+          <p:cNvPr id="2" name="Google Shape;131;p11">
+            <a:extLst>
+              <a:ext uri="{FF2B5EF4-FFF2-40B4-BE49-F238E27FC236}">
+                <a16:creationId xmlns:a16="http://schemas.microsoft.com/office/drawing/2014/main" id="{DE332816-77A3-4979-0FD4-26686FE5A14E}"/>
+              </a:ext>
+            </a:extLst>
+          </p:cNvPr>
+          <p:cNvSpPr txBox="1"/>
+          <p:nvPr/>
+        </p:nvSpPr>
+        <p:spPr>
+          <a:xfrm>
+            <a:off x="736397" y="3247936"/>
+            <a:ext cx="10719205" cy="1002665"/>
           </a:xfrm>
           <a:prstGeom prst="rect">
             <a:avLst/>
@@ -32695,38 +29760,142 @@
           </a:bodyPr>
           <a:lstStyle/>
           <a:p>
-            <a:pPr marL="0" marR="0" lvl="0" indent="0" algn="l" rtl="0">
-              <a:lnSpc>
-                <a:spcPct val="100000"/>
-              </a:lnSpc>
-              <a:spcBef>
-                <a:spcPts val="0"/>
-              </a:spcBef>
-              <a:spcAft>
-                <a:spcPts val="0"/>
-              </a:spcAft>
-              <a:buClr>
-                <a:srgbClr val="000000"/>
-              </a:buClr>
-              <a:buSzPts val="2800"/>
+            <a:pPr marL="114300" marR="0" lvl="0" indent="0" algn="just" rtl="0">
+              <a:lnSpc>
+                <a:spcPct val="100000"/>
+              </a:lnSpc>
+              <a:spcBef>
+                <a:spcPts val="0"/>
+              </a:spcBef>
+              <a:spcAft>
+                <a:spcPts val="0"/>
+              </a:spcAft>
+              <a:buClr>
+                <a:schemeClr val="dk1"/>
+              </a:buClr>
+              <a:buSzPts val="1800"/>
               <a:buFont typeface="Arial"/>
               <a:buNone/>
             </a:pPr>
             <a:r>
-              <a:rPr lang="pt-BR" sz="2800" b="1" i="0" u="none" strike="noStrike" cap="none">
-                <a:solidFill>
-                  <a:srgbClr val="000000"/>
+              <a:rPr lang="pt-BR" sz="2400" b="0" i="0" u="none" strike="noStrike" cap="none" dirty="0">
+                <a:solidFill>
+                  <a:schemeClr val="tx2">
+                    <a:lumMod val="90000"/>
+                  </a:schemeClr>
                 </a:solidFill>
                 <a:latin typeface="Arial"/>
                 <a:ea typeface="Arial"/>
                 <a:cs typeface="Arial"/>
                 <a:sym typeface="Arial"/>
               </a:rPr>
-              <a:t>Descrição da atividade. </a:t>
+              <a:t>Usada para estilizar o </a:t>
             </a:r>
-            <a:endParaRPr sz="2800" b="1" i="0" u="none" strike="noStrike" cap="none">
+            <a:r>
+              <a:rPr lang="pt-BR" sz="2400" b="1" i="0" u="none" strike="noStrike" cap="none" dirty="0">
+                <a:solidFill>
+                  <a:srgbClr val="ED145B"/>
+                </a:solidFill>
+                <a:latin typeface="Arial"/>
+                <a:ea typeface="Arial"/>
+                <a:cs typeface="Arial"/>
+                <a:sym typeface="Arial"/>
+              </a:rPr>
+              <a:t>primeiro filho (</a:t>
+            </a:r>
+            <a:r>
+              <a:rPr lang="pt-BR" sz="2400" b="1" i="0" u="none" strike="noStrike" cap="none" dirty="0" err="1">
+                <a:solidFill>
+                  <a:srgbClr val="ED145B"/>
+                </a:solidFill>
+                <a:latin typeface="Arial"/>
+                <a:ea typeface="Arial"/>
+                <a:cs typeface="Arial"/>
+                <a:sym typeface="Arial"/>
+              </a:rPr>
+              <a:t>first-child</a:t>
+            </a:r>
+            <a:r>
+              <a:rPr lang="pt-BR" sz="2400" b="1" i="0" u="none" strike="noStrike" cap="none" dirty="0">
+                <a:solidFill>
+                  <a:srgbClr val="ED145B"/>
+                </a:solidFill>
+                <a:latin typeface="Arial"/>
+                <a:ea typeface="Arial"/>
+                <a:cs typeface="Arial"/>
+                <a:sym typeface="Arial"/>
+              </a:rPr>
+              <a:t>)</a:t>
+            </a:r>
+            <a:r>
+              <a:rPr lang="pt-BR" sz="2400" b="0" i="0" u="none" strike="noStrike" cap="none" dirty="0">
+                <a:solidFill>
+                  <a:schemeClr val="tx2">
+                    <a:lumMod val="90000"/>
+                  </a:schemeClr>
+                </a:solidFill>
+                <a:latin typeface="Arial"/>
+                <a:ea typeface="Arial"/>
+                <a:cs typeface="Arial"/>
+                <a:sym typeface="Arial"/>
+              </a:rPr>
+              <a:t> ou o </a:t>
+            </a:r>
+            <a:r>
+              <a:rPr lang="pt-BR" sz="2400" b="1" i="0" u="none" strike="noStrike" cap="none" dirty="0">
+                <a:solidFill>
+                  <a:srgbClr val="ED145B"/>
+                </a:solidFill>
+                <a:latin typeface="Arial"/>
+                <a:ea typeface="Arial"/>
+                <a:cs typeface="Arial"/>
+                <a:sym typeface="Arial"/>
+              </a:rPr>
+              <a:t>último filho (</a:t>
+            </a:r>
+            <a:r>
+              <a:rPr lang="pt-BR" sz="2400" b="1" i="0" u="none" strike="noStrike" cap="none" dirty="0" err="1">
+                <a:solidFill>
+                  <a:srgbClr val="ED145B"/>
+                </a:solidFill>
+                <a:latin typeface="Arial"/>
+                <a:ea typeface="Arial"/>
+                <a:cs typeface="Arial"/>
+                <a:sym typeface="Arial"/>
+              </a:rPr>
+              <a:t>last-child</a:t>
+            </a:r>
+            <a:r>
+              <a:rPr lang="pt-BR" sz="2400" b="1" i="0" u="none" strike="noStrike" cap="none" dirty="0">
+                <a:solidFill>
+                  <a:srgbClr val="ED145B"/>
+                </a:solidFill>
+                <a:latin typeface="Arial"/>
+                <a:ea typeface="Arial"/>
+                <a:cs typeface="Arial"/>
+                <a:sym typeface="Arial"/>
+              </a:rPr>
+              <a:t>)</a:t>
+            </a:r>
+            <a:r>
+              <a:rPr lang="pt-BR" sz="2400" b="0" i="0" u="none" strike="noStrike" cap="none" dirty="0">
+                <a:solidFill>
+                  <a:schemeClr val="tx2">
+                    <a:lumMod val="90000"/>
+                  </a:schemeClr>
+                </a:solidFill>
+                <a:latin typeface="Arial"/>
+                <a:ea typeface="Arial"/>
+                <a:cs typeface="Arial"/>
+                <a:sym typeface="Arial"/>
+              </a:rPr>
+              <a:t> dentro de uma sequência do mesmo elemento.</a:t>
+            </a:r>
+            <a:endParaRPr sz="2400" b="0" i="0" u="none" strike="noStrike" cap="none" dirty="0">
               <a:solidFill>
-                <a:srgbClr val="000000"/>
+                <a:schemeClr val="tx2">
+                  <a:lumMod val="90000"/>
+                </a:schemeClr>
               </a:solidFill>
               <a:latin typeface="Arial"/>
               <a:ea typeface="Arial"/>
@@ -32735,26 +29904,26 @@
             </a:endParaRPr>
           </a:p>
           <a:p>
-            <a:pPr marL="0" marR="0" lvl="0" indent="0" algn="l" rtl="0">
-              <a:lnSpc>
-                <a:spcPct val="100000"/>
-              </a:lnSpc>
-              <a:spcBef>
-                <a:spcPts val="0"/>
-              </a:spcBef>
-              <a:spcAft>
-                <a:spcPts val="0"/>
-              </a:spcAft>
-              <a:buClr>
-                <a:srgbClr val="000000"/>
-              </a:buClr>
-              <a:buSzPts val="2800"/>
+            <a:pPr marL="0" marR="0" lvl="0" indent="0" algn="just" rtl="0">
+              <a:lnSpc>
+                <a:spcPct val="100000"/>
+              </a:lnSpc>
+              <a:spcBef>
+                <a:spcPts val="0"/>
+              </a:spcBef>
+              <a:spcAft>
+                <a:spcPts val="0"/>
+              </a:spcAft>
+              <a:buClr>
+                <a:schemeClr val="dk1"/>
+              </a:buClr>
+              <a:buSzPts val="1100"/>
               <a:buFont typeface="Arial"/>
               <a:buNone/>
             </a:pPr>
-            <a:endParaRPr sz="2800" b="0" i="0" u="none" strike="noStrike" cap="none">
+            <a:endParaRPr sz="2200" b="0" i="0" u="none" strike="noStrike" cap="none" dirty="0">
               <a:solidFill>
-                <a:srgbClr val="000000"/>
+                <a:srgbClr val="3F3F3F"/>
               </a:solidFill>
               <a:latin typeface="Arial"/>
               <a:ea typeface="Arial"/>
@@ -32763,7 +29932,7 @@
             </a:endParaRPr>
           </a:p>
           <a:p>
-            <a:pPr marL="0" marR="0" lvl="0" indent="0" algn="l" rtl="0">
+            <a:pPr marL="0" marR="0" lvl="0" indent="0" algn="just" rtl="0">
               <a:lnSpc>
                 <a:spcPct val="100000"/>
               </a:lnSpc>
@@ -32780,21 +29949,9 @@
               <a:buFont typeface="Arial"/>
               <a:buNone/>
             </a:pPr>
-            <a:r>
-              <a:rPr lang="pt-BR" sz="2800" b="0" i="0" u="none" strike="noStrike" cap="none">
-                <a:solidFill>
-                  <a:srgbClr val="000000"/>
-                </a:solidFill>
-                <a:latin typeface="Arial"/>
-                <a:ea typeface="Arial"/>
-                <a:cs typeface="Arial"/>
-                <a:sym typeface="Arial"/>
-              </a:rPr>
-              <a:t>Instruções: Crie alguns elementos usando as tags HTML e insira nesses elementos as pseudo-classes que aprendemos:</a:t>
-            </a:r>
-            <a:endParaRPr sz="2800" b="0" i="0" u="none" strike="noStrike" cap="none">
+            <a:endParaRPr sz="2200" b="0" i="0" u="none" strike="noStrike" cap="none" dirty="0">
               <a:solidFill>
-                <a:srgbClr val="000000"/>
+                <a:srgbClr val="3F3F3F"/>
               </a:solidFill>
               <a:latin typeface="Arial"/>
               <a:ea typeface="Arial"/>
@@ -32803,7 +29960,7 @@
             </a:endParaRPr>
           </a:p>
           <a:p>
-            <a:pPr marL="0" marR="0" lvl="0" indent="0" algn="l" rtl="0">
+            <a:pPr marL="0" marR="0" lvl="0" indent="0" algn="just" rtl="0">
               <a:lnSpc>
                 <a:spcPct val="100000"/>
               </a:lnSpc>
@@ -32816,13 +29973,13 @@
               <a:buClr>
                 <a:schemeClr val="dk1"/>
               </a:buClr>
-              <a:buSzPts val="1100"/>
+              <a:buSzPts val="1600"/>
               <a:buFont typeface="Arial"/>
               <a:buNone/>
             </a:pPr>
-            <a:endParaRPr sz="2800" b="0" i="0" u="none" strike="noStrike" cap="none">
+            <a:endParaRPr sz="2200" b="0" i="0" u="none" strike="noStrike" cap="none" dirty="0">
               <a:solidFill>
-                <a:srgbClr val="000000"/>
+                <a:srgbClr val="3F3F3F"/>
               </a:solidFill>
               <a:latin typeface="Arial"/>
               <a:ea typeface="Arial"/>
@@ -32831,38 +29988,26 @@
             </a:endParaRPr>
           </a:p>
           <a:p>
-            <a:pPr marL="457200" marR="0" lvl="0" indent="-314325" algn="l" rtl="0">
-              <a:lnSpc>
-                <a:spcPct val="100000"/>
-              </a:lnSpc>
-              <a:spcBef>
-                <a:spcPts val="0"/>
-              </a:spcBef>
-              <a:spcAft>
-                <a:spcPts val="0"/>
-              </a:spcAft>
-              <a:buClr>
-                <a:srgbClr val="000000"/>
-              </a:buClr>
-              <a:buSzPts val="1350"/>
-              <a:buFont typeface="DM Sans"/>
-              <a:buChar char="✓"/>
+            <a:pPr marL="0" marR="0" lvl="0" indent="0" algn="just" rtl="0">
+              <a:lnSpc>
+                <a:spcPct val="115000"/>
+              </a:lnSpc>
+              <a:spcBef>
+                <a:spcPts val="0"/>
+              </a:spcBef>
+              <a:spcAft>
+                <a:spcPts val="0"/>
+              </a:spcAft>
+              <a:buClr>
+                <a:schemeClr val="dk1"/>
+              </a:buClr>
+              <a:buSzPts val="1800"/>
+              <a:buFont typeface="Arial"/>
+              <a:buNone/>
             </a:pPr>
-            <a:r>
-              <a:rPr lang="pt-BR" sz="2800" b="0" i="0" u="none" strike="noStrike" cap="none">
-                <a:solidFill>
-                  <a:srgbClr val="000000"/>
-                </a:solidFill>
-                <a:latin typeface="Arial"/>
-                <a:ea typeface="Arial"/>
-                <a:cs typeface="Arial"/>
-                <a:sym typeface="Arial"/>
-              </a:rPr>
-              <a:t>Hover</a:t>
-            </a:r>
-            <a:endParaRPr sz="2800" b="0" i="0" u="none" strike="noStrike" cap="none">
+            <a:endParaRPr sz="2200" b="0" i="0" u="none" strike="noStrike" cap="none" dirty="0">
               <a:solidFill>
-                <a:srgbClr val="000000"/>
+                <a:srgbClr val="3F3F3F"/>
               </a:solidFill>
               <a:latin typeface="Arial"/>
               <a:ea typeface="Arial"/>
@@ -32871,230 +30016,26 @@
             </a:endParaRPr>
           </a:p>
           <a:p>
-            <a:pPr marL="457200" marR="0" lvl="0" indent="-314325" algn="l" rtl="0">
-              <a:lnSpc>
-                <a:spcPct val="100000"/>
-              </a:lnSpc>
-              <a:spcBef>
-                <a:spcPts val="0"/>
-              </a:spcBef>
-              <a:spcAft>
-                <a:spcPts val="0"/>
-              </a:spcAft>
-              <a:buClr>
-                <a:srgbClr val="000000"/>
-              </a:buClr>
-              <a:buSzPts val="1350"/>
-              <a:buFont typeface="DM Sans"/>
-              <a:buChar char="✓"/>
-            </a:pPr>
-            <a:r>
-              <a:rPr lang="pt-BR" sz="2800" b="0" i="0" u="none" strike="noStrike" cap="none">
-                <a:solidFill>
-                  <a:srgbClr val="000000"/>
-                </a:solidFill>
-                <a:latin typeface="Arial"/>
-                <a:ea typeface="Arial"/>
-                <a:cs typeface="Arial"/>
-                <a:sym typeface="Arial"/>
-              </a:rPr>
-              <a:t>Active</a:t>
-            </a:r>
-            <a:endParaRPr sz="2800" b="0" i="0" u="none" strike="noStrike" cap="none">
-              <a:solidFill>
-                <a:srgbClr val="000000"/>
-              </a:solidFill>
-              <a:latin typeface="Arial"/>
-              <a:ea typeface="Arial"/>
-              <a:cs typeface="Arial"/>
-              <a:sym typeface="Arial"/>
-            </a:endParaRPr>
-          </a:p>
-          <a:p>
-            <a:pPr marL="457200" marR="0" lvl="0" indent="-314325" algn="l" rtl="0">
-              <a:lnSpc>
-                <a:spcPct val="100000"/>
-              </a:lnSpc>
-              <a:spcBef>
-                <a:spcPts val="0"/>
-              </a:spcBef>
-              <a:spcAft>
-                <a:spcPts val="0"/>
-              </a:spcAft>
-              <a:buClr>
-                <a:srgbClr val="000000"/>
-              </a:buClr>
-              <a:buSzPts val="1350"/>
-              <a:buFont typeface="DM Sans"/>
-              <a:buChar char="✓"/>
-            </a:pPr>
-            <a:r>
-              <a:rPr lang="pt-BR" sz="2800" b="0" i="0" u="none" strike="noStrike" cap="none">
-                <a:solidFill>
-                  <a:srgbClr val="000000"/>
-                </a:solidFill>
-                <a:latin typeface="Arial"/>
-                <a:ea typeface="Arial"/>
-                <a:cs typeface="Arial"/>
-                <a:sym typeface="Arial"/>
-              </a:rPr>
-              <a:t>Visited</a:t>
-            </a:r>
-            <a:endParaRPr sz="2800" b="0" i="0" u="none" strike="noStrike" cap="none">
-              <a:solidFill>
-                <a:srgbClr val="000000"/>
-              </a:solidFill>
-              <a:latin typeface="Arial"/>
-              <a:ea typeface="Arial"/>
-              <a:cs typeface="Arial"/>
-              <a:sym typeface="Arial"/>
-            </a:endParaRPr>
-          </a:p>
-          <a:p>
-            <a:pPr marL="457200" marR="0" lvl="0" indent="-314325" algn="l" rtl="0">
-              <a:lnSpc>
-                <a:spcPct val="100000"/>
-              </a:lnSpc>
-              <a:spcBef>
-                <a:spcPts val="0"/>
-              </a:spcBef>
-              <a:spcAft>
-                <a:spcPts val="0"/>
-              </a:spcAft>
-              <a:buClr>
-                <a:srgbClr val="000000"/>
-              </a:buClr>
-              <a:buSzPts val="1350"/>
-              <a:buFont typeface="DM Sans"/>
-              <a:buChar char="✓"/>
-            </a:pPr>
-            <a:r>
-              <a:rPr lang="pt-BR" sz="2800" b="0" i="0" u="none" strike="noStrike" cap="none">
-                <a:solidFill>
-                  <a:srgbClr val="000000"/>
-                </a:solidFill>
-                <a:latin typeface="Arial"/>
-                <a:ea typeface="Arial"/>
-                <a:cs typeface="Arial"/>
-                <a:sym typeface="Arial"/>
-              </a:rPr>
-              <a:t>Focus</a:t>
-            </a:r>
-            <a:endParaRPr sz="2800" b="0" i="0" u="none" strike="noStrike" cap="none">
-              <a:solidFill>
-                <a:srgbClr val="000000"/>
-              </a:solidFill>
-              <a:latin typeface="Arial"/>
-              <a:ea typeface="Arial"/>
-              <a:cs typeface="Arial"/>
-              <a:sym typeface="Arial"/>
-            </a:endParaRPr>
-          </a:p>
-          <a:p>
-            <a:pPr marL="0" marR="0" lvl="0" indent="0" algn="l" rtl="0">
-              <a:lnSpc>
-                <a:spcPct val="100000"/>
-              </a:lnSpc>
-              <a:spcBef>
-                <a:spcPts val="0"/>
-              </a:spcBef>
-              <a:spcAft>
-                <a:spcPts val="0"/>
-              </a:spcAft>
-              <a:buClr>
-                <a:srgbClr val="000000"/>
-              </a:buClr>
-              <a:buSzPts val="2800"/>
+            <a:pPr marL="0" marR="0" lvl="0" indent="0" algn="just" rtl="0">
+              <a:lnSpc>
+                <a:spcPct val="100000"/>
+              </a:lnSpc>
+              <a:spcBef>
+                <a:spcPts val="0"/>
+              </a:spcBef>
+              <a:spcAft>
+                <a:spcPts val="0"/>
+              </a:spcAft>
+              <a:buClr>
+                <a:schemeClr val="dk1"/>
+              </a:buClr>
+              <a:buSzPts val="1400"/>
               <a:buFont typeface="Arial"/>
               <a:buNone/>
             </a:pPr>
-            <a:endParaRPr sz="2800" b="0" i="0" u="none" strike="noStrike" cap="none">
+            <a:endParaRPr sz="2200" b="0" i="0" u="none" strike="noStrike" cap="none" dirty="0">
               <a:solidFill>
-                <a:srgbClr val="000000"/>
-              </a:solidFill>
-              <a:latin typeface="Arial"/>
-              <a:ea typeface="Arial"/>
-              <a:cs typeface="Arial"/>
-              <a:sym typeface="Arial"/>
-            </a:endParaRPr>
-          </a:p>
-          <a:p>
-            <a:pPr marL="0" marR="0" lvl="0" indent="0" algn="l" rtl="0">
-              <a:lnSpc>
-                <a:spcPct val="100000"/>
-              </a:lnSpc>
-              <a:spcBef>
-                <a:spcPts val="0"/>
-              </a:spcBef>
-              <a:spcAft>
-                <a:spcPts val="0"/>
-              </a:spcAft>
-              <a:buClr>
-                <a:srgbClr val="000000"/>
-              </a:buClr>
-              <a:buSzPts val="2800"/>
-              <a:buFont typeface="Arial"/>
-              <a:buNone/>
-            </a:pPr>
-            <a:endParaRPr sz="2800" b="0" i="0" u="none" strike="noStrike" cap="none">
-              <a:solidFill>
-                <a:srgbClr val="000000"/>
-              </a:solidFill>
-              <a:latin typeface="Arial"/>
-              <a:ea typeface="Arial"/>
-              <a:cs typeface="Arial"/>
-              <a:sym typeface="Arial"/>
-            </a:endParaRPr>
-          </a:p>
-          <a:p>
-            <a:pPr marL="0" marR="0" lvl="0" indent="0" algn="l" rtl="0">
-              <a:lnSpc>
-                <a:spcPct val="100000"/>
-              </a:lnSpc>
-              <a:spcBef>
-                <a:spcPts val="0"/>
-              </a:spcBef>
-              <a:spcAft>
-                <a:spcPts val="0"/>
-              </a:spcAft>
-              <a:buClr>
-                <a:schemeClr val="dk1"/>
-              </a:buClr>
-              <a:buSzPts val="1100"/>
-              <a:buFont typeface="Arial"/>
-              <a:buNone/>
-            </a:pPr>
-            <a:endParaRPr sz="2800" b="0" i="0" u="none" strike="noStrike" cap="none">
-              <a:solidFill>
-                <a:srgbClr val="000000"/>
-              </a:solidFill>
-              <a:latin typeface="Arial"/>
-              <a:ea typeface="Arial"/>
-              <a:cs typeface="Arial"/>
-              <a:sym typeface="Arial"/>
-            </a:endParaRPr>
-          </a:p>
-          <a:p>
-            <a:pPr marL="0" marR="0" lvl="0" indent="0" algn="l" rtl="0">
-              <a:lnSpc>
-                <a:spcPct val="100000"/>
-              </a:lnSpc>
-              <a:spcBef>
-                <a:spcPts val="0"/>
-              </a:spcBef>
-              <a:spcAft>
-                <a:spcPts val="0"/>
-              </a:spcAft>
-              <a:buClr>
-                <a:srgbClr val="000000"/>
-              </a:buClr>
-              <a:buSzPts val="2800"/>
-              <a:buFont typeface="Arial"/>
-              <a:buNone/>
-            </a:pPr>
-            <a:endParaRPr sz="2800" b="0" i="0" u="none" strike="noStrike" cap="none">
-              <a:solidFill>
-                <a:srgbClr val="000000"/>
+                <a:srgbClr val="3F3F3F"/>
               </a:solidFill>
               <a:latin typeface="Arial"/>
               <a:ea typeface="Arial"/>
@@ -33104,7 +30045,604 @@
           </a:p>
         </p:txBody>
       </p:sp>
+      <p:graphicFrame>
+        <p:nvGraphicFramePr>
+          <p:cNvPr id="4" name="Google Shape;132;p11">
+            <a:extLst>
+              <a:ext uri="{FF2B5EF4-FFF2-40B4-BE49-F238E27FC236}">
+                <a16:creationId xmlns:a16="http://schemas.microsoft.com/office/drawing/2014/main" id="{9FB6166D-37B3-0DA7-3A1B-40E823F7755C}"/>
+              </a:ext>
+            </a:extLst>
+          </p:cNvPr>
+          <p:cNvGraphicFramePr/>
+          <p:nvPr>
+            <p:extLst>
+              <p:ext uri="{D42A27DB-BD31-4B8C-83A1-F6EECF244321}">
+                <p14:modId xmlns:p14="http://schemas.microsoft.com/office/powerpoint/2010/main" val="998692989"/>
+              </p:ext>
+            </p:extLst>
+          </p:nvPr>
+        </p:nvGraphicFramePr>
+        <p:xfrm>
+          <a:off x="6623111" y="4727073"/>
+          <a:ext cx="3380100" cy="1224281"/>
+        </p:xfrm>
+        <a:graphic>
+          <a:graphicData uri="http://schemas.openxmlformats.org/drawingml/2006/table">
+            <a:tbl>
+              <a:tblPr>
+                <a:noFill/>
+                <a:tableStyleId>{63B152E9-AFB2-458E-BFAF-78D379E83702}</a:tableStyleId>
+              </a:tblPr>
+              <a:tblGrid>
+                <a:gridCol w="3380100">
+                  <a:extLst>
+                    <a:ext uri="{9D8B030D-6E8A-4147-A177-3AD203B41FA5}">
+                      <a16:colId xmlns:a16="http://schemas.microsoft.com/office/drawing/2014/main" val="20000"/>
+                    </a:ext>
+                  </a:extLst>
+                </a:gridCol>
+              </a:tblGrid>
+              <a:tr h="1224281">
+                <a:tc>
+                  <a:txBody>
+                    <a:bodyPr/>
+                    <a:lstStyle/>
+                    <a:p>
+                      <a:pPr marL="0" marR="0" lvl="0" indent="0" algn="l" rtl="0">
+                        <a:lnSpc>
+                          <a:spcPct val="100000"/>
+                        </a:lnSpc>
+                        <a:spcBef>
+                          <a:spcPts val="0"/>
+                        </a:spcBef>
+                        <a:spcAft>
+                          <a:spcPts val="0"/>
+                        </a:spcAft>
+                        <a:buClr>
+                          <a:srgbClr val="000000"/>
+                        </a:buClr>
+                        <a:buSzPts val="1600"/>
+                        <a:buFont typeface="Arial"/>
+                        <a:buNone/>
+                      </a:pPr>
+                      <a:r>
+                        <a:rPr lang="pt-BR" sz="2400" b="0" i="0" u="none" strike="noStrike" cap="none" dirty="0" err="1">
+                          <a:solidFill>
+                            <a:srgbClr val="FF79C6"/>
+                          </a:solidFill>
+                          <a:latin typeface="Consolas"/>
+                          <a:ea typeface="Consolas"/>
+                          <a:cs typeface="Consolas"/>
+                          <a:sym typeface="Consolas"/>
+                        </a:rPr>
+                        <a:t>li</a:t>
+                      </a:r>
+                      <a:r>
+                        <a:rPr lang="pt-BR" sz="2400" b="0" i="1" u="none" strike="noStrike" cap="none" dirty="0" err="1">
+                          <a:solidFill>
+                            <a:srgbClr val="FF79C6"/>
+                          </a:solidFill>
+                          <a:latin typeface="Consolas"/>
+                          <a:ea typeface="Consolas"/>
+                          <a:cs typeface="Consolas"/>
+                          <a:sym typeface="Consolas"/>
+                        </a:rPr>
+                        <a:t>:</a:t>
+                      </a:r>
+                      <a:r>
+                        <a:rPr lang="pt-BR" sz="2400" b="0" i="1" u="none" strike="noStrike" cap="none" dirty="0" err="1">
+                          <a:solidFill>
+                            <a:srgbClr val="50FA7B"/>
+                          </a:solidFill>
+                          <a:latin typeface="Consolas"/>
+                          <a:ea typeface="Consolas"/>
+                          <a:cs typeface="Consolas"/>
+                          <a:sym typeface="Consolas"/>
+                        </a:rPr>
+                        <a:t>last-child</a:t>
+                      </a:r>
+                      <a:r>
+                        <a:rPr lang="pt-BR" sz="2400" b="0" i="0" u="none" strike="noStrike" cap="none" dirty="0">
+                          <a:solidFill>
+                            <a:srgbClr val="F8F8F2"/>
+                          </a:solidFill>
+                          <a:latin typeface="Consolas"/>
+                          <a:ea typeface="Consolas"/>
+                          <a:cs typeface="Consolas"/>
+                          <a:sym typeface="Consolas"/>
+                        </a:rPr>
+                        <a:t> { </a:t>
+                      </a:r>
+                      <a:endParaRPr sz="2400" u="none" strike="noStrike" cap="none" dirty="0"/>
+                    </a:p>
+                    <a:p>
+                      <a:pPr marL="0" marR="0" lvl="0" indent="0" algn="l" rtl="0">
+                        <a:lnSpc>
+                          <a:spcPct val="100000"/>
+                        </a:lnSpc>
+                        <a:spcBef>
+                          <a:spcPts val="0"/>
+                        </a:spcBef>
+                        <a:spcAft>
+                          <a:spcPts val="0"/>
+                        </a:spcAft>
+                        <a:buClr>
+                          <a:srgbClr val="000000"/>
+                        </a:buClr>
+                        <a:buSzPts val="1600"/>
+                        <a:buFont typeface="Arial"/>
+                        <a:buNone/>
+                      </a:pPr>
+                      <a:r>
+                        <a:rPr lang="pt-BR" sz="2400" b="0" i="0" u="none" strike="noStrike" cap="none" dirty="0">
+                          <a:solidFill>
+                            <a:srgbClr val="F8F8F2"/>
+                          </a:solidFill>
+                          <a:latin typeface="Consolas"/>
+                          <a:ea typeface="Consolas"/>
+                          <a:cs typeface="Consolas"/>
+                          <a:sym typeface="Consolas"/>
+                        </a:rPr>
+                        <a:t>    </a:t>
+                      </a:r>
+                      <a:r>
+                        <a:rPr lang="pt-BR" sz="2400" b="0" i="0" u="none" strike="noStrike" cap="none" dirty="0">
+                          <a:solidFill>
+                            <a:srgbClr val="8BE9FD"/>
+                          </a:solidFill>
+                          <a:latin typeface="Consolas"/>
+                          <a:ea typeface="Consolas"/>
+                          <a:cs typeface="Consolas"/>
+                          <a:sym typeface="Consolas"/>
+                        </a:rPr>
+                        <a:t>color</a:t>
+                      </a:r>
+                      <a:r>
+                        <a:rPr lang="pt-BR" sz="2400" b="0" i="0" u="none" strike="noStrike" cap="none" dirty="0">
+                          <a:solidFill>
+                            <a:srgbClr val="FF79C6"/>
+                          </a:solidFill>
+                          <a:latin typeface="Consolas"/>
+                          <a:ea typeface="Consolas"/>
+                          <a:cs typeface="Consolas"/>
+                          <a:sym typeface="Consolas"/>
+                        </a:rPr>
+                        <a:t>:</a:t>
+                      </a:r>
+                      <a:r>
+                        <a:rPr lang="pt-BR" sz="2400" b="0" i="0" u="none" strike="noStrike" cap="none" dirty="0">
+                          <a:solidFill>
+                            <a:srgbClr val="F8F8F2"/>
+                          </a:solidFill>
+                          <a:latin typeface="Consolas"/>
+                          <a:ea typeface="Consolas"/>
+                          <a:cs typeface="Consolas"/>
+                          <a:sym typeface="Consolas"/>
+                        </a:rPr>
+                        <a:t> </a:t>
+                      </a:r>
+                      <a:r>
+                        <a:rPr lang="pt-BR" sz="2400" b="0" i="0" u="none" strike="noStrike" cap="none" dirty="0" err="1">
+                          <a:solidFill>
+                            <a:srgbClr val="BD93F9"/>
+                          </a:solidFill>
+                          <a:latin typeface="Consolas"/>
+                          <a:ea typeface="Consolas"/>
+                          <a:cs typeface="Consolas"/>
+                          <a:sym typeface="Consolas"/>
+                        </a:rPr>
+                        <a:t>red</a:t>
+                      </a:r>
+                      <a:r>
+                        <a:rPr lang="pt-BR" sz="2400" b="0" i="0" u="none" strike="noStrike" cap="none" dirty="0">
+                          <a:solidFill>
+                            <a:srgbClr val="F8F8F2"/>
+                          </a:solidFill>
+                          <a:latin typeface="Consolas"/>
+                          <a:ea typeface="Consolas"/>
+                          <a:cs typeface="Consolas"/>
+                          <a:sym typeface="Consolas"/>
+                        </a:rPr>
+                        <a:t>; </a:t>
+                      </a:r>
+                      <a:endParaRPr sz="2400" u="none" strike="noStrike" cap="none" dirty="0"/>
+                    </a:p>
+                    <a:p>
+                      <a:pPr marL="0" marR="0" lvl="0" indent="0" algn="l" rtl="0">
+                        <a:lnSpc>
+                          <a:spcPct val="100000"/>
+                        </a:lnSpc>
+                        <a:spcBef>
+                          <a:spcPts val="0"/>
+                        </a:spcBef>
+                        <a:spcAft>
+                          <a:spcPts val="0"/>
+                        </a:spcAft>
+                        <a:buClr>
+                          <a:srgbClr val="000000"/>
+                        </a:buClr>
+                        <a:buSzPts val="1600"/>
+                        <a:buFont typeface="Arial"/>
+                        <a:buNone/>
+                      </a:pPr>
+                      <a:r>
+                        <a:rPr lang="pt-BR" sz="2400" b="0" i="0" u="none" strike="noStrike" cap="none" dirty="0">
+                          <a:solidFill>
+                            <a:srgbClr val="F8F8F2"/>
+                          </a:solidFill>
+                          <a:latin typeface="Consolas"/>
+                          <a:ea typeface="Consolas"/>
+                          <a:cs typeface="Consolas"/>
+                          <a:sym typeface="Consolas"/>
+                        </a:rPr>
+                        <a:t>}</a:t>
+                      </a:r>
+                      <a:endParaRPr sz="2400" b="0" i="0" u="none" strike="noStrike" cap="none" dirty="0">
+                        <a:solidFill>
+                          <a:srgbClr val="F8F8F2"/>
+                        </a:solidFill>
+                        <a:latin typeface="Consolas"/>
+                        <a:ea typeface="Consolas"/>
+                        <a:cs typeface="Consolas"/>
+                        <a:sym typeface="Consolas"/>
+                      </a:endParaRPr>
+                    </a:p>
+                  </a:txBody>
+                  <a:tcPr marL="63500" marR="63500" marT="63500" marB="63500">
+                    <a:lnL w="38100" cap="flat" cmpd="sng">
+                      <a:solidFill>
+                        <a:srgbClr val="EAFF6A"/>
+                      </a:solidFill>
+                      <a:prstDash val="solid"/>
+                      <a:round/>
+                      <a:headEnd type="none" w="sm" len="sm"/>
+                      <a:tailEnd type="none" w="sm" len="sm"/>
+                    </a:lnL>
+                    <a:lnR w="38100" cap="flat" cmpd="sng">
+                      <a:solidFill>
+                        <a:srgbClr val="EAFF6A"/>
+                      </a:solidFill>
+                      <a:prstDash val="solid"/>
+                      <a:round/>
+                      <a:headEnd type="none" w="sm" len="sm"/>
+                      <a:tailEnd type="none" w="sm" len="sm"/>
+                    </a:lnR>
+                    <a:lnT w="38100" cap="flat" cmpd="sng">
+                      <a:solidFill>
+                        <a:srgbClr val="EAFF6A"/>
+                      </a:solidFill>
+                      <a:prstDash val="solid"/>
+                      <a:round/>
+                      <a:headEnd type="none" w="sm" len="sm"/>
+                      <a:tailEnd type="none" w="sm" len="sm"/>
+                    </a:lnT>
+                    <a:lnB w="38100" cap="flat" cmpd="sng">
+                      <a:solidFill>
+                        <a:srgbClr val="EAFF6A"/>
+                      </a:solidFill>
+                      <a:prstDash val="solid"/>
+                      <a:round/>
+                      <a:headEnd type="none" w="sm" len="sm"/>
+                      <a:tailEnd type="none" w="sm" len="sm"/>
+                    </a:lnB>
+                    <a:solidFill>
+                      <a:srgbClr val="0C343D"/>
+                    </a:solidFill>
+                  </a:tcPr>
+                </a:tc>
+                <a:extLst>
+                  <a:ext uri="{0D108BD9-81ED-4DB2-BD59-A6C34878D82A}">
+                    <a16:rowId xmlns:a16="http://schemas.microsoft.com/office/drawing/2014/main" val="10000"/>
+                  </a:ext>
+                </a:extLst>
+              </a:tr>
+            </a:tbl>
+          </a:graphicData>
+        </a:graphic>
+      </p:graphicFrame>
+      <p:graphicFrame>
+        <p:nvGraphicFramePr>
+          <p:cNvPr id="5" name="Google Shape;132;p11">
+            <a:extLst>
+              <a:ext uri="{FF2B5EF4-FFF2-40B4-BE49-F238E27FC236}">
+                <a16:creationId xmlns:a16="http://schemas.microsoft.com/office/drawing/2014/main" id="{B5319B39-64AA-CFED-AB11-7F6A51A3558D}"/>
+              </a:ext>
+            </a:extLst>
+          </p:cNvPr>
+          <p:cNvGraphicFramePr/>
+          <p:nvPr>
+            <p:extLst>
+              <p:ext uri="{D42A27DB-BD31-4B8C-83A1-F6EECF244321}">
+                <p14:modId xmlns:p14="http://schemas.microsoft.com/office/powerpoint/2010/main" val="1948257197"/>
+              </p:ext>
+            </p:extLst>
+          </p:nvPr>
+        </p:nvGraphicFramePr>
+        <p:xfrm>
+          <a:off x="1902630" y="4730816"/>
+          <a:ext cx="3380100" cy="1224280"/>
+        </p:xfrm>
+        <a:graphic>
+          <a:graphicData uri="http://schemas.openxmlformats.org/drawingml/2006/table">
+            <a:tbl>
+              <a:tblPr>
+                <a:noFill/>
+                <a:tableStyleId>{63B152E9-AFB2-458E-BFAF-78D379E83702}</a:tableStyleId>
+              </a:tblPr>
+              <a:tblGrid>
+                <a:gridCol w="3380100">
+                  <a:extLst>
+                    <a:ext uri="{9D8B030D-6E8A-4147-A177-3AD203B41FA5}">
+                      <a16:colId xmlns:a16="http://schemas.microsoft.com/office/drawing/2014/main" val="20000"/>
+                    </a:ext>
+                  </a:extLst>
+                </a:gridCol>
+              </a:tblGrid>
+              <a:tr h="1207634">
+                <a:tc>
+                  <a:txBody>
+                    <a:bodyPr/>
+                    <a:lstStyle/>
+                    <a:p>
+                      <a:pPr marL="0" marR="0" lvl="0" indent="0" algn="l" rtl="0">
+                        <a:lnSpc>
+                          <a:spcPct val="100000"/>
+                        </a:lnSpc>
+                        <a:spcBef>
+                          <a:spcPts val="0"/>
+                        </a:spcBef>
+                        <a:spcAft>
+                          <a:spcPts val="0"/>
+                        </a:spcAft>
+                        <a:buClr>
+                          <a:srgbClr val="000000"/>
+                        </a:buClr>
+                        <a:buSzPts val="1600"/>
+                        <a:buFont typeface="Arial"/>
+                        <a:buNone/>
+                      </a:pPr>
+                      <a:r>
+                        <a:rPr lang="pt-BR" sz="2400" b="0" u="none" strike="noStrike" cap="none" dirty="0" err="1">
+                          <a:solidFill>
+                            <a:srgbClr val="FF79C6"/>
+                          </a:solidFill>
+                          <a:latin typeface="Consolas"/>
+                          <a:ea typeface="Consolas"/>
+                          <a:cs typeface="Consolas"/>
+                          <a:sym typeface="Consolas"/>
+                        </a:rPr>
+                        <a:t>li</a:t>
+                      </a:r>
+                      <a:r>
+                        <a:rPr lang="pt-BR" sz="2400" b="0" i="1" u="none" strike="noStrike" cap="none" dirty="0" err="1">
+                          <a:solidFill>
+                            <a:srgbClr val="FF79C6"/>
+                          </a:solidFill>
+                          <a:latin typeface="Consolas"/>
+                          <a:ea typeface="Consolas"/>
+                          <a:cs typeface="Consolas"/>
+                          <a:sym typeface="Consolas"/>
+                        </a:rPr>
+                        <a:t>:</a:t>
+                      </a:r>
+                      <a:r>
+                        <a:rPr lang="pt-BR" sz="2400" b="0" i="1" u="none" strike="noStrike" cap="none" dirty="0" err="1">
+                          <a:solidFill>
+                            <a:srgbClr val="50FA7B"/>
+                          </a:solidFill>
+                          <a:latin typeface="Consolas"/>
+                          <a:ea typeface="Consolas"/>
+                          <a:cs typeface="Consolas"/>
+                          <a:sym typeface="Consolas"/>
+                        </a:rPr>
+                        <a:t>first-child</a:t>
+                      </a:r>
+                      <a:r>
+                        <a:rPr lang="pt-BR" sz="2400" b="0" u="none" strike="noStrike" cap="none" dirty="0">
+                          <a:solidFill>
+                            <a:srgbClr val="F8F8F2"/>
+                          </a:solidFill>
+                          <a:latin typeface="Consolas"/>
+                          <a:ea typeface="Consolas"/>
+                          <a:cs typeface="Consolas"/>
+                          <a:sym typeface="Consolas"/>
+                        </a:rPr>
+                        <a:t> { </a:t>
+                      </a:r>
+                      <a:endParaRPr sz="2400" u="none" strike="noStrike" cap="none" dirty="0"/>
+                    </a:p>
+                    <a:p>
+                      <a:pPr marL="0" marR="0" lvl="0" indent="0" algn="l" rtl="0">
+                        <a:lnSpc>
+                          <a:spcPct val="100000"/>
+                        </a:lnSpc>
+                        <a:spcBef>
+                          <a:spcPts val="0"/>
+                        </a:spcBef>
+                        <a:spcAft>
+                          <a:spcPts val="0"/>
+                        </a:spcAft>
+                        <a:buClr>
+                          <a:srgbClr val="000000"/>
+                        </a:buClr>
+                        <a:buSzPts val="1600"/>
+                        <a:buFont typeface="Arial"/>
+                        <a:buNone/>
+                      </a:pPr>
+                      <a:r>
+                        <a:rPr lang="pt-BR" sz="2400" b="0" u="none" strike="noStrike" cap="none" dirty="0">
+                          <a:solidFill>
+                            <a:srgbClr val="F8F8F2"/>
+                          </a:solidFill>
+                          <a:latin typeface="Consolas"/>
+                          <a:ea typeface="Consolas"/>
+                          <a:cs typeface="Consolas"/>
+                          <a:sym typeface="Consolas"/>
+                        </a:rPr>
+                        <a:t>    </a:t>
+                      </a:r>
+                      <a:r>
+                        <a:rPr lang="pt-BR" sz="2400" b="0" u="none" strike="noStrike" cap="none" dirty="0">
+                          <a:solidFill>
+                            <a:srgbClr val="8BE9FD"/>
+                          </a:solidFill>
+                          <a:latin typeface="Consolas"/>
+                          <a:ea typeface="Consolas"/>
+                          <a:cs typeface="Consolas"/>
+                          <a:sym typeface="Consolas"/>
+                        </a:rPr>
+                        <a:t>color</a:t>
+                      </a:r>
+                      <a:r>
+                        <a:rPr lang="pt-BR" sz="2400" b="0" u="none" strike="noStrike" cap="none" dirty="0">
+                          <a:solidFill>
+                            <a:srgbClr val="FF79C6"/>
+                          </a:solidFill>
+                          <a:latin typeface="Consolas"/>
+                          <a:ea typeface="Consolas"/>
+                          <a:cs typeface="Consolas"/>
+                          <a:sym typeface="Consolas"/>
+                        </a:rPr>
+                        <a:t>:</a:t>
+                      </a:r>
+                      <a:r>
+                        <a:rPr lang="pt-BR" sz="2400" b="0" u="none" strike="noStrike" cap="none" dirty="0">
+                          <a:solidFill>
+                            <a:srgbClr val="F8F8F2"/>
+                          </a:solidFill>
+                          <a:latin typeface="Consolas"/>
+                          <a:ea typeface="Consolas"/>
+                          <a:cs typeface="Consolas"/>
+                          <a:sym typeface="Consolas"/>
+                        </a:rPr>
+                        <a:t> </a:t>
+                      </a:r>
+                      <a:r>
+                        <a:rPr lang="pt-BR" sz="2400" b="0" u="none" strike="noStrike" cap="none" dirty="0" err="1">
+                          <a:solidFill>
+                            <a:srgbClr val="BD93F9"/>
+                          </a:solidFill>
+                          <a:latin typeface="Consolas"/>
+                          <a:ea typeface="Consolas"/>
+                          <a:cs typeface="Consolas"/>
+                          <a:sym typeface="Consolas"/>
+                        </a:rPr>
+                        <a:t>orange</a:t>
+                      </a:r>
+                      <a:r>
+                        <a:rPr lang="pt-BR" sz="2400" b="0" u="none" strike="noStrike" cap="none" dirty="0">
+                          <a:solidFill>
+                            <a:srgbClr val="F8F8F2"/>
+                          </a:solidFill>
+                          <a:latin typeface="Consolas"/>
+                          <a:ea typeface="Consolas"/>
+                          <a:cs typeface="Consolas"/>
+                          <a:sym typeface="Consolas"/>
+                        </a:rPr>
+                        <a:t>; </a:t>
+                      </a:r>
+                      <a:endParaRPr sz="2400" u="none" strike="noStrike" cap="none" dirty="0"/>
+                    </a:p>
+                    <a:p>
+                      <a:pPr marL="0" marR="0" lvl="0" indent="0" algn="l" rtl="0">
+                        <a:lnSpc>
+                          <a:spcPct val="100000"/>
+                        </a:lnSpc>
+                        <a:spcBef>
+                          <a:spcPts val="0"/>
+                        </a:spcBef>
+                        <a:spcAft>
+                          <a:spcPts val="0"/>
+                        </a:spcAft>
+                        <a:buClr>
+                          <a:srgbClr val="000000"/>
+                        </a:buClr>
+                        <a:buSzPts val="1600"/>
+                        <a:buFont typeface="Arial"/>
+                        <a:buNone/>
+                      </a:pPr>
+                      <a:r>
+                        <a:rPr lang="pt-BR" sz="2400" b="0" u="none" strike="noStrike" cap="none" dirty="0">
+                          <a:solidFill>
+                            <a:srgbClr val="F8F8F2"/>
+                          </a:solidFill>
+                          <a:latin typeface="Consolas"/>
+                          <a:ea typeface="Consolas"/>
+                          <a:cs typeface="Consolas"/>
+                          <a:sym typeface="Consolas"/>
+                        </a:rPr>
+                        <a:t>}</a:t>
+                      </a:r>
+                      <a:endParaRPr sz="2400" b="0" i="0" u="none" strike="noStrike" cap="none" dirty="0">
+                        <a:solidFill>
+                          <a:srgbClr val="F8F8F2"/>
+                        </a:solidFill>
+                        <a:latin typeface="Consolas"/>
+                        <a:ea typeface="Consolas"/>
+                        <a:cs typeface="Consolas"/>
+                        <a:sym typeface="Consolas"/>
+                      </a:endParaRPr>
+                    </a:p>
+                  </a:txBody>
+                  <a:tcPr marL="63500" marR="63500" marT="63500" marB="63500">
+                    <a:lnL w="38100" cap="flat" cmpd="sng">
+                      <a:solidFill>
+                        <a:srgbClr val="EAFF6A"/>
+                      </a:solidFill>
+                      <a:prstDash val="solid"/>
+                      <a:round/>
+                      <a:headEnd type="none" w="sm" len="sm"/>
+                      <a:tailEnd type="none" w="sm" len="sm"/>
+                    </a:lnL>
+                    <a:lnR w="38100" cap="flat" cmpd="sng">
+                      <a:solidFill>
+                        <a:srgbClr val="EAFF6A"/>
+                      </a:solidFill>
+                      <a:prstDash val="solid"/>
+                      <a:round/>
+                      <a:headEnd type="none" w="sm" len="sm"/>
+                      <a:tailEnd type="none" w="sm" len="sm"/>
+                    </a:lnR>
+                    <a:lnT w="38100" cap="flat" cmpd="sng">
+                      <a:solidFill>
+                        <a:srgbClr val="EAFF6A"/>
+                      </a:solidFill>
+                      <a:prstDash val="solid"/>
+                      <a:round/>
+                      <a:headEnd type="none" w="sm" len="sm"/>
+                      <a:tailEnd type="none" w="sm" len="sm"/>
+                    </a:lnT>
+                    <a:lnB w="38100" cap="flat" cmpd="sng">
+                      <a:solidFill>
+                        <a:srgbClr val="EAFF6A"/>
+                      </a:solidFill>
+                      <a:prstDash val="solid"/>
+                      <a:round/>
+                      <a:headEnd type="none" w="sm" len="sm"/>
+                      <a:tailEnd type="none" w="sm" len="sm"/>
+                    </a:lnB>
+                    <a:solidFill>
+                      <a:srgbClr val="0C343D"/>
+                    </a:solidFill>
+                  </a:tcPr>
+                </a:tc>
+                <a:extLst>
+                  <a:ext uri="{0D108BD9-81ED-4DB2-BD59-A6C34878D82A}">
+                    <a16:rowId xmlns:a16="http://schemas.microsoft.com/office/drawing/2014/main" val="10000"/>
+                  </a:ext>
+                </a:extLst>
+              </a:tr>
+            </a:tbl>
+          </a:graphicData>
+        </a:graphic>
+      </p:graphicFrame>
     </p:spTree>
+    <p:extLst>
+      <p:ext uri="{BB962C8B-B14F-4D97-AF65-F5344CB8AC3E}">
+        <p14:creationId xmlns:p14="http://schemas.microsoft.com/office/powerpoint/2010/main" val="1181597645"/>
+      </p:ext>
+    </p:extLst>
   </p:cSld>
   <p:clrMapOvr>
     <a:masterClrMapping/>
